--- a/lessons/lesson-14/slides.pptx
+++ b/lessons/lesson-14/slides.pptx
@@ -2,29 +2,30 @@
 <file path=ppt/presentation.xml><?xml version="1.0" encoding="utf-8"?>
 <p:presentation xmlns:p="http://schemas.openxmlformats.org/presentationml/2006/main">
   <p:sldMasterIdLst>
-    <p:sldMasterId xmlns:r="http://schemas.openxmlformats.org/officeDocument/2006/relationships" id="2147483648" r:id="R0f82fa453a624a89"/>
+    <p:sldMasterId xmlns:r="http://schemas.openxmlformats.org/officeDocument/2006/relationships" id="2147483648" r:id="R572ad7e88f0d4c46"/>
   </p:sldMasterIdLst>
   <p:notesMasterIdLst>
-    <p:notesMasterId xmlns:r="http://schemas.openxmlformats.org/officeDocument/2006/relationships" r:id="R64b9ba371e5c452c"/>
+    <p:notesMasterId xmlns:r="http://schemas.openxmlformats.org/officeDocument/2006/relationships" r:id="R6346d6a751ae4f85"/>
   </p:notesMasterIdLst>
   <p:sldIdLst>
-    <p:sldId xmlns:r="http://schemas.openxmlformats.org/officeDocument/2006/relationships" id="256" r:id="R63d54e2449604f3b"/>
-    <p:sldId xmlns:r="http://schemas.openxmlformats.org/officeDocument/2006/relationships" id="257" r:id="R366f39be52284ef2"/>
-    <p:sldId xmlns:r="http://schemas.openxmlformats.org/officeDocument/2006/relationships" id="258" r:id="Ra33f0861728b4574"/>
-    <p:sldId xmlns:r="http://schemas.openxmlformats.org/officeDocument/2006/relationships" id="259" r:id="R7db466700c2f47cc"/>
-    <p:sldId xmlns:r="http://schemas.openxmlformats.org/officeDocument/2006/relationships" id="260" r:id="R762f698c50db48a4"/>
-    <p:sldId xmlns:r="http://schemas.openxmlformats.org/officeDocument/2006/relationships" id="261" r:id="R16d44845944c47d1"/>
-    <p:sldId xmlns:r="http://schemas.openxmlformats.org/officeDocument/2006/relationships" id="262" r:id="Rbbbcbcfadf4d4516"/>
-    <p:sldId xmlns:r="http://schemas.openxmlformats.org/officeDocument/2006/relationships" id="263" r:id="Reaa8e12019414ace"/>
-    <p:sldId xmlns:r="http://schemas.openxmlformats.org/officeDocument/2006/relationships" id="264" r:id="Ra0302bb1714e41fc"/>
-    <p:sldId xmlns:r="http://schemas.openxmlformats.org/officeDocument/2006/relationships" id="265" r:id="R10bddd7754be4afc"/>
-    <p:sldId xmlns:r="http://schemas.openxmlformats.org/officeDocument/2006/relationships" id="266" r:id="R1cc2190b22e546d5"/>
-    <p:sldId xmlns:r="http://schemas.openxmlformats.org/officeDocument/2006/relationships" id="267" r:id="R1f9e1d9afb664af0"/>
-    <p:sldId xmlns:r="http://schemas.openxmlformats.org/officeDocument/2006/relationships" id="268" r:id="R33a9bd12cd3e4d89"/>
-    <p:sldId xmlns:r="http://schemas.openxmlformats.org/officeDocument/2006/relationships" id="269" r:id="Rb001c1ffee844a06"/>
-    <p:sldId xmlns:r="http://schemas.openxmlformats.org/officeDocument/2006/relationships" id="270" r:id="Rd3dc214994964098"/>
-    <p:sldId xmlns:r="http://schemas.openxmlformats.org/officeDocument/2006/relationships" id="271" r:id="R18c018addf6b4b83"/>
-    <p:sldId xmlns:r="http://schemas.openxmlformats.org/officeDocument/2006/relationships" id="272" r:id="R664899dd02834e37"/>
+    <p:sldId xmlns:r="http://schemas.openxmlformats.org/officeDocument/2006/relationships" id="256" r:id="R2fed1355e7634ec7"/>
+    <p:sldId xmlns:r="http://schemas.openxmlformats.org/officeDocument/2006/relationships" id="257" r:id="R827cac4e8b4d4a70"/>
+    <p:sldId xmlns:r="http://schemas.openxmlformats.org/officeDocument/2006/relationships" id="258" r:id="Rd761225431c64bbd"/>
+    <p:sldId xmlns:r="http://schemas.openxmlformats.org/officeDocument/2006/relationships" id="259" r:id="Rbf921e34a1564394"/>
+    <p:sldId xmlns:r="http://schemas.openxmlformats.org/officeDocument/2006/relationships" id="260" r:id="R1fd98df9acee455c"/>
+    <p:sldId xmlns:r="http://schemas.openxmlformats.org/officeDocument/2006/relationships" id="261" r:id="R5e38a6b45117481d"/>
+    <p:sldId xmlns:r="http://schemas.openxmlformats.org/officeDocument/2006/relationships" id="262" r:id="Ra0a2dd18ebb94ca4"/>
+    <p:sldId xmlns:r="http://schemas.openxmlformats.org/officeDocument/2006/relationships" id="263" r:id="R6b4300bf31fc43be"/>
+    <p:sldId xmlns:r="http://schemas.openxmlformats.org/officeDocument/2006/relationships" id="264" r:id="R104c8b9535ee4272"/>
+    <p:sldId xmlns:r="http://schemas.openxmlformats.org/officeDocument/2006/relationships" id="265" r:id="R8a0320da8e264e7e"/>
+    <p:sldId xmlns:r="http://schemas.openxmlformats.org/officeDocument/2006/relationships" id="266" r:id="Re373cb148a2740fd"/>
+    <p:sldId xmlns:r="http://schemas.openxmlformats.org/officeDocument/2006/relationships" id="267" r:id="Rf2c18180f9aa4883"/>
+    <p:sldId xmlns:r="http://schemas.openxmlformats.org/officeDocument/2006/relationships" id="268" r:id="R32775b33076644ab"/>
+    <p:sldId xmlns:r="http://schemas.openxmlformats.org/officeDocument/2006/relationships" id="269" r:id="Rf46bb3346e8543e1"/>
+    <p:sldId xmlns:r="http://schemas.openxmlformats.org/officeDocument/2006/relationships" id="270" r:id="R30940005a7dc418f"/>
+    <p:sldId xmlns:r="http://schemas.openxmlformats.org/officeDocument/2006/relationships" id="271" r:id="Rc0d41412928a4d8e"/>
+    <p:sldId xmlns:r="http://schemas.openxmlformats.org/officeDocument/2006/relationships" id="272" r:id="R0c3263ec291b4fe4"/>
+    <p:sldId xmlns:r="http://schemas.openxmlformats.org/officeDocument/2006/relationships" id="273" r:id="R1bde187198194076"/>
   </p:sldIdLst>
   <p:sldSz cx="12192000" cy="6858000"/>
   <p:notesSz cx="6858000" cy="9144000"/>
@@ -404,7 +405,7 @@
           <a:lstStyle xmlns:a="http://schemas.openxmlformats.org/drawingml/2006/main"/>
           <a:p xmlns:a="http://schemas.openxmlformats.org/drawingml/2006/main">
             <a:r>
-              <a:t>开场放下第 13 课验证门材料：它们回答工作流是否改善科研动作，但还不是面向同行的研究论证。本课把内部材料回写为论文式短文初版，并为第 15 课同行评审准备可检查输入。</a:t>
+              <a:t>本讲聚焦“论文式表达与回写”。封面只保留正式课名，课堂问题从下一页展开。</a:t>
             </a:r>
           </a:p>
           <a:p xmlns:a="http://schemas.openxmlformats.org/drawingml/2006/main">
@@ -419,17 +420,12 @@
           </a:p>
           <a:p xmlns:a="http://schemas.openxmlformats.org/drawingml/2006/main">
             <a:r>
-              <a:t>- /Users/bright/Projects/courses/graduate/lessons/lesson-14/handout.md</a:t>
-            </a:r>
-          </a:p>
-          <a:p xmlns:a="http://schemas.openxmlformats.org/drawingml/2006/main">
-            <a:r>
-              <a:t>- /Users/bright/Projects/courses/graduate/lessons/备课规划.md</a:t>
-            </a:r>
-          </a:p>
-          <a:p xmlns:a="http://schemas.openxmlformats.org/drawingml/2006/main">
-            <a:r>
               <a:t>- /Users/bright/Projects/courses/graduate/course/syllabus.md</a:t>
+            </a:r>
+          </a:p>
+          <a:p xmlns:a="http://schemas.openxmlformats.org/drawingml/2006/main">
+            <a:r>
+              <a:t>- /Users/bright/Projects/courses/graduate/lessons/lesson-14/slides.md</a:t>
             </a:r>
           </a:p>
           <a:p xmlns:a="http://schemas.openxmlformats.org/drawingml/2006/main">
@@ -1099,7 +1095,7 @@
           <a:lstStyle xmlns:a="http://schemas.openxmlformats.org/drawingml/2006/main"/>
           <a:p xmlns:a="http://schemas.openxmlformats.org/drawingml/2006/main">
             <a:r>
-              <a:t>回扣目标：初版已经形成可继续检查的起点，不等于终稿或正式提交。第 15 课在本课产出上做同行评审与修改。</a:t>
+              <a:t>回收本讲核心概念及其关系。本页不新增任务；请学生用边界句检查自己的项目工件。</a:t>
             </a:r>
           </a:p>
           <a:p xmlns:a="http://schemas.openxmlformats.org/drawingml/2006/main">
@@ -1114,17 +1110,17 @@
           </a:p>
           <a:p xmlns:a="http://schemas.openxmlformats.org/drawingml/2006/main">
             <a:r>
-              <a:t>- /Users/bright/Projects/courses/graduate/course/assignments.md</a:t>
-            </a:r>
-          </a:p>
-          <a:p xmlns:a="http://schemas.openxmlformats.org/drawingml/2006/main">
-            <a:r>
-              <a:t>- /Users/bright/Projects/courses/graduate/lessons/备课规划.md</a:t>
+              <a:t>- /Users/bright/Projects/courses/graduate/course/syllabus.md</a:t>
             </a:r>
           </a:p>
           <a:p xmlns:a="http://schemas.openxmlformats.org/drawingml/2006/main">
             <a:r>
               <a:t>- /Users/bright/Projects/courses/graduate/lessons/lesson-14/handout.md</a:t>
+            </a:r>
+          </a:p>
+          <a:p xmlns:a="http://schemas.openxmlformats.org/drawingml/2006/main">
+            <a:r>
+              <a:t>- /Users/bright/Projects/courses/graduate/lessons/lesson-14/slides.md</a:t>
             </a:r>
           </a:p>
           <a:p xmlns:a="http://schemas.openxmlformats.org/drawingml/2006/main">
@@ -1160,6 +1156,106 @@
 </file>
 
 <file path=ppt/notesSlides/notesSlide17.xml><?xml version="1.0" encoding="utf-8"?>
+<p:notes xmlns:p="http://schemas.openxmlformats.org/presentationml/2006/main">
+  <p:cSld>
+    <p:spTree>
+      <p:nvGrpSpPr>
+        <p:cNvPr id="1" name=""/>
+        <p:cNvGrpSpPr/>
+        <p:nvPr/>
+      </p:nvGrpSpPr>
+      <p:grpSpPr>
+        <a:xfrm xmlns:a="http://schemas.openxmlformats.org/drawingml/2006/main"/>
+      </p:grpSpPr>
+      <p:sp>
+        <p:nvSpPr>
+          <p:cNvPr id="2" name="Slide Image Placeholder 1"/>
+          <p:cNvSpPr>
+            <a:spLocks xmlns:a="http://schemas.openxmlformats.org/drawingml/2006/main" noGrp="1"/>
+          </p:cNvSpPr>
+          <p:nvPr>
+            <p:ph type="sldImg" idx="0"/>
+          </p:nvPr>
+        </p:nvSpPr>
+        <p:spPr/>
+      </p:sp>
+      <p:sp>
+        <p:nvSpPr>
+          <p:cNvPr id="3" name="Notes Placeholder 2"/>
+          <p:cNvSpPr>
+            <a:spLocks xmlns:a="http://schemas.openxmlformats.org/drawingml/2006/main" noGrp="1"/>
+          </p:cNvSpPr>
+          <p:nvPr>
+            <p:ph type="body" idx="1"/>
+          </p:nvPr>
+        </p:nvSpPr>
+        <p:spPr/>
+        <p:txBody>
+          <a:bodyPr xmlns:a="http://schemas.openxmlformats.org/drawingml/2006/main"/>
+          <a:lstStyle xmlns:a="http://schemas.openxmlformats.org/drawingml/2006/main"/>
+          <a:p xmlns:a="http://schemas.openxmlformats.org/drawingml/2006/main">
+            <a:r>
+              <a:t>回扣目标：初版已经形成可继续检查的起点，不等于终稿或正式提交。第 15 课在本课产出上做同行评审与修改。</a:t>
+            </a:r>
+          </a:p>
+          <a:p xmlns:a="http://schemas.openxmlformats.org/drawingml/2006/main">
+            <a:r>
+              <a:t/>
+            </a:r>
+          </a:p>
+          <a:p xmlns:a="http://schemas.openxmlformats.org/drawingml/2006/main">
+            <a:r>
+              <a:t>[Sources]</a:t>
+            </a:r>
+          </a:p>
+          <a:p xmlns:a="http://schemas.openxmlformats.org/drawingml/2006/main">
+            <a:r>
+              <a:t>- /Users/bright/Projects/courses/graduate/course/assignments.md</a:t>
+            </a:r>
+          </a:p>
+          <a:p xmlns:a="http://schemas.openxmlformats.org/drawingml/2006/main">
+            <a:r>
+              <a:t>- /Users/bright/Projects/courses/graduate/lessons/备课规划.md</a:t>
+            </a:r>
+          </a:p>
+          <a:p xmlns:a="http://schemas.openxmlformats.org/drawingml/2006/main">
+            <a:r>
+              <a:t>- /Users/bright/Projects/courses/graduate/lessons/lesson-14/handout.md</a:t>
+            </a:r>
+          </a:p>
+          <a:p xmlns:a="http://schemas.openxmlformats.org/drawingml/2006/main">
+            <a:r>
+              <a:t>[/Sources]</a:t>
+            </a:r>
+          </a:p>
+        </p:txBody>
+      </p:sp>
+      <p:sp>
+        <p:nvSpPr>
+          <p:cNvPr id="4" name="Slide Number Placeholder 3"/>
+          <p:cNvSpPr>
+            <a:spLocks xmlns:a="http://schemas.openxmlformats.org/drawingml/2006/main" noGrp="1"/>
+          </p:cNvSpPr>
+          <p:nvPr>
+            <p:ph type="sldNum" idx="5"/>
+          </p:nvPr>
+        </p:nvSpPr>
+        <p:spPr/>
+        <p:txBody>
+          <a:bodyPr xmlns:a="http://schemas.openxmlformats.org/drawingml/2006/main"/>
+          <a:lstStyle xmlns:a="http://schemas.openxmlformats.org/drawingml/2006/main"/>
+          <a:p xmlns:a="http://schemas.openxmlformats.org/drawingml/2006/main"/>
+        </p:txBody>
+      </p:sp>
+    </p:spTree>
+  </p:cSld>
+  <p:clrMapOvr>
+    <a:masterClrMapping xmlns:a="http://schemas.openxmlformats.org/drawingml/2006/main"/>
+  </p:clrMapOvr>
+</p:notes>
+</file>
+
+<file path=ppt/notesSlides/notesSlide18.xml><?xml version="1.0" encoding="utf-8"?>
 <p:notes xmlns:p="http://schemas.openxmlformats.org/presentationml/2006/main">
   <p:cSld>
     <p:spTree>
@@ -2065,7 +2161,7 @@
           <p:nvPr/>
         </p:nvPicPr>
         <p:blipFill>
-          <a:blip xmlns:r="http://schemas.openxmlformats.org/officeDocument/2006/relationships" xmlns:a="http://schemas.openxmlformats.org/drawingml/2006/main" r:embed="R02960334c7a2406b">
+          <a:blip xmlns:r="http://schemas.openxmlformats.org/officeDocument/2006/relationships" xmlns:a="http://schemas.openxmlformats.org/drawingml/2006/main" r:embed="R802ff53b7a9e4172">
             <a:duotone>
               <a:prstClr val="black"/>
               <a:schemeClr val="accent1">
@@ -2243,7 +2339,7 @@
           <p:nvPr/>
         </p:nvPicPr>
         <p:blipFill rotWithShape="1">
-          <a:blip xmlns:r="http://schemas.openxmlformats.org/officeDocument/2006/relationships" xmlns:a="http://schemas.openxmlformats.org/drawingml/2006/main" r:embed="R9510453525cd4304"/>
+          <a:blip xmlns:r="http://schemas.openxmlformats.org/officeDocument/2006/relationships" xmlns:a="http://schemas.openxmlformats.org/drawingml/2006/main" r:embed="R5d40b526bd5b4a0c"/>
           <a:srcRect xmlns:a="http://schemas.openxmlformats.org/drawingml/2006/main" l="74359" t="0" r="1346" b="0"/>
           <a:stretch xmlns:a="http://schemas.openxmlformats.org/drawingml/2006/main"/>
         </p:blipFill>
@@ -2266,7 +2362,7 @@
           <p:nvPr/>
         </p:nvPicPr>
         <p:blipFill rotWithShape="1">
-          <a:blip xmlns:r="http://schemas.openxmlformats.org/officeDocument/2006/relationships" xmlns:a="http://schemas.openxmlformats.org/drawingml/2006/main" r:embed="R83b50e9a88e94dec">
+          <a:blip xmlns:r="http://schemas.openxmlformats.org/officeDocument/2006/relationships" xmlns:a="http://schemas.openxmlformats.org/drawingml/2006/main" r:embed="R8e46443cf5624366">
             <a:alphaModFix amt="35000"/>
           </a:blip>
           <a:srcRect xmlns:a="http://schemas.openxmlformats.org/drawingml/2006/main" l="0" t="9831" r="0" b="36385"/>
@@ -2528,7 +2624,7 @@
           <p:nvPr/>
         </p:nvPicPr>
         <p:blipFill>
-          <a:blip xmlns:r="http://schemas.openxmlformats.org/officeDocument/2006/relationships" xmlns:a="http://schemas.openxmlformats.org/drawingml/2006/main" r:embed="Rf71ec09a42754114"/>
+          <a:blip xmlns:r="http://schemas.openxmlformats.org/officeDocument/2006/relationships" xmlns:a="http://schemas.openxmlformats.org/drawingml/2006/main" r:embed="R4b1a1bc6a3ad4d8a"/>
           <a:srcRect xmlns:a="http://schemas.openxmlformats.org/drawingml/2006/main" l="0" t="0" r="54251" b="0"/>
           <a:stretch xmlns:a="http://schemas.openxmlformats.org/drawingml/2006/main"/>
         </p:blipFill>
@@ -2785,7 +2881,7 @@
           <p:nvPr/>
         </p:nvPicPr>
         <p:blipFill rotWithShape="1">
-          <a:blip xmlns:r="http://schemas.openxmlformats.org/officeDocument/2006/relationships" xmlns:a="http://schemas.openxmlformats.org/drawingml/2006/main" r:embed="Red01de86be6e410d"/>
+          <a:blip xmlns:r="http://schemas.openxmlformats.org/officeDocument/2006/relationships" xmlns:a="http://schemas.openxmlformats.org/drawingml/2006/main" r:embed="Re198639871d445eb"/>
           <a:srcRect xmlns:a="http://schemas.openxmlformats.org/drawingml/2006/main" l="0" t="0" r="1346" b="0"/>
           <a:stretch xmlns:a="http://schemas.openxmlformats.org/drawingml/2006/main"/>
         </p:blipFill>
@@ -2968,7 +3064,7 @@
           <p:nvPr/>
         </p:nvPicPr>
         <p:blipFill>
-          <a:blip xmlns:r="http://schemas.openxmlformats.org/officeDocument/2006/relationships" xmlns:a="http://schemas.openxmlformats.org/drawingml/2006/main" r:embed="R3b566e8e02664877"/>
+          <a:blip xmlns:r="http://schemas.openxmlformats.org/officeDocument/2006/relationships" xmlns:a="http://schemas.openxmlformats.org/drawingml/2006/main" r:embed="R624c2de503b348aa"/>
           <a:stretch xmlns:a="http://schemas.openxmlformats.org/drawingml/2006/main">
             <a:fillRect l="0" t="0" r="0" b="0"/>
           </a:stretch>
@@ -3064,7 +3160,7 @@
           <p:nvPr/>
         </p:nvPicPr>
         <p:blipFill>
-          <a:blip xmlns:r="http://schemas.openxmlformats.org/officeDocument/2006/relationships" xmlns:a="http://schemas.openxmlformats.org/drawingml/2006/main" r:embed="R5714e19190844b4c">
+          <a:blip xmlns:r="http://schemas.openxmlformats.org/officeDocument/2006/relationships" xmlns:a="http://schemas.openxmlformats.org/drawingml/2006/main" r:embed="R80f53b8d78564522">
             <a:duotone>
               <a:prstClr val="black"/>
               <a:schemeClr val="accent1">
@@ -3231,7 +3327,7 @@
           <p:nvPr/>
         </p:nvPicPr>
         <p:blipFill rotWithShape="1">
-          <a:blip xmlns:r="http://schemas.openxmlformats.org/officeDocument/2006/relationships" xmlns:a="http://schemas.openxmlformats.org/drawingml/2006/main" r:embed="R6663f493539947ee">
+          <a:blip xmlns:r="http://schemas.openxmlformats.org/officeDocument/2006/relationships" xmlns:a="http://schemas.openxmlformats.org/drawingml/2006/main" r:embed="R47b56d867268474d">
             <a:alphaModFix amt="20000"/>
             <a:duotone>
               <a:schemeClr val="accent4">
@@ -3329,10 +3425,10 @@
   </p:cSld>
   <p:clrMap bg1="lt1" tx1="dk1" bg2="lt2" tx2="dk2" accent1="accent1" accent2="accent2" accent3="accent3" accent4="accent4" accent5="accent5" accent6="accent6" hlink="hlink" folHlink="folHlink"/>
   <p:sldLayoutIdLst>
-    <p:sldLayoutId xmlns:r="http://schemas.openxmlformats.org/officeDocument/2006/relationships" id="2147483649" r:id="Rb4202be255ba4710"/>
-    <p:sldLayoutId xmlns:r="http://schemas.openxmlformats.org/officeDocument/2006/relationships" id="2147483650" r:id="R79b5103520d44eb6"/>
-    <p:sldLayoutId xmlns:r="http://schemas.openxmlformats.org/officeDocument/2006/relationships" id="2147483651" r:id="R6b57e0d3b9474d5f"/>
-    <p:sldLayoutId xmlns:r="http://schemas.openxmlformats.org/officeDocument/2006/relationships" id="2147483652" r:id="Rbf5447c6dfbf43c6"/>
+    <p:sldLayoutId xmlns:r="http://schemas.openxmlformats.org/officeDocument/2006/relationships" id="2147483649" r:id="R376714900bae4a1d"/>
+    <p:sldLayoutId xmlns:r="http://schemas.openxmlformats.org/officeDocument/2006/relationships" id="2147483650" r:id="Rc5e22cc204574a8c"/>
+    <p:sldLayoutId xmlns:r="http://schemas.openxmlformats.org/officeDocument/2006/relationships" id="2147483651" r:id="R59419309d3e04e65"/>
+    <p:sldLayoutId xmlns:r="http://schemas.openxmlformats.org/officeDocument/2006/relationships" id="2147483652" r:id="R6e791f04fa2b473c"/>
   </p:sldLayoutIdLst>
   <p:hf hdr="0" ftr="0" dt="0"/>
   <p:txStyles>
@@ -3865,120 +3961,6 @@
       </p:grpSpPr>
       <p:sp>
         <p:nvSpPr>
-          <p:cNvPr id="3" name="内容占位符 2">
-            <a:extLst xmlns:a="http://schemas.openxmlformats.org/drawingml/2006/main">
-              <a:ext uri="{FF2B5EF4-FFF2-40B4-BE49-F238E27FC236}">
-                <a16:creationId xmlns:a16="http://schemas.microsoft.com/office/drawing/2014/main" id="{D1D30E0E-D2D5-4C08-A919-2A1C2D5A8D02}"/>
-              </a:ext>
-            </a:extLst>
-          </p:cNvPr>
-          <p:cNvSpPr>
-            <a:spLocks xmlns:a="http://schemas.openxmlformats.org/drawingml/2006/main" noGrp="1"/>
-          </p:cNvSpPr>
-          <p:nvPr>
-            <p:ph idx="10"/>
-          </p:nvPr>
-        </p:nvSpPr>
-        <p:spPr>
-          <a:xfrm xmlns:a="http://schemas.openxmlformats.org/drawingml/2006/main">
-            <a:off x="1143000" y="3067050"/>
-            <a:ext cx="9906000" cy="2286000"/>
-          </a:xfrm>
-        </p:spPr>
-        <p:txBody>
-          <a:bodyPr xmlns:a="http://schemas.openxmlformats.org/drawingml/2006/main" lIns="76200" tIns="38100" rIns="76200" bIns="38100" anchor="ctr"/>
-          <a:lstStyle xmlns:a="http://schemas.openxmlformats.org/drawingml/2006/main"/>
-          <a:p xmlns:a="http://schemas.openxmlformats.org/drawingml/2006/main">
-            <a:pPr algn="ctr">
-              <a:lnSpc>
-                <a:spcPct val="122000"/>
-              </a:lnSpc>
-              <a:buNone/>
-            </a:pPr>
-            <a:r>
-              <a:rPr sz="1800" b="0">
-                <a:solidFill>
-                  <a:srgbClr val="263746"/>
-                </a:solidFill>
-                <a:latin typeface="Microsoft YaHei"/>
-                <a:ea typeface="Microsoft YaHei"/>
-                <a:cs typeface="Microsoft YaHei"/>
-              </a:rPr>
-              <a:t>评价报告 → 可追溯研究叙事</a:t>
-            </a:r>
-            <a:endParaRPr>
-              <a:latin typeface="+mn-ea"/>
-              <a:ea typeface="+mn-ea"/>
-              <a:cs typeface="+mn-ea"/>
-            </a:endParaRPr>
-          </a:p>
-          <a:p xmlns:a="http://schemas.openxmlformats.org/drawingml/2006/main">
-            <a:r>
-              <a:rPr>
-                <a:latin typeface="+mn-ea"/>
-                <a:ea typeface="+mn-ea"/>
-                <a:cs typeface="+mn-ea"/>
-              </a:rPr>
-              <a:t/>
-            </a:r>
-            <a:endParaRPr>
-              <a:latin typeface="+mn-ea"/>
-              <a:ea typeface="+mn-ea"/>
-              <a:cs typeface="+mn-ea"/>
-            </a:endParaRPr>
-          </a:p>
-          <a:p xmlns:a="http://schemas.openxmlformats.org/drawingml/2006/main">
-            <a:pPr algn="ctr">
-              <a:lnSpc>
-                <a:spcPct val="122000"/>
-              </a:lnSpc>
-              <a:buNone/>
-            </a:pPr>
-            <a:r>
-              <a:rPr sz="1800" b="0">
-                <a:solidFill>
-                  <a:srgbClr val="263746"/>
-                </a:solidFill>
-                <a:latin typeface="Microsoft YaHei"/>
-                <a:ea typeface="Microsoft YaHei"/>
-                <a:cs typeface="Microsoft YaHei"/>
-              </a:rPr>
-              <a:t>IMRaD 回写 · 结论追踪 · 失败保留 · 七字段披露</a:t>
-            </a:r>
-            <a:endParaRPr>
-              <a:latin typeface="+mn-ea"/>
-              <a:ea typeface="+mn-ea"/>
-              <a:cs typeface="+mn-ea"/>
-            </a:endParaRPr>
-          </a:p>
-          <a:p xmlns:a="http://schemas.openxmlformats.org/drawingml/2006/main">
-            <a:pPr algn="ctr">
-              <a:lnSpc>
-                <a:spcPct val="122000"/>
-              </a:lnSpc>
-              <a:buNone/>
-            </a:pPr>
-            <a:r>
-              <a:rPr sz="1800" b="0">
-                <a:solidFill>
-                  <a:srgbClr val="263746"/>
-                </a:solidFill>
-                <a:latin typeface="Microsoft YaHei"/>
-                <a:ea typeface="Microsoft YaHei"/>
-                <a:cs typeface="Microsoft YaHei"/>
-              </a:rPr>
-              <a:t>第十四讲｜阶段八：回写与表达｜本课非提交门</a:t>
-            </a:r>
-            <a:endParaRPr>
-              <a:latin typeface="+mn-ea"/>
-              <a:ea typeface="+mn-ea"/>
-              <a:cs typeface="+mn-ea"/>
-            </a:endParaRPr>
-          </a:p>
-        </p:txBody>
-      </p:sp>
-      <p:sp>
-        <p:nvSpPr>
           <p:cNvPr id="2" name="矩形 11">
             <a:extLst xmlns:a="http://schemas.openxmlformats.org/drawingml/2006/main">
               <a:ext uri="{FF2B5EF4-FFF2-40B4-BE49-F238E27FC236}">
@@ -3993,8 +3975,8 @@
         </p:nvSpPr>
         <p:spPr>
           <a:xfrm xmlns:a="http://schemas.openxmlformats.org/drawingml/2006/main">
-            <a:off x="1095375" y="1219200"/>
-            <a:ext cx="10001250" cy="1714500"/>
+            <a:off x="1143000" y="1790700"/>
+            <a:ext cx="9906000" cy="1524000"/>
           </a:xfrm>
           <a:prstGeom xmlns:a="http://schemas.openxmlformats.org/drawingml/2006/main" prst="rect">
             <a:avLst/>
@@ -4008,7 +3990,7 @@
           <a:p xmlns:a="http://schemas.openxmlformats.org/drawingml/2006/main">
             <a:pPr algn="ctr">
               <a:lnSpc>
-                <a:spcPct val="108000"/>
+                <a:spcPct val="112000"/>
               </a:lnSpc>
               <a:buNone/>
             </a:pPr>
@@ -4021,34 +4003,7 @@
                 <a:ea typeface="Microsoft YaHei"/>
                 <a:cs typeface="Microsoft YaHei"/>
               </a:rPr>
-              <a:t>论文式写作、证据回写</a:t>
-            </a:r>
-            <a:endParaRPr sz="4000" b="1" kern="0" spc="20">
-              <a:solidFill>
-                <a:srgbClr val="C00000"/>
-              </a:solidFill>
-              <a:latin typeface="Arial"/>
-              <a:ea typeface="Arial"/>
-              <a:cs typeface="Arial"/>
-            </a:endParaRPr>
-          </a:p>
-          <a:p xmlns:a="http://schemas.openxmlformats.org/drawingml/2006/main">
-            <a:pPr algn="ctr">
-              <a:lnSpc>
-                <a:spcPct val="108000"/>
-              </a:lnSpc>
-              <a:buNone/>
-            </a:pPr>
-            <a:r>
-              <a:rPr sz="3150" b="1">
-                <a:solidFill>
-                  <a:srgbClr val="C8161E"/>
-                </a:solidFill>
-                <a:latin typeface="Microsoft YaHei"/>
-                <a:ea typeface="Microsoft YaHei"/>
-                <a:cs typeface="Microsoft YaHei"/>
-              </a:rPr>
-              <a:t>与 AI 使用披露</a:t>
+              <a:t>第14讲 论文式表达与回写</a:t>
             </a:r>
             <a:endParaRPr sz="4000" b="1" kern="0" spc="20">
               <a:solidFill>
@@ -4192,6 +4147,7 @@
           <a:lstStyle xmlns:a="http://schemas.openxmlformats.org/drawingml/2006/main"/>
           <a:p xmlns:a="http://schemas.openxmlformats.org/drawingml/2006/main">
             <a:pPr algn="ctr">
+              <a:buNone/>
               <a:defRPr sz="1800" b="1">
                 <a:solidFill>
                   <a:srgbClr val="C8161E"/>
@@ -4247,6 +4203,7 @@
           <a:lstStyle xmlns:a="http://schemas.openxmlformats.org/drawingml/2006/main"/>
           <a:p xmlns:a="http://schemas.openxmlformats.org/drawingml/2006/main">
             <a:pPr algn="ctr">
+              <a:buNone/>
               <a:defRPr sz="1800" b="1">
                 <a:solidFill>
                   <a:srgbClr val="FFFFFF"/>
@@ -4411,6 +4368,7 @@
           <a:lstStyle xmlns:a="http://schemas.openxmlformats.org/drawingml/2006/main"/>
           <a:p xmlns:a="http://schemas.openxmlformats.org/drawingml/2006/main">
             <a:pPr algn="ctr">
+              <a:buNone/>
               <a:defRPr sz="3150" b="1">
                 <a:solidFill>
                   <a:srgbClr val="C8161E"/>
@@ -4466,6 +4424,7 @@
           <a:lstStyle xmlns:a="http://schemas.openxmlformats.org/drawingml/2006/main"/>
           <a:p xmlns:a="http://schemas.openxmlformats.org/drawingml/2006/main">
             <a:pPr algn="ctr">
+              <a:buNone/>
               <a:defRPr sz="1800" b="1">
                 <a:solidFill>
                   <a:srgbClr val="FFFFFF"/>
@@ -4634,6 +4593,7 @@
           <a:lstStyle xmlns:a="http://schemas.openxmlformats.org/drawingml/2006/main"/>
           <a:p xmlns:a="http://schemas.openxmlformats.org/drawingml/2006/main">
             <a:pPr algn="ctr">
+              <a:buNone/>
               <a:defRPr sz="1800" b="1">
                 <a:solidFill>
                   <a:srgbClr val="C8161E"/>
@@ -4785,6 +4745,7 @@
           <a:lstStyle xmlns:a="http://schemas.openxmlformats.org/drawingml/2006/main"/>
           <a:p xmlns:a="http://schemas.openxmlformats.org/drawingml/2006/main">
             <a:pPr algn="ctr">
+              <a:buNone/>
               <a:defRPr sz="1350" b="1">
                 <a:solidFill>
                   <a:srgbClr val="FFFFFF"/>
@@ -4840,6 +4801,7 @@
           <a:lstStyle xmlns:a="http://schemas.openxmlformats.org/drawingml/2006/main"/>
           <a:p xmlns:a="http://schemas.openxmlformats.org/drawingml/2006/main">
             <a:pPr algn="ctr">
+              <a:buNone/>
               <a:defRPr sz="1500" b="1">
                 <a:solidFill>
                   <a:srgbClr val="18354E"/>
@@ -4899,6 +4861,7 @@
           <a:lstStyle xmlns:a="http://schemas.openxmlformats.org/drawingml/2006/main"/>
           <a:p xmlns:a="http://schemas.openxmlformats.org/drawingml/2006/main">
             <a:pPr algn="l">
+              <a:buNone/>
               <a:defRPr sz="1425" b="1">
                 <a:solidFill>
                   <a:srgbClr val="263746"/>
@@ -4956,6 +4919,7 @@
           <a:lstStyle xmlns:a="http://schemas.openxmlformats.org/drawingml/2006/main"/>
           <a:p xmlns:a="http://schemas.openxmlformats.org/drawingml/2006/main">
             <a:pPr algn="ctr">
+              <a:buNone/>
               <a:defRPr sz="1350" b="1">
                 <a:solidFill>
                   <a:srgbClr val="FFFFFF"/>
@@ -5011,6 +4975,7 @@
           <a:lstStyle xmlns:a="http://schemas.openxmlformats.org/drawingml/2006/main"/>
           <a:p xmlns:a="http://schemas.openxmlformats.org/drawingml/2006/main">
             <a:pPr algn="ctr">
+              <a:buNone/>
               <a:defRPr sz="1500" b="1">
                 <a:solidFill>
                   <a:srgbClr val="18354E"/>
@@ -5070,6 +5035,7 @@
           <a:lstStyle xmlns:a="http://schemas.openxmlformats.org/drawingml/2006/main"/>
           <a:p xmlns:a="http://schemas.openxmlformats.org/drawingml/2006/main">
             <a:pPr algn="l">
+              <a:buNone/>
               <a:defRPr sz="1425" b="1">
                 <a:solidFill>
                   <a:srgbClr val="263746"/>
@@ -5127,6 +5093,7 @@
           <a:lstStyle xmlns:a="http://schemas.openxmlformats.org/drawingml/2006/main"/>
           <a:p xmlns:a="http://schemas.openxmlformats.org/drawingml/2006/main">
             <a:pPr algn="ctr">
+              <a:buNone/>
               <a:defRPr sz="1350" b="1">
                 <a:solidFill>
                   <a:srgbClr val="FFFFFF"/>
@@ -5182,6 +5149,7 @@
           <a:lstStyle xmlns:a="http://schemas.openxmlformats.org/drawingml/2006/main"/>
           <a:p xmlns:a="http://schemas.openxmlformats.org/drawingml/2006/main">
             <a:pPr algn="ctr">
+              <a:buNone/>
               <a:defRPr sz="1500" b="1">
                 <a:solidFill>
                   <a:srgbClr val="18354E"/>
@@ -5241,6 +5209,7 @@
           <a:lstStyle xmlns:a="http://schemas.openxmlformats.org/drawingml/2006/main"/>
           <a:p xmlns:a="http://schemas.openxmlformats.org/drawingml/2006/main">
             <a:pPr algn="l">
+              <a:buNone/>
               <a:defRPr sz="1425" b="1">
                 <a:solidFill>
                   <a:srgbClr val="263746"/>
@@ -5298,6 +5267,7 @@
           <a:lstStyle xmlns:a="http://schemas.openxmlformats.org/drawingml/2006/main"/>
           <a:p xmlns:a="http://schemas.openxmlformats.org/drawingml/2006/main">
             <a:pPr algn="ctr">
+              <a:buNone/>
               <a:defRPr sz="1350" b="1">
                 <a:solidFill>
                   <a:srgbClr val="FFFFFF"/>
@@ -5353,6 +5323,7 @@
           <a:lstStyle xmlns:a="http://schemas.openxmlformats.org/drawingml/2006/main"/>
           <a:p xmlns:a="http://schemas.openxmlformats.org/drawingml/2006/main">
             <a:pPr algn="ctr">
+              <a:buNone/>
               <a:defRPr sz="1500" b="1">
                 <a:solidFill>
                   <a:srgbClr val="18354E"/>
@@ -5412,6 +5383,7 @@
           <a:lstStyle xmlns:a="http://schemas.openxmlformats.org/drawingml/2006/main"/>
           <a:p xmlns:a="http://schemas.openxmlformats.org/drawingml/2006/main">
             <a:pPr algn="l">
+              <a:buNone/>
               <a:defRPr sz="1425" b="1">
                 <a:solidFill>
                   <a:srgbClr val="263746"/>
@@ -5469,6 +5441,7 @@
           <a:lstStyle xmlns:a="http://schemas.openxmlformats.org/drawingml/2006/main"/>
           <a:p xmlns:a="http://schemas.openxmlformats.org/drawingml/2006/main">
             <a:pPr algn="ctr">
+              <a:buNone/>
               <a:defRPr sz="1350" b="1">
                 <a:solidFill>
                   <a:srgbClr val="FFFFFF"/>
@@ -5524,6 +5497,7 @@
           <a:lstStyle xmlns:a="http://schemas.openxmlformats.org/drawingml/2006/main"/>
           <a:p xmlns:a="http://schemas.openxmlformats.org/drawingml/2006/main">
             <a:pPr algn="ctr">
+              <a:buNone/>
               <a:defRPr sz="1500" b="1">
                 <a:solidFill>
                   <a:srgbClr val="18354E"/>
@@ -5583,6 +5557,7 @@
           <a:lstStyle xmlns:a="http://schemas.openxmlformats.org/drawingml/2006/main"/>
           <a:p xmlns:a="http://schemas.openxmlformats.org/drawingml/2006/main">
             <a:pPr algn="l">
+              <a:buNone/>
               <a:defRPr sz="1425" b="1">
                 <a:solidFill>
                   <a:srgbClr val="263746"/>
@@ -5640,6 +5615,7 @@
           <a:lstStyle xmlns:a="http://schemas.openxmlformats.org/drawingml/2006/main"/>
           <a:p xmlns:a="http://schemas.openxmlformats.org/drawingml/2006/main">
             <a:pPr algn="ctr">
+              <a:buNone/>
               <a:defRPr sz="1350" b="1">
                 <a:solidFill>
                   <a:srgbClr val="FFFFFF"/>
@@ -5695,6 +5671,7 @@
           <a:lstStyle xmlns:a="http://schemas.openxmlformats.org/drawingml/2006/main"/>
           <a:p xmlns:a="http://schemas.openxmlformats.org/drawingml/2006/main">
             <a:pPr algn="ctr">
+              <a:buNone/>
               <a:defRPr sz="1500" b="1">
                 <a:solidFill>
                   <a:srgbClr val="18354E"/>
@@ -5754,6 +5731,7 @@
           <a:lstStyle xmlns:a="http://schemas.openxmlformats.org/drawingml/2006/main"/>
           <a:p xmlns:a="http://schemas.openxmlformats.org/drawingml/2006/main">
             <a:pPr algn="l">
+              <a:buNone/>
               <a:defRPr sz="1425" b="1">
                 <a:solidFill>
                   <a:srgbClr val="263746"/>
@@ -5811,6 +5789,7 @@
           <a:lstStyle xmlns:a="http://schemas.openxmlformats.org/drawingml/2006/main"/>
           <a:p xmlns:a="http://schemas.openxmlformats.org/drawingml/2006/main">
             <a:pPr algn="ctr">
+              <a:buNone/>
               <a:defRPr sz="1350" b="1">
                 <a:solidFill>
                   <a:srgbClr val="FFFFFF"/>
@@ -5866,6 +5845,7 @@
           <a:lstStyle xmlns:a="http://schemas.openxmlformats.org/drawingml/2006/main"/>
           <a:p xmlns:a="http://schemas.openxmlformats.org/drawingml/2006/main">
             <a:pPr algn="ctr">
+              <a:buNone/>
               <a:defRPr sz="1500" b="1">
                 <a:solidFill>
                   <a:srgbClr val="C8161E"/>
@@ -5925,6 +5905,7 @@
           <a:lstStyle xmlns:a="http://schemas.openxmlformats.org/drawingml/2006/main"/>
           <a:p xmlns:a="http://schemas.openxmlformats.org/drawingml/2006/main">
             <a:pPr algn="l">
+              <a:buNone/>
               <a:defRPr sz="1425" b="1">
                 <a:solidFill>
                   <a:srgbClr val="263746"/>
@@ -5978,6 +5959,7 @@
           <a:lstStyle xmlns:a="http://schemas.openxmlformats.org/drawingml/2006/main"/>
           <a:p xmlns:a="http://schemas.openxmlformats.org/drawingml/2006/main">
             <a:pPr algn="ctr">
+              <a:buNone/>
               <a:defRPr sz="1650" b="1">
                 <a:solidFill>
                   <a:srgbClr val="C8161E"/>
@@ -6127,6 +6109,7 @@
           <a:lstStyle xmlns:a="http://schemas.openxmlformats.org/drawingml/2006/main"/>
           <a:p xmlns:a="http://schemas.openxmlformats.org/drawingml/2006/main">
             <a:pPr algn="ctr">
+              <a:buNone/>
               <a:defRPr sz="1725" b="1">
                 <a:solidFill>
                   <a:srgbClr val="FFFFFF"/>
@@ -6184,6 +6167,7 @@
           <a:lstStyle xmlns:a="http://schemas.openxmlformats.org/drawingml/2006/main"/>
           <a:p xmlns:a="http://schemas.openxmlformats.org/drawingml/2006/main">
             <a:pPr algn="ctr">
+              <a:buNone/>
               <a:defRPr sz="1350" b="1">
                 <a:solidFill>
                   <a:srgbClr val="FFFFFF"/>
@@ -6243,6 +6227,7 @@
           <a:lstStyle xmlns:a="http://schemas.openxmlformats.org/drawingml/2006/main"/>
           <a:p xmlns:a="http://schemas.openxmlformats.org/drawingml/2006/main">
             <a:pPr algn="l">
+              <a:buNone/>
               <a:defRPr sz="1425" b="1">
                 <a:solidFill>
                   <a:srgbClr val="263746"/>
@@ -6300,6 +6285,7 @@
           <a:lstStyle xmlns:a="http://schemas.openxmlformats.org/drawingml/2006/main"/>
           <a:p xmlns:a="http://schemas.openxmlformats.org/drawingml/2006/main">
             <a:pPr algn="ctr">
+              <a:buNone/>
               <a:defRPr sz="1350" b="1">
                 <a:solidFill>
                   <a:srgbClr val="FFFFFF"/>
@@ -6359,6 +6345,7 @@
           <a:lstStyle xmlns:a="http://schemas.openxmlformats.org/drawingml/2006/main"/>
           <a:p xmlns:a="http://schemas.openxmlformats.org/drawingml/2006/main">
             <a:pPr algn="l">
+              <a:buNone/>
               <a:defRPr sz="1425" b="1">
                 <a:solidFill>
                   <a:srgbClr val="263746"/>
@@ -6416,6 +6403,7 @@
           <a:lstStyle xmlns:a="http://schemas.openxmlformats.org/drawingml/2006/main"/>
           <a:p xmlns:a="http://schemas.openxmlformats.org/drawingml/2006/main">
             <a:pPr algn="ctr">
+              <a:buNone/>
               <a:defRPr sz="1350" b="1">
                 <a:solidFill>
                   <a:srgbClr val="FFFFFF"/>
@@ -6475,6 +6463,7 @@
           <a:lstStyle xmlns:a="http://schemas.openxmlformats.org/drawingml/2006/main"/>
           <a:p xmlns:a="http://schemas.openxmlformats.org/drawingml/2006/main">
             <a:pPr algn="l">
+              <a:buNone/>
               <a:defRPr sz="1425" b="1">
                 <a:solidFill>
                   <a:srgbClr val="263746"/>
@@ -6532,6 +6521,7 @@
           <a:lstStyle xmlns:a="http://schemas.openxmlformats.org/drawingml/2006/main"/>
           <a:p xmlns:a="http://schemas.openxmlformats.org/drawingml/2006/main">
             <a:pPr algn="ctr">
+              <a:buNone/>
               <a:defRPr sz="1350" b="1">
                 <a:solidFill>
                   <a:srgbClr val="FFFFFF"/>
@@ -6591,6 +6581,7 @@
           <a:lstStyle xmlns:a="http://schemas.openxmlformats.org/drawingml/2006/main"/>
           <a:p xmlns:a="http://schemas.openxmlformats.org/drawingml/2006/main">
             <a:pPr algn="l">
+              <a:buNone/>
               <a:defRPr sz="1425" b="1">
                 <a:solidFill>
                   <a:srgbClr val="263746"/>
@@ -6646,6 +6637,7 @@
           <a:lstStyle xmlns:a="http://schemas.openxmlformats.org/drawingml/2006/main"/>
           <a:p xmlns:a="http://schemas.openxmlformats.org/drawingml/2006/main">
             <a:pPr algn="ctr">
+              <a:buNone/>
               <a:defRPr sz="1725" b="1">
                 <a:solidFill>
                   <a:srgbClr val="FFFFFF"/>
@@ -6703,6 +6695,7 @@
           <a:lstStyle xmlns:a="http://schemas.openxmlformats.org/drawingml/2006/main"/>
           <a:p xmlns:a="http://schemas.openxmlformats.org/drawingml/2006/main">
             <a:pPr algn="ctr">
+              <a:buNone/>
               <a:defRPr sz="1350" b="1">
                 <a:solidFill>
                   <a:srgbClr val="FFFFFF"/>
@@ -6762,6 +6755,7 @@
           <a:lstStyle xmlns:a="http://schemas.openxmlformats.org/drawingml/2006/main"/>
           <a:p xmlns:a="http://schemas.openxmlformats.org/drawingml/2006/main">
             <a:pPr algn="l">
+              <a:buNone/>
               <a:defRPr sz="1425" b="1">
                 <a:solidFill>
                   <a:srgbClr val="263746"/>
@@ -6819,6 +6813,7 @@
           <a:lstStyle xmlns:a="http://schemas.openxmlformats.org/drawingml/2006/main"/>
           <a:p xmlns:a="http://schemas.openxmlformats.org/drawingml/2006/main">
             <a:pPr algn="ctr">
+              <a:buNone/>
               <a:defRPr sz="1350" b="1">
                 <a:solidFill>
                   <a:srgbClr val="FFFFFF"/>
@@ -6878,6 +6873,7 @@
           <a:lstStyle xmlns:a="http://schemas.openxmlformats.org/drawingml/2006/main"/>
           <a:p xmlns:a="http://schemas.openxmlformats.org/drawingml/2006/main">
             <a:pPr algn="l">
+              <a:buNone/>
               <a:defRPr sz="1425" b="1">
                 <a:solidFill>
                   <a:srgbClr val="263746"/>
@@ -6935,6 +6931,7 @@
           <a:lstStyle xmlns:a="http://schemas.openxmlformats.org/drawingml/2006/main"/>
           <a:p xmlns:a="http://schemas.openxmlformats.org/drawingml/2006/main">
             <a:pPr algn="ctr">
+              <a:buNone/>
               <a:defRPr sz="1350" b="1">
                 <a:solidFill>
                   <a:srgbClr val="FFFFFF"/>
@@ -6994,6 +6991,7 @@
           <a:lstStyle xmlns:a="http://schemas.openxmlformats.org/drawingml/2006/main"/>
           <a:p xmlns:a="http://schemas.openxmlformats.org/drawingml/2006/main">
             <a:pPr algn="l">
+              <a:buNone/>
               <a:defRPr sz="1425" b="1">
                 <a:solidFill>
                   <a:srgbClr val="263746"/>
@@ -7051,6 +7049,7 @@
           <a:lstStyle xmlns:a="http://schemas.openxmlformats.org/drawingml/2006/main"/>
           <a:p xmlns:a="http://schemas.openxmlformats.org/drawingml/2006/main">
             <a:pPr algn="ctr">
+              <a:buNone/>
               <a:defRPr sz="1350" b="1">
                 <a:solidFill>
                   <a:srgbClr val="FFFFFF"/>
@@ -7110,6 +7109,7 @@
           <a:lstStyle xmlns:a="http://schemas.openxmlformats.org/drawingml/2006/main"/>
           <a:p xmlns:a="http://schemas.openxmlformats.org/drawingml/2006/main">
             <a:pPr algn="l">
+              <a:buNone/>
               <a:defRPr sz="1425" b="1">
                 <a:solidFill>
                   <a:srgbClr val="263746"/>
@@ -7165,6 +7165,7 @@
           <a:lstStyle xmlns:a="http://schemas.openxmlformats.org/drawingml/2006/main"/>
           <a:p xmlns:a="http://schemas.openxmlformats.org/drawingml/2006/main">
             <a:pPr algn="ctr">
+              <a:buNone/>
               <a:defRPr sz="1725" b="1">
                 <a:solidFill>
                   <a:srgbClr val="FFFFFF"/>
@@ -7222,6 +7223,7 @@
           <a:lstStyle xmlns:a="http://schemas.openxmlformats.org/drawingml/2006/main"/>
           <a:p xmlns:a="http://schemas.openxmlformats.org/drawingml/2006/main">
             <a:pPr algn="ctr">
+              <a:buNone/>
               <a:defRPr sz="1350" b="1">
                 <a:solidFill>
                   <a:srgbClr val="FFFFFF"/>
@@ -7281,6 +7283,7 @@
           <a:lstStyle xmlns:a="http://schemas.openxmlformats.org/drawingml/2006/main"/>
           <a:p xmlns:a="http://schemas.openxmlformats.org/drawingml/2006/main">
             <a:pPr algn="l">
+              <a:buNone/>
               <a:defRPr sz="1425" b="1">
                 <a:solidFill>
                   <a:srgbClr val="263746"/>
@@ -7338,6 +7341,7 @@
           <a:lstStyle xmlns:a="http://schemas.openxmlformats.org/drawingml/2006/main"/>
           <a:p xmlns:a="http://schemas.openxmlformats.org/drawingml/2006/main">
             <a:pPr algn="ctr">
+              <a:buNone/>
               <a:defRPr sz="1350" b="1">
                 <a:solidFill>
                   <a:srgbClr val="FFFFFF"/>
@@ -7397,6 +7401,7 @@
           <a:lstStyle xmlns:a="http://schemas.openxmlformats.org/drawingml/2006/main"/>
           <a:p xmlns:a="http://schemas.openxmlformats.org/drawingml/2006/main">
             <a:pPr algn="l">
+              <a:buNone/>
               <a:defRPr sz="1425" b="1">
                 <a:solidFill>
                   <a:srgbClr val="263746"/>
@@ -7454,6 +7459,7 @@
           <a:lstStyle xmlns:a="http://schemas.openxmlformats.org/drawingml/2006/main"/>
           <a:p xmlns:a="http://schemas.openxmlformats.org/drawingml/2006/main">
             <a:pPr algn="ctr">
+              <a:buNone/>
               <a:defRPr sz="1350" b="1">
                 <a:solidFill>
                   <a:srgbClr val="FFFFFF"/>
@@ -7513,6 +7519,7 @@
           <a:lstStyle xmlns:a="http://schemas.openxmlformats.org/drawingml/2006/main"/>
           <a:p xmlns:a="http://schemas.openxmlformats.org/drawingml/2006/main">
             <a:pPr algn="l">
+              <a:buNone/>
               <a:defRPr sz="1425" b="1">
                 <a:solidFill>
                   <a:srgbClr val="263746"/>
@@ -7570,6 +7577,7 @@
           <a:lstStyle xmlns:a="http://schemas.openxmlformats.org/drawingml/2006/main"/>
           <a:p xmlns:a="http://schemas.openxmlformats.org/drawingml/2006/main">
             <a:pPr algn="ctr">
+              <a:buNone/>
               <a:defRPr sz="1350" b="1">
                 <a:solidFill>
                   <a:srgbClr val="FFFFFF"/>
@@ -7629,6 +7637,7 @@
           <a:lstStyle xmlns:a="http://schemas.openxmlformats.org/drawingml/2006/main"/>
           <a:p xmlns:a="http://schemas.openxmlformats.org/drawingml/2006/main">
             <a:pPr algn="l">
+              <a:buNone/>
               <a:defRPr sz="1425" b="1">
                 <a:solidFill>
                   <a:srgbClr val="263746"/>
@@ -7682,6 +7691,7 @@
           <a:lstStyle xmlns:a="http://schemas.openxmlformats.org/drawingml/2006/main"/>
           <a:p xmlns:a="http://schemas.openxmlformats.org/drawingml/2006/main">
             <a:pPr algn="ctr">
+              <a:buNone/>
               <a:defRPr sz="1650" b="1">
                 <a:solidFill>
                   <a:srgbClr val="C8161E"/>
@@ -7833,6 +7843,7 @@
           <a:lstStyle xmlns:a="http://schemas.openxmlformats.org/drawingml/2006/main"/>
           <a:p xmlns:a="http://schemas.openxmlformats.org/drawingml/2006/main">
             <a:pPr algn="ctr">
+              <a:buNone/>
               <a:defRPr sz="1800" b="1">
                 <a:solidFill>
                   <a:srgbClr val="C8161E"/>
@@ -7890,6 +7901,7 @@
           <a:lstStyle xmlns:a="http://schemas.openxmlformats.org/drawingml/2006/main"/>
           <a:p xmlns:a="http://schemas.openxmlformats.org/drawingml/2006/main">
             <a:pPr algn="ctr">
+              <a:buNone/>
               <a:defRPr sz="1350" b="1">
                 <a:solidFill>
                   <a:srgbClr val="FFFFFF"/>
@@ -7945,6 +7957,7 @@
           <a:lstStyle xmlns:a="http://schemas.openxmlformats.org/drawingml/2006/main"/>
           <a:p xmlns:a="http://schemas.openxmlformats.org/drawingml/2006/main">
             <a:pPr algn="ctr">
+              <a:buNone/>
               <a:defRPr sz="1500" b="1">
                 <a:solidFill>
                   <a:srgbClr val="18354E"/>
@@ -8096,6 +8109,7 @@
           <a:lstStyle xmlns:a="http://schemas.openxmlformats.org/drawingml/2006/main"/>
           <a:p xmlns:a="http://schemas.openxmlformats.org/drawingml/2006/main">
             <a:pPr algn="ctr">
+              <a:buNone/>
               <a:defRPr sz="1350" b="1">
                 <a:solidFill>
                   <a:srgbClr val="FFFFFF"/>
@@ -8151,6 +8165,7 @@
           <a:lstStyle xmlns:a="http://schemas.openxmlformats.org/drawingml/2006/main"/>
           <a:p xmlns:a="http://schemas.openxmlformats.org/drawingml/2006/main">
             <a:pPr algn="ctr">
+              <a:buNone/>
               <a:defRPr sz="1500" b="1">
                 <a:solidFill>
                   <a:srgbClr val="18354E"/>
@@ -8302,6 +8317,7 @@
           <a:lstStyle xmlns:a="http://schemas.openxmlformats.org/drawingml/2006/main"/>
           <a:p xmlns:a="http://schemas.openxmlformats.org/drawingml/2006/main">
             <a:pPr algn="ctr">
+              <a:buNone/>
               <a:defRPr sz="1350" b="1">
                 <a:solidFill>
                   <a:srgbClr val="FFFFFF"/>
@@ -8357,6 +8373,7 @@
           <a:lstStyle xmlns:a="http://schemas.openxmlformats.org/drawingml/2006/main"/>
           <a:p xmlns:a="http://schemas.openxmlformats.org/drawingml/2006/main">
             <a:pPr algn="ctr">
+              <a:buNone/>
               <a:defRPr sz="1500" b="1">
                 <a:solidFill>
                   <a:srgbClr val="18354E"/>
@@ -8508,6 +8525,7 @@
           <a:lstStyle xmlns:a="http://schemas.openxmlformats.org/drawingml/2006/main"/>
           <a:p xmlns:a="http://schemas.openxmlformats.org/drawingml/2006/main">
             <a:pPr algn="ctr">
+              <a:buNone/>
               <a:defRPr sz="1350" b="1">
                 <a:solidFill>
                   <a:srgbClr val="FFFFFF"/>
@@ -8563,6 +8581,7 @@
           <a:lstStyle xmlns:a="http://schemas.openxmlformats.org/drawingml/2006/main"/>
           <a:p xmlns:a="http://schemas.openxmlformats.org/drawingml/2006/main">
             <a:pPr algn="ctr">
+              <a:buNone/>
               <a:defRPr sz="1500" b="1">
                 <a:solidFill>
                   <a:srgbClr val="C8161E"/>
@@ -8707,6 +8726,7 @@
           <a:lstStyle xmlns:a="http://schemas.openxmlformats.org/drawingml/2006/main"/>
           <a:p xmlns:a="http://schemas.openxmlformats.org/drawingml/2006/main">
             <a:pPr algn="ctr">
+              <a:buNone/>
               <a:defRPr sz="1350" b="1">
                 <a:solidFill>
                   <a:srgbClr val="FFFFFF"/>
@@ -8762,6 +8782,7 @@
           <a:lstStyle xmlns:a="http://schemas.openxmlformats.org/drawingml/2006/main"/>
           <a:p xmlns:a="http://schemas.openxmlformats.org/drawingml/2006/main">
             <a:pPr algn="ctr">
+              <a:buNone/>
               <a:defRPr sz="1500" b="1">
                 <a:solidFill>
                   <a:srgbClr val="C8161E"/>
@@ -8913,6 +8934,7 @@
           <a:lstStyle xmlns:a="http://schemas.openxmlformats.org/drawingml/2006/main"/>
           <a:p xmlns:a="http://schemas.openxmlformats.org/drawingml/2006/main">
             <a:pPr algn="ctr">
+              <a:buNone/>
               <a:defRPr sz="1350" b="1">
                 <a:solidFill>
                   <a:srgbClr val="FFFFFF"/>
@@ -8968,6 +8990,7 @@
           <a:lstStyle xmlns:a="http://schemas.openxmlformats.org/drawingml/2006/main"/>
           <a:p xmlns:a="http://schemas.openxmlformats.org/drawingml/2006/main">
             <a:pPr algn="ctr">
+              <a:buNone/>
               <a:defRPr sz="1500" b="1">
                 <a:solidFill>
                   <a:srgbClr val="18354E"/>
@@ -9119,6 +9142,7 @@
           <a:lstStyle xmlns:a="http://schemas.openxmlformats.org/drawingml/2006/main"/>
           <a:p xmlns:a="http://schemas.openxmlformats.org/drawingml/2006/main">
             <a:pPr algn="ctr">
+              <a:buNone/>
               <a:defRPr sz="1350" b="1">
                 <a:solidFill>
                   <a:srgbClr val="FFFFFF"/>
@@ -9174,6 +9198,7 @@
           <a:lstStyle xmlns:a="http://schemas.openxmlformats.org/drawingml/2006/main"/>
           <a:p xmlns:a="http://schemas.openxmlformats.org/drawingml/2006/main">
             <a:pPr algn="ctr">
+              <a:buNone/>
               <a:defRPr sz="1500" b="1">
                 <a:solidFill>
                   <a:srgbClr val="18354E"/>
@@ -9290,6 +9315,7 @@
           <a:lstStyle xmlns:a="http://schemas.openxmlformats.org/drawingml/2006/main"/>
           <a:p xmlns:a="http://schemas.openxmlformats.org/drawingml/2006/main">
             <a:pPr algn="ctr">
+              <a:buNone/>
               <a:defRPr sz="1650" b="1">
                 <a:solidFill>
                   <a:srgbClr val="C8161E"/>
@@ -9441,6 +9467,7 @@
           <a:lstStyle xmlns:a="http://schemas.openxmlformats.org/drawingml/2006/main"/>
           <a:p xmlns:a="http://schemas.openxmlformats.org/drawingml/2006/main">
             <a:pPr algn="ctr">
+              <a:buNone/>
               <a:defRPr sz="1800" b="1">
                 <a:solidFill>
                   <a:srgbClr val="FFFFFF"/>
@@ -9494,6 +9521,7 @@
           <a:lstStyle xmlns:a="http://schemas.openxmlformats.org/drawingml/2006/main"/>
           <a:p xmlns:a="http://schemas.openxmlformats.org/drawingml/2006/main">
             <a:pPr algn="r">
+              <a:buNone/>
               <a:defRPr sz="1800" b="1">
                 <a:solidFill>
                   <a:srgbClr val="18354E"/>
@@ -9551,6 +9579,7 @@
           <a:lstStyle xmlns:a="http://schemas.openxmlformats.org/drawingml/2006/main"/>
           <a:p xmlns:a="http://schemas.openxmlformats.org/drawingml/2006/main">
             <a:pPr algn="ctr">
+              <a:buNone/>
               <a:defRPr sz="1800" b="1">
                 <a:solidFill>
                   <a:srgbClr val="FFFFFF"/>
@@ -9610,6 +9639,7 @@
           <a:lstStyle xmlns:a="http://schemas.openxmlformats.org/drawingml/2006/main"/>
           <a:p xmlns:a="http://schemas.openxmlformats.org/drawingml/2006/main">
             <a:pPr algn="l">
+              <a:buNone/>
               <a:defRPr sz="1800" b="1">
                 <a:solidFill>
                   <a:srgbClr val="263746"/>
@@ -9667,6 +9697,7 @@
           <a:lstStyle xmlns:a="http://schemas.openxmlformats.org/drawingml/2006/main"/>
           <a:p xmlns:a="http://schemas.openxmlformats.org/drawingml/2006/main">
             <a:pPr algn="ctr">
+              <a:buNone/>
               <a:defRPr sz="1800" b="1">
                 <a:solidFill>
                   <a:srgbClr val="FFFFFF"/>
@@ -9726,6 +9757,7 @@
           <a:lstStyle xmlns:a="http://schemas.openxmlformats.org/drawingml/2006/main"/>
           <a:p xmlns:a="http://schemas.openxmlformats.org/drawingml/2006/main">
             <a:pPr algn="l">
+              <a:buNone/>
               <a:defRPr sz="1800" b="1">
                 <a:solidFill>
                   <a:srgbClr val="263746"/>
@@ -9783,6 +9815,7 @@
           <a:lstStyle xmlns:a="http://schemas.openxmlformats.org/drawingml/2006/main"/>
           <a:p xmlns:a="http://schemas.openxmlformats.org/drawingml/2006/main">
             <a:pPr algn="ctr">
+              <a:buNone/>
               <a:defRPr sz="1800" b="1">
                 <a:solidFill>
                   <a:srgbClr val="FFFFFF"/>
@@ -9842,6 +9875,7 @@
           <a:lstStyle xmlns:a="http://schemas.openxmlformats.org/drawingml/2006/main"/>
           <a:p xmlns:a="http://schemas.openxmlformats.org/drawingml/2006/main">
             <a:pPr algn="l">
+              <a:buNone/>
               <a:defRPr sz="1800" b="1">
                 <a:solidFill>
                   <a:srgbClr val="263746"/>
@@ -9899,6 +9933,7 @@
           <a:lstStyle xmlns:a="http://schemas.openxmlformats.org/drawingml/2006/main"/>
           <a:p xmlns:a="http://schemas.openxmlformats.org/drawingml/2006/main">
             <a:pPr algn="ctr">
+              <a:buNone/>
               <a:defRPr sz="1800" b="1">
                 <a:solidFill>
                   <a:srgbClr val="FFFFFF"/>
@@ -9958,6 +9993,7 @@
           <a:lstStyle xmlns:a="http://schemas.openxmlformats.org/drawingml/2006/main"/>
           <a:p xmlns:a="http://schemas.openxmlformats.org/drawingml/2006/main">
             <a:pPr algn="l">
+              <a:buNone/>
               <a:defRPr sz="1800" b="1">
                 <a:solidFill>
                   <a:srgbClr val="263746"/>
@@ -10015,6 +10051,7 @@
           <a:lstStyle xmlns:a="http://schemas.openxmlformats.org/drawingml/2006/main"/>
           <a:p xmlns:a="http://schemas.openxmlformats.org/drawingml/2006/main">
             <a:pPr algn="ctr">
+              <a:buNone/>
               <a:defRPr sz="1800" b="1">
                 <a:solidFill>
                   <a:srgbClr val="FFFFFF"/>
@@ -10074,6 +10111,7 @@
           <a:lstStyle xmlns:a="http://schemas.openxmlformats.org/drawingml/2006/main"/>
           <a:p xmlns:a="http://schemas.openxmlformats.org/drawingml/2006/main">
             <a:pPr algn="l">
+              <a:buNone/>
               <a:defRPr sz="1800" b="1">
                 <a:solidFill>
                   <a:srgbClr val="263746"/>
@@ -10131,6 +10169,7 @@
           <a:lstStyle xmlns:a="http://schemas.openxmlformats.org/drawingml/2006/main"/>
           <a:p xmlns:a="http://schemas.openxmlformats.org/drawingml/2006/main">
             <a:pPr algn="ctr">
+              <a:buNone/>
               <a:defRPr sz="1800" b="1">
                 <a:solidFill>
                   <a:srgbClr val="C8161E"/>
@@ -10282,6 +10321,7 @@
           <a:lstStyle xmlns:a="http://schemas.openxmlformats.org/drawingml/2006/main"/>
           <a:p xmlns:a="http://schemas.openxmlformats.org/drawingml/2006/main">
             <a:pPr algn="ctr">
+              <a:buNone/>
               <a:defRPr sz="1800" b="1">
                 <a:solidFill>
                   <a:srgbClr val="FFFFFF"/>
@@ -10341,6 +10381,7 @@
           <a:lstStyle xmlns:a="http://schemas.openxmlformats.org/drawingml/2006/main"/>
           <a:p xmlns:a="http://schemas.openxmlformats.org/drawingml/2006/main">
             <a:pPr algn="l">
+              <a:buNone/>
               <a:defRPr sz="1800" b="1">
                 <a:solidFill>
                   <a:srgbClr val="263746"/>
@@ -10398,6 +10439,7 @@
           <a:lstStyle xmlns:a="http://schemas.openxmlformats.org/drawingml/2006/main"/>
           <a:p xmlns:a="http://schemas.openxmlformats.org/drawingml/2006/main">
             <a:pPr algn="ctr">
+              <a:buNone/>
               <a:defRPr sz="1800" b="1">
                 <a:solidFill>
                   <a:srgbClr val="FFFFFF"/>
@@ -10457,6 +10499,7 @@
           <a:lstStyle xmlns:a="http://schemas.openxmlformats.org/drawingml/2006/main"/>
           <a:p xmlns:a="http://schemas.openxmlformats.org/drawingml/2006/main">
             <a:pPr algn="l">
+              <a:buNone/>
               <a:defRPr sz="1800" b="1">
                 <a:solidFill>
                   <a:srgbClr val="263746"/>
@@ -10514,6 +10557,7 @@
           <a:lstStyle xmlns:a="http://schemas.openxmlformats.org/drawingml/2006/main"/>
           <a:p xmlns:a="http://schemas.openxmlformats.org/drawingml/2006/main">
             <a:pPr algn="ctr">
+              <a:buNone/>
               <a:defRPr sz="1800" b="1">
                 <a:solidFill>
                   <a:srgbClr val="FFFFFF"/>
@@ -10573,6 +10617,7 @@
           <a:lstStyle xmlns:a="http://schemas.openxmlformats.org/drawingml/2006/main"/>
           <a:p xmlns:a="http://schemas.openxmlformats.org/drawingml/2006/main">
             <a:pPr algn="l">
+              <a:buNone/>
               <a:defRPr sz="1800" b="1">
                 <a:solidFill>
                   <a:srgbClr val="263746"/>
@@ -10630,6 +10675,7 @@
           <a:lstStyle xmlns:a="http://schemas.openxmlformats.org/drawingml/2006/main"/>
           <a:p xmlns:a="http://schemas.openxmlformats.org/drawingml/2006/main">
             <a:pPr algn="ctr">
+              <a:buNone/>
               <a:defRPr sz="1800" b="1">
                 <a:solidFill>
                   <a:srgbClr val="FFFFFF"/>
@@ -10689,6 +10735,7 @@
           <a:lstStyle xmlns:a="http://schemas.openxmlformats.org/drawingml/2006/main"/>
           <a:p xmlns:a="http://schemas.openxmlformats.org/drawingml/2006/main">
             <a:pPr algn="l">
+              <a:buNone/>
               <a:defRPr sz="1800" b="1">
                 <a:solidFill>
                   <a:srgbClr val="263746"/>
@@ -10746,6 +10793,7 @@
           <a:lstStyle xmlns:a="http://schemas.openxmlformats.org/drawingml/2006/main"/>
           <a:p xmlns:a="http://schemas.openxmlformats.org/drawingml/2006/main">
             <a:pPr algn="ctr">
+              <a:buNone/>
               <a:defRPr sz="1800" b="1">
                 <a:solidFill>
                   <a:srgbClr val="FFFFFF"/>
@@ -10805,6 +10853,7 @@
           <a:lstStyle xmlns:a="http://schemas.openxmlformats.org/drawingml/2006/main"/>
           <a:p xmlns:a="http://schemas.openxmlformats.org/drawingml/2006/main">
             <a:pPr algn="l">
+              <a:buNone/>
               <a:defRPr sz="1800" b="1">
                 <a:solidFill>
                   <a:srgbClr val="263746"/>
@@ -10858,6 +10907,7 @@
           <a:lstStyle xmlns:a="http://schemas.openxmlformats.org/drawingml/2006/main"/>
           <a:p xmlns:a="http://schemas.openxmlformats.org/drawingml/2006/main">
             <a:pPr algn="ctr">
+              <a:buNone/>
               <a:defRPr sz="1800" b="1">
                 <a:solidFill>
                   <a:srgbClr val="18354E"/>
@@ -10915,6 +10965,7 @@
           <a:lstStyle xmlns:a="http://schemas.openxmlformats.org/drawingml/2006/main"/>
           <a:p xmlns:a="http://schemas.openxmlformats.org/drawingml/2006/main">
             <a:pPr algn="ctr">
+              <a:buNone/>
               <a:defRPr sz="1800" b="1">
                 <a:solidFill>
                   <a:srgbClr val="28745A"/>
@@ -10972,6 +11023,7 @@
           <a:lstStyle xmlns:a="http://schemas.openxmlformats.org/drawingml/2006/main"/>
           <a:p xmlns:a="http://schemas.openxmlformats.org/drawingml/2006/main">
             <a:pPr algn="ctr">
+              <a:buNone/>
               <a:defRPr sz="1800" b="1">
                 <a:solidFill>
                   <a:srgbClr val="C8161E"/>
@@ -11029,6 +11081,7 @@
           <a:lstStyle xmlns:a="http://schemas.openxmlformats.org/drawingml/2006/main"/>
           <a:p xmlns:a="http://schemas.openxmlformats.org/drawingml/2006/main">
             <a:pPr algn="ctr">
+              <a:buNone/>
               <a:defRPr sz="1800" b="1">
                 <a:solidFill>
                   <a:srgbClr val="A86C12"/>
@@ -11082,6 +11135,7 @@
           <a:lstStyle xmlns:a="http://schemas.openxmlformats.org/drawingml/2006/main"/>
           <a:p xmlns:a="http://schemas.openxmlformats.org/drawingml/2006/main">
             <a:pPr algn="ctr">
+              <a:buNone/>
               <a:defRPr sz="1650" b="1">
                 <a:solidFill>
                   <a:srgbClr val="C8161E"/>
@@ -11147,10 +11201,13 @@
           </a:xfrm>
         </p:spPr>
         <p:txBody>
-          <a:bodyPr xmlns:a="http://schemas.openxmlformats.org/drawingml/2006/main" lIns="76200" tIns="0" rIns="76200" bIns="0" anchor="ctr"/>
+          <a:bodyPr xmlns:a="http://schemas.openxmlformats.org/drawingml/2006/main" lIns="76200" tIns="38100" rIns="76200" bIns="38100" anchor="ctr"/>
           <a:lstStyle xmlns:a="http://schemas.openxmlformats.org/drawingml/2006/main"/>
           <a:p xmlns:a="http://schemas.openxmlformats.org/drawingml/2006/main">
             <a:pPr algn="l">
+              <a:lnSpc>
+                <a:spcPct val="112000"/>
+              </a:lnSpc>
               <a:buNone/>
             </a:pPr>
             <a:r>
@@ -11162,7 +11219,7 @@
                 <a:ea typeface="Microsoft YaHei"/>
                 <a:cs typeface="Microsoft YaHei"/>
               </a:rPr>
-              <a:t>论证门预演与第 15 课预告</a:t>
+              <a:t>本讲知识点总结</a:t>
             </a:r>
             <a:endParaRPr/>
           </a:p>
@@ -11198,59 +11255,91 @@
       </p:sp>
       <p:sp>
         <p:nvSpPr>
-          <p:cNvPr id="6" name="arr-0">
-            <a:extLst xmlns:a="http://schemas.openxmlformats.org/drawingml/2006/main">
-              <a:ext uri="{FF2B5EF4-FFF2-40B4-BE49-F238E27FC236}">
-                <a16:creationId xmlns:a16="http://schemas.microsoft.com/office/drawing/2014/main" id="{9D536436-3B39-4D32-8468-0B6E0AC98C58}"/>
-              </a:ext>
-            </a:extLst>
-          </p:cNvPr>
-          <p:cNvSpPr>
-            <a:spLocks xmlns:a="http://schemas.openxmlformats.org/drawingml/2006/main" noGrp="1"/>
-          </p:cNvSpPr>
-          <p:nvPr/>
-        </p:nvSpPr>
-        <p:spPr>
-          <a:xfrm xmlns:a="http://schemas.openxmlformats.org/drawingml/2006/main" rot="0">
-            <a:off x="3867150" y="2000250"/>
-            <a:ext cx="571500" cy="38100"/>
-          </a:xfrm>
-          <a:prstGeom xmlns:a="http://schemas.openxmlformats.org/drawingml/2006/main" prst="rect">
-            <a:avLst/>
-          </a:prstGeom>
-          <a:solidFill xmlns:a="http://schemas.openxmlformats.org/drawingml/2006/main">
-            <a:srgbClr val="D6DDE2"/>
+          <p:cNvPr id="6" name="summary-14-number-0">
+            <a:extLst xmlns:a="http://schemas.openxmlformats.org/drawingml/2006/main">
+              <a:ext uri="{FF2B5EF4-FFF2-40B4-BE49-F238E27FC236}">
+                <a16:creationId xmlns:a16="http://schemas.microsoft.com/office/drawing/2014/main" id="{89EAA353-FEFA-4ED5-8206-32A70F184D8E}"/>
+              </a:ext>
+            </a:extLst>
+          </p:cNvPr>
+          <p:cNvSpPr>
+            <a:spLocks xmlns:a="http://schemas.openxmlformats.org/drawingml/2006/main" noGrp="1"/>
+          </p:cNvSpPr>
+          <p:nvPr/>
+        </p:nvSpPr>
+        <p:spPr>
+          <a:xfrm xmlns:a="http://schemas.openxmlformats.org/drawingml/2006/main">
+            <a:off x="457200" y="1219200"/>
+            <a:ext cx="476250" cy="476250"/>
+          </a:xfrm>
+          <a:prstGeom xmlns:a="http://schemas.openxmlformats.org/drawingml/2006/main" prst="roundRect">
+            <a:avLst>
+              <a:gd name="adj" fmla="val 16000"/>
+            </a:avLst>
+          </a:prstGeom>
+          <a:solidFill xmlns:a="http://schemas.openxmlformats.org/drawingml/2006/main">
+            <a:srgbClr val="18354E"/>
           </a:solidFill>
           <a:ln xmlns:a="http://schemas.openxmlformats.org/drawingml/2006/main" w="0">
             <a:noFill/>
             <a:prstDash val="solid"/>
           </a:ln>
         </p:spPr>
-      </p:sp>
-      <p:sp>
-        <p:nvSpPr>
-          <p:cNvPr id="7" name="h-0">
-            <a:extLst xmlns:a="http://schemas.openxmlformats.org/drawingml/2006/main">
-              <a:ext uri="{FF2B5EF4-FFF2-40B4-BE49-F238E27FC236}">
-                <a16:creationId xmlns:a16="http://schemas.microsoft.com/office/drawing/2014/main" id="{141CB865-BFFC-4C89-BD32-DFC6A16F1B2A}"/>
-              </a:ext>
-            </a:extLst>
-          </p:cNvPr>
-          <p:cNvSpPr>
-            <a:spLocks xmlns:a="http://schemas.openxmlformats.org/drawingml/2006/main" noGrp="1"/>
-          </p:cNvSpPr>
-          <p:nvPr/>
-        </p:nvSpPr>
-        <p:spPr>
-          <a:xfrm xmlns:a="http://schemas.openxmlformats.org/drawingml/2006/main">
-            <a:off x="590550" y="1257300"/>
-            <a:ext cx="3276600" cy="514350"/>
-          </a:xfrm>
-          <a:prstGeom xmlns:a="http://schemas.openxmlformats.org/drawingml/2006/main" prst="rect">
-            <a:avLst/>
-          </a:prstGeom>
-          <a:solidFill xmlns:a="http://schemas.openxmlformats.org/drawingml/2006/main">
-            <a:srgbClr val="18354E"/>
+        <p:txBody>
+          <a:bodyPr xmlns:a="http://schemas.openxmlformats.org/drawingml/2006/main" lIns="76200" tIns="38100" rIns="76200" bIns="38100" anchor="ctr"/>
+          <a:lstStyle xmlns:a="http://schemas.openxmlformats.org/drawingml/2006/main"/>
+          <a:p xmlns:a="http://schemas.openxmlformats.org/drawingml/2006/main">
+            <a:pPr algn="ctr">
+              <a:lnSpc>
+                <a:spcPct val="112000"/>
+              </a:lnSpc>
+              <a:buNone/>
+              <a:defRPr sz="1500" b="1">
+                <a:solidFill>
+                  <a:srgbClr val="FFFFFF"/>
+                </a:solidFill>
+              </a:defRPr>
+            </a:pPr>
+            <a:r>
+              <a:rPr sz="1500" b="1">
+                <a:solidFill>
+                  <a:srgbClr val="FFFFFF"/>
+                </a:solidFill>
+                <a:latin typeface="Arial"/>
+                <a:ea typeface="Arial"/>
+                <a:cs typeface="Arial"/>
+              </a:rPr>
+              <a:t>1</a:t>
+            </a:r>
+          </a:p>
+        </p:txBody>
+      </p:sp>
+      <p:sp>
+        <p:nvSpPr>
+          <p:cNvPr id="7" name="summary-14-heading-0">
+            <a:extLst xmlns:a="http://schemas.openxmlformats.org/drawingml/2006/main">
+              <a:ext uri="{FF2B5EF4-FFF2-40B4-BE49-F238E27FC236}">
+                <a16:creationId xmlns:a16="http://schemas.microsoft.com/office/drawing/2014/main" id="{A54E7EAD-ED00-4AA1-8631-431CB83B500C}"/>
+              </a:ext>
+            </a:extLst>
+          </p:cNvPr>
+          <p:cNvSpPr>
+            <a:spLocks xmlns:a="http://schemas.openxmlformats.org/drawingml/2006/main" noGrp="1"/>
+          </p:cNvSpPr>
+          <p:nvPr/>
+        </p:nvSpPr>
+        <p:spPr>
+          <a:xfrm xmlns:a="http://schemas.openxmlformats.org/drawingml/2006/main">
+            <a:off x="1028700" y="1162050"/>
+            <a:ext cx="2152650" cy="590550"/>
+          </a:xfrm>
+          <a:prstGeom xmlns:a="http://schemas.openxmlformats.org/drawingml/2006/main" prst="roundRect">
+            <a:avLst>
+              <a:gd name="adj" fmla="val 12903"/>
+            </a:avLst>
+          </a:prstGeom>
+          <a:solidFill xmlns:a="http://schemas.openxmlformats.org/drawingml/2006/main">
+            <a:srgbClr val="E8F0F6"/>
           </a:solidFill>
           <a:ln xmlns:a="http://schemas.openxmlformats.org/drawingml/2006/main" w="0">
             <a:noFill/>
@@ -11262,52 +11351,56 @@
           <a:lstStyle xmlns:a="http://schemas.openxmlformats.org/drawingml/2006/main"/>
           <a:p xmlns:a="http://schemas.openxmlformats.org/drawingml/2006/main">
             <a:pPr algn="ctr">
-              <a:defRPr sz="1800" b="1">
-                <a:solidFill>
-                  <a:srgbClr val="FFFFFF"/>
-                </a:solidFill>
-              </a:defRPr>
-            </a:pPr>
-            <a:r>
-              <a:rPr sz="1800" b="1">
-                <a:solidFill>
-                  <a:srgbClr val="FFFFFF"/>
-                </a:solidFill>
-                <a:latin typeface="Microsoft YaHei"/>
-                <a:ea typeface="Microsoft YaHei"/>
-                <a:cs typeface="Microsoft YaHei"/>
-              </a:rPr>
-              <a:t>本课</a:t>
-            </a:r>
-          </a:p>
-        </p:txBody>
-      </p:sp>
-      <p:sp>
-        <p:nvSpPr>
-          <p:cNvPr id="8" name="d-0">
-            <a:extLst xmlns:a="http://schemas.openxmlformats.org/drawingml/2006/main">
-              <a:ext uri="{FF2B5EF4-FFF2-40B4-BE49-F238E27FC236}">
-                <a16:creationId xmlns:a16="http://schemas.microsoft.com/office/drawing/2014/main" id="{B42A075A-6992-4F97-A56B-1F6DE09CC1ED}"/>
-              </a:ext>
-            </a:extLst>
-          </p:cNvPr>
-          <p:cNvSpPr>
-            <a:spLocks xmlns:a="http://schemas.openxmlformats.org/drawingml/2006/main" noGrp="1"/>
-          </p:cNvSpPr>
-          <p:nvPr/>
-        </p:nvSpPr>
-        <p:spPr>
-          <a:xfrm xmlns:a="http://schemas.openxmlformats.org/drawingml/2006/main">
-            <a:off x="590550" y="1771650"/>
-            <a:ext cx="3276600" cy="1104900"/>
+              <a:lnSpc>
+                <a:spcPct val="112000"/>
+              </a:lnSpc>
+              <a:buNone/>
+              <a:defRPr sz="1725" b="1">
+                <a:solidFill>
+                  <a:srgbClr val="18354E"/>
+                </a:solidFill>
+              </a:defRPr>
+            </a:pPr>
+            <a:r>
+              <a:rPr sz="1725" b="1">
+                <a:solidFill>
+                  <a:srgbClr val="18354E"/>
+                </a:solidFill>
+                <a:latin typeface="Microsoft YaHei"/>
+                <a:ea typeface="Microsoft YaHei"/>
+                <a:cs typeface="Microsoft YaHei"/>
+              </a:rPr>
+              <a:t>IMRaD 组织</a:t>
+            </a:r>
+          </a:p>
+        </p:txBody>
+      </p:sp>
+      <p:sp>
+        <p:nvSpPr>
+          <p:cNvPr id="8" name="summary-14-detail-0">
+            <a:extLst xmlns:a="http://schemas.openxmlformats.org/drawingml/2006/main">
+              <a:ext uri="{FF2B5EF4-FFF2-40B4-BE49-F238E27FC236}">
+                <a16:creationId xmlns:a16="http://schemas.microsoft.com/office/drawing/2014/main" id="{6A70BB05-46C7-474E-8E81-C1970FB63504}"/>
+              </a:ext>
+            </a:extLst>
+          </p:cNvPr>
+          <p:cNvSpPr>
+            <a:spLocks xmlns:a="http://schemas.openxmlformats.org/drawingml/2006/main" noGrp="1"/>
+          </p:cNvSpPr>
+          <p:nvPr/>
+        </p:nvSpPr>
+        <p:spPr>
+          <a:xfrm xmlns:a="http://schemas.openxmlformats.org/drawingml/2006/main">
+            <a:off x="457200" y="2095500"/>
+            <a:ext cx="2724150" cy="1676400"/>
           </a:xfrm>
           <a:prstGeom xmlns:a="http://schemas.openxmlformats.org/drawingml/2006/main" prst="roundRect">
             <a:avLst>
-              <a:gd name="adj" fmla="val 6897"/>
+              <a:gd name="adj" fmla="val 4545"/>
             </a:avLst>
           </a:prstGeom>
           <a:solidFill xmlns:a="http://schemas.openxmlformats.org/drawingml/2006/main">
-            <a:srgbClr val="E8F0F6"/>
+            <a:srgbClr val="FFFFFF"/>
           </a:solidFill>
           <a:ln xmlns:a="http://schemas.openxmlformats.org/drawingml/2006/main" w="9525">
             <a:solidFill>
@@ -11322,7 +11415,7 @@
           <a:p xmlns:a="http://schemas.openxmlformats.org/drawingml/2006/main">
             <a:pPr algn="ctr">
               <a:lnSpc>
-                <a:spcPct val="125000"/>
+                <a:spcPct val="116000"/>
               </a:lnSpc>
               <a:buNone/>
               <a:defRPr sz="1500" b="1">
@@ -11340,90 +11433,98 @@
                 <a:ea typeface="Microsoft YaHei"/>
                 <a:cs typeface="Microsoft YaHei"/>
               </a:rPr>
-              <a:t>论文式短文初版</a:t>
-            </a:r>
-          </a:p>
-          <a:p xmlns:a="http://schemas.openxmlformats.org/drawingml/2006/main">
-            <a:pPr algn="ctr">
-              <a:lnSpc>
-                <a:spcPct val="125000"/>
-              </a:lnSpc>
-              <a:buNone/>
-              <a:defRPr sz="1500" b="1">
-                <a:solidFill>
-                  <a:srgbClr val="263746"/>
-                </a:solidFill>
-              </a:defRPr>
-            </a:pPr>
-            <a:r>
-              <a:rPr sz="1500" b="1">
-                <a:solidFill>
-                  <a:srgbClr val="263746"/>
-                </a:solidFill>
-                <a:latin typeface="Microsoft YaHei"/>
-                <a:ea typeface="Microsoft YaHei"/>
-                <a:cs typeface="Microsoft YaHei"/>
-              </a:rPr>
-              <a:t>+ 结论追踪表 + AI 披露</a:t>
-            </a:r>
-          </a:p>
-        </p:txBody>
-      </p:sp>
-      <p:sp>
-        <p:nvSpPr>
-          <p:cNvPr id="9" name="arr-1">
-            <a:extLst xmlns:a="http://schemas.openxmlformats.org/drawingml/2006/main">
-              <a:ext uri="{FF2B5EF4-FFF2-40B4-BE49-F238E27FC236}">
-                <a16:creationId xmlns:a16="http://schemas.microsoft.com/office/drawing/2014/main" id="{3FB4CA30-4AF7-4019-A5A5-8D72C0C348DB}"/>
-              </a:ext>
-            </a:extLst>
-          </p:cNvPr>
-          <p:cNvSpPr>
-            <a:spLocks xmlns:a="http://schemas.openxmlformats.org/drawingml/2006/main" noGrp="1"/>
-          </p:cNvSpPr>
-          <p:nvPr/>
-        </p:nvSpPr>
-        <p:spPr>
-          <a:xfrm xmlns:a="http://schemas.openxmlformats.org/drawingml/2006/main" rot="0">
-            <a:off x="7715250" y="2000250"/>
-            <a:ext cx="571500" cy="38100"/>
-          </a:xfrm>
-          <a:prstGeom xmlns:a="http://schemas.openxmlformats.org/drawingml/2006/main" prst="rect">
-            <a:avLst/>
-          </a:prstGeom>
-          <a:solidFill xmlns:a="http://schemas.openxmlformats.org/drawingml/2006/main">
-            <a:srgbClr val="D6DDE2"/>
+              <a:t>用研究问题、方法、结果与讨论组织论证，而不是堆材料</a:t>
+            </a:r>
+          </a:p>
+        </p:txBody>
+      </p:sp>
+      <p:sp>
+        <p:nvSpPr>
+          <p:cNvPr id="9" name="summary-14-number-1">
+            <a:extLst xmlns:a="http://schemas.openxmlformats.org/drawingml/2006/main">
+              <a:ext uri="{FF2B5EF4-FFF2-40B4-BE49-F238E27FC236}">
+                <a16:creationId xmlns:a16="http://schemas.microsoft.com/office/drawing/2014/main" id="{B8099C73-1AB9-4793-AE64-C6D0FBD23E0B}"/>
+              </a:ext>
+            </a:extLst>
+          </p:cNvPr>
+          <p:cNvSpPr>
+            <a:spLocks xmlns:a="http://schemas.openxmlformats.org/drawingml/2006/main" noGrp="1"/>
+          </p:cNvSpPr>
+          <p:nvPr/>
+        </p:nvSpPr>
+        <p:spPr>
+          <a:xfrm xmlns:a="http://schemas.openxmlformats.org/drawingml/2006/main">
+            <a:off x="3371850" y="1219200"/>
+            <a:ext cx="476250" cy="476250"/>
+          </a:xfrm>
+          <a:prstGeom xmlns:a="http://schemas.openxmlformats.org/drawingml/2006/main" prst="roundRect">
+            <a:avLst>
+              <a:gd name="adj" fmla="val 16000"/>
+            </a:avLst>
+          </a:prstGeom>
+          <a:solidFill xmlns:a="http://schemas.openxmlformats.org/drawingml/2006/main">
+            <a:srgbClr val="28745A"/>
           </a:solidFill>
           <a:ln xmlns:a="http://schemas.openxmlformats.org/drawingml/2006/main" w="0">
             <a:noFill/>
             <a:prstDash val="solid"/>
           </a:ln>
         </p:spPr>
-      </p:sp>
-      <p:sp>
-        <p:nvSpPr>
-          <p:cNvPr id="10" name="h-1">
-            <a:extLst xmlns:a="http://schemas.openxmlformats.org/drawingml/2006/main">
-              <a:ext uri="{FF2B5EF4-FFF2-40B4-BE49-F238E27FC236}">
-                <a16:creationId xmlns:a16="http://schemas.microsoft.com/office/drawing/2014/main" id="{9D964898-0ED9-4AB4-8BDF-09CBE8C6E4B8}"/>
-              </a:ext>
-            </a:extLst>
-          </p:cNvPr>
-          <p:cNvSpPr>
-            <a:spLocks xmlns:a="http://schemas.openxmlformats.org/drawingml/2006/main" noGrp="1"/>
-          </p:cNvSpPr>
-          <p:nvPr/>
-        </p:nvSpPr>
-        <p:spPr>
-          <a:xfrm xmlns:a="http://schemas.openxmlformats.org/drawingml/2006/main">
-            <a:off x="4438650" y="1257300"/>
-            <a:ext cx="3276600" cy="514350"/>
-          </a:xfrm>
-          <a:prstGeom xmlns:a="http://schemas.openxmlformats.org/drawingml/2006/main" prst="rect">
-            <a:avLst/>
-          </a:prstGeom>
-          <a:solidFill xmlns:a="http://schemas.openxmlformats.org/drawingml/2006/main">
-            <a:srgbClr val="A86C12"/>
+        <p:txBody>
+          <a:bodyPr xmlns:a="http://schemas.openxmlformats.org/drawingml/2006/main" lIns="76200" tIns="38100" rIns="76200" bIns="38100" anchor="ctr"/>
+          <a:lstStyle xmlns:a="http://schemas.openxmlformats.org/drawingml/2006/main"/>
+          <a:p xmlns:a="http://schemas.openxmlformats.org/drawingml/2006/main">
+            <a:pPr algn="ctr">
+              <a:lnSpc>
+                <a:spcPct val="112000"/>
+              </a:lnSpc>
+              <a:buNone/>
+              <a:defRPr sz="1500" b="1">
+                <a:solidFill>
+                  <a:srgbClr val="FFFFFF"/>
+                </a:solidFill>
+              </a:defRPr>
+            </a:pPr>
+            <a:r>
+              <a:rPr sz="1500" b="1">
+                <a:solidFill>
+                  <a:srgbClr val="FFFFFF"/>
+                </a:solidFill>
+                <a:latin typeface="Arial"/>
+                <a:ea typeface="Arial"/>
+                <a:cs typeface="Arial"/>
+              </a:rPr>
+              <a:t>2</a:t>
+            </a:r>
+          </a:p>
+        </p:txBody>
+      </p:sp>
+      <p:sp>
+        <p:nvSpPr>
+          <p:cNvPr id="10" name="summary-14-heading-1">
+            <a:extLst xmlns:a="http://schemas.openxmlformats.org/drawingml/2006/main">
+              <a:ext uri="{FF2B5EF4-FFF2-40B4-BE49-F238E27FC236}">
+                <a16:creationId xmlns:a16="http://schemas.microsoft.com/office/drawing/2014/main" id="{503509C4-4655-4A53-9BC2-95D844640229}"/>
+              </a:ext>
+            </a:extLst>
+          </p:cNvPr>
+          <p:cNvSpPr>
+            <a:spLocks xmlns:a="http://schemas.openxmlformats.org/drawingml/2006/main" noGrp="1"/>
+          </p:cNvSpPr>
+          <p:nvPr/>
+        </p:nvSpPr>
+        <p:spPr>
+          <a:xfrm xmlns:a="http://schemas.openxmlformats.org/drawingml/2006/main">
+            <a:off x="3943350" y="1162050"/>
+            <a:ext cx="2152650" cy="590550"/>
+          </a:xfrm>
+          <a:prstGeom xmlns:a="http://schemas.openxmlformats.org/drawingml/2006/main" prst="roundRect">
+            <a:avLst>
+              <a:gd name="adj" fmla="val 12903"/>
+            </a:avLst>
+          </a:prstGeom>
+          <a:solidFill xmlns:a="http://schemas.openxmlformats.org/drawingml/2006/main">
+            <a:srgbClr val="E7F2ED"/>
           </a:solidFill>
           <a:ln xmlns:a="http://schemas.openxmlformats.org/drawingml/2006/main" w="0">
             <a:noFill/>
@@ -11435,52 +11536,56 @@
           <a:lstStyle xmlns:a="http://schemas.openxmlformats.org/drawingml/2006/main"/>
           <a:p xmlns:a="http://schemas.openxmlformats.org/drawingml/2006/main">
             <a:pPr algn="ctr">
-              <a:defRPr sz="1800" b="1">
-                <a:solidFill>
-                  <a:srgbClr val="FFFFFF"/>
-                </a:solidFill>
-              </a:defRPr>
-            </a:pPr>
-            <a:r>
-              <a:rPr sz="1800" b="1">
-                <a:solidFill>
-                  <a:srgbClr val="FFFFFF"/>
-                </a:solidFill>
-                <a:latin typeface="Microsoft YaHei"/>
-                <a:ea typeface="Microsoft YaHei"/>
-                <a:cs typeface="Microsoft YaHei"/>
-              </a:rPr>
-              <a:t>第 15 课</a:t>
-            </a:r>
-          </a:p>
-        </p:txBody>
-      </p:sp>
-      <p:sp>
-        <p:nvSpPr>
-          <p:cNvPr id="11" name="d-1">
-            <a:extLst xmlns:a="http://schemas.openxmlformats.org/drawingml/2006/main">
-              <a:ext uri="{FF2B5EF4-FFF2-40B4-BE49-F238E27FC236}">
-                <a16:creationId xmlns:a16="http://schemas.microsoft.com/office/drawing/2014/main" id="{67D55EF5-F8EC-4801-B32B-05413A3994AD}"/>
-              </a:ext>
-            </a:extLst>
-          </p:cNvPr>
-          <p:cNvSpPr>
-            <a:spLocks xmlns:a="http://schemas.openxmlformats.org/drawingml/2006/main" noGrp="1"/>
-          </p:cNvSpPr>
-          <p:nvPr/>
-        </p:nvSpPr>
-        <p:spPr>
-          <a:xfrm xmlns:a="http://schemas.openxmlformats.org/drawingml/2006/main">
-            <a:off x="4438650" y="1771650"/>
-            <a:ext cx="3276600" cy="1104900"/>
+              <a:lnSpc>
+                <a:spcPct val="112000"/>
+              </a:lnSpc>
+              <a:buNone/>
+              <a:defRPr sz="1725" b="1">
+                <a:solidFill>
+                  <a:srgbClr val="28745A"/>
+                </a:solidFill>
+              </a:defRPr>
+            </a:pPr>
+            <a:r>
+              <a:rPr sz="1725" b="1">
+                <a:solidFill>
+                  <a:srgbClr val="28745A"/>
+                </a:solidFill>
+                <a:latin typeface="Microsoft YaHei"/>
+                <a:ea typeface="Microsoft YaHei"/>
+                <a:cs typeface="Microsoft YaHei"/>
+              </a:rPr>
+              <a:t>结论追踪</a:t>
+            </a:r>
+          </a:p>
+        </p:txBody>
+      </p:sp>
+      <p:sp>
+        <p:nvSpPr>
+          <p:cNvPr id="11" name="summary-14-detail-1">
+            <a:extLst xmlns:a="http://schemas.openxmlformats.org/drawingml/2006/main">
+              <a:ext uri="{FF2B5EF4-FFF2-40B4-BE49-F238E27FC236}">
+                <a16:creationId xmlns:a16="http://schemas.microsoft.com/office/drawing/2014/main" id="{693A1D0F-3F29-4964-B256-7B4E8E0CE169}"/>
+              </a:ext>
+            </a:extLst>
+          </p:cNvPr>
+          <p:cNvSpPr>
+            <a:spLocks xmlns:a="http://schemas.openxmlformats.org/drawingml/2006/main" noGrp="1"/>
+          </p:cNvSpPr>
+          <p:nvPr/>
+        </p:nvSpPr>
+        <p:spPr>
+          <a:xfrm xmlns:a="http://schemas.openxmlformats.org/drawingml/2006/main">
+            <a:off x="3371850" y="2095500"/>
+            <a:ext cx="2724150" cy="1676400"/>
           </a:xfrm>
           <a:prstGeom xmlns:a="http://schemas.openxmlformats.org/drawingml/2006/main" prst="roundRect">
             <a:avLst>
-              <a:gd name="adj" fmla="val 6897"/>
+              <a:gd name="adj" fmla="val 4545"/>
             </a:avLst>
           </a:prstGeom>
           <a:solidFill xmlns:a="http://schemas.openxmlformats.org/drawingml/2006/main">
-            <a:srgbClr val="FAF0DD"/>
+            <a:srgbClr val="FFFFFF"/>
           </a:solidFill>
           <a:ln xmlns:a="http://schemas.openxmlformats.org/drawingml/2006/main" w="9525">
             <a:solidFill>
@@ -11495,7 +11600,7 @@
           <a:p xmlns:a="http://schemas.openxmlformats.org/drawingml/2006/main">
             <a:pPr algn="ctr">
               <a:lnSpc>
-                <a:spcPct val="125000"/>
+                <a:spcPct val="116000"/>
               </a:lnSpc>
               <a:buNone/>
               <a:defRPr sz="1500" b="1">
@@ -11513,59 +11618,37 @@
                 <a:ea typeface="Microsoft YaHei"/>
                 <a:cs typeface="Microsoft YaHei"/>
               </a:rPr>
-              <a:t>同行评审 + 论证门预检</a:t>
-            </a:r>
-          </a:p>
-          <a:p xmlns:a="http://schemas.openxmlformats.org/drawingml/2006/main">
-            <a:pPr algn="ctr">
-              <a:lnSpc>
-                <a:spcPct val="125000"/>
-              </a:lnSpc>
-              <a:buNone/>
-              <a:defRPr sz="1500" b="1">
-                <a:solidFill>
-                  <a:srgbClr val="263746"/>
-                </a:solidFill>
-              </a:defRPr>
-            </a:pPr>
-            <a:r>
-              <a:rPr sz="1500" b="1">
-                <a:solidFill>
-                  <a:srgbClr val="263746"/>
-                </a:solidFill>
-                <a:latin typeface="Microsoft YaHei"/>
-                <a:ea typeface="Microsoft YaHei"/>
-                <a:cs typeface="Microsoft YaHei"/>
-              </a:rPr>
-              <a:t>记录采纳/拒绝/理由</a:t>
-            </a:r>
-          </a:p>
-        </p:txBody>
-      </p:sp>
-      <p:sp>
-        <p:nvSpPr>
-          <p:cNvPr id="12" name="h-2">
-            <a:extLst xmlns:a="http://schemas.openxmlformats.org/drawingml/2006/main">
-              <a:ext uri="{FF2B5EF4-FFF2-40B4-BE49-F238E27FC236}">
-                <a16:creationId xmlns:a16="http://schemas.microsoft.com/office/drawing/2014/main" id="{84B8675B-B03D-423E-BD06-D083897638E4}"/>
-              </a:ext>
-            </a:extLst>
-          </p:cNvPr>
-          <p:cNvSpPr>
-            <a:spLocks xmlns:a="http://schemas.openxmlformats.org/drawingml/2006/main" noGrp="1"/>
-          </p:cNvSpPr>
-          <p:nvPr/>
-        </p:nvSpPr>
-        <p:spPr>
-          <a:xfrm xmlns:a="http://schemas.openxmlformats.org/drawingml/2006/main">
-            <a:off x="8286750" y="1257300"/>
-            <a:ext cx="3276600" cy="514350"/>
-          </a:xfrm>
-          <a:prstGeom xmlns:a="http://schemas.openxmlformats.org/drawingml/2006/main" prst="rect">
-            <a:avLst/>
-          </a:prstGeom>
-          <a:solidFill xmlns:a="http://schemas.openxmlformats.org/drawingml/2006/main">
-            <a:srgbClr val="28745A"/>
+              <a:t>每个重要主张回到证据、实验 ID 与适用边界</a:t>
+            </a:r>
+          </a:p>
+        </p:txBody>
+      </p:sp>
+      <p:sp>
+        <p:nvSpPr>
+          <p:cNvPr id="12" name="summary-14-number-2">
+            <a:extLst xmlns:a="http://schemas.openxmlformats.org/drawingml/2006/main">
+              <a:ext uri="{FF2B5EF4-FFF2-40B4-BE49-F238E27FC236}">
+                <a16:creationId xmlns:a16="http://schemas.microsoft.com/office/drawing/2014/main" id="{D118E2CF-99EB-4F9D-8749-0C3FB4ABA85C}"/>
+              </a:ext>
+            </a:extLst>
+          </p:cNvPr>
+          <p:cNvSpPr>
+            <a:spLocks xmlns:a="http://schemas.openxmlformats.org/drawingml/2006/main" noGrp="1"/>
+          </p:cNvSpPr>
+          <p:nvPr/>
+        </p:nvSpPr>
+        <p:spPr>
+          <a:xfrm xmlns:a="http://schemas.openxmlformats.org/drawingml/2006/main">
+            <a:off x="6286500" y="1219200"/>
+            <a:ext cx="476250" cy="476250"/>
+          </a:xfrm>
+          <a:prstGeom xmlns:a="http://schemas.openxmlformats.org/drawingml/2006/main" prst="roundRect">
+            <a:avLst>
+              <a:gd name="adj" fmla="val 16000"/>
+            </a:avLst>
+          </a:prstGeom>
+          <a:solidFill xmlns:a="http://schemas.openxmlformats.org/drawingml/2006/main">
+            <a:srgbClr val="C8161E"/>
           </a:solidFill>
           <a:ln xmlns:a="http://schemas.openxmlformats.org/drawingml/2006/main" w="0">
             <a:noFill/>
@@ -11577,52 +11660,117 @@
           <a:lstStyle xmlns:a="http://schemas.openxmlformats.org/drawingml/2006/main"/>
           <a:p xmlns:a="http://schemas.openxmlformats.org/drawingml/2006/main">
             <a:pPr algn="ctr">
-              <a:defRPr sz="1800" b="1">
+              <a:lnSpc>
+                <a:spcPct val="112000"/>
+              </a:lnSpc>
+              <a:buNone/>
+              <a:defRPr sz="1500" b="1">
                 <a:solidFill>
                   <a:srgbClr val="FFFFFF"/>
                 </a:solidFill>
               </a:defRPr>
             </a:pPr>
             <a:r>
-              <a:rPr sz="1800" b="1">
+              <a:rPr sz="1500" b="1">
                 <a:solidFill>
                   <a:srgbClr val="FFFFFF"/>
                 </a:solidFill>
-                <a:latin typeface="Microsoft YaHei"/>
-                <a:ea typeface="Microsoft YaHei"/>
-                <a:cs typeface="Microsoft YaHei"/>
-              </a:rPr>
-              <a:t>第 16 课</a:t>
-            </a:r>
-          </a:p>
-        </p:txBody>
-      </p:sp>
-      <p:sp>
-        <p:nvSpPr>
-          <p:cNvPr id="13" name="d-2">
-            <a:extLst xmlns:a="http://schemas.openxmlformats.org/drawingml/2006/main">
-              <a:ext uri="{FF2B5EF4-FFF2-40B4-BE49-F238E27FC236}">
-                <a16:creationId xmlns:a16="http://schemas.microsoft.com/office/drawing/2014/main" id="{B3918B03-2A74-4DE9-A43B-EEFBA6E7E9E7}"/>
-              </a:ext>
-            </a:extLst>
-          </p:cNvPr>
-          <p:cNvSpPr>
-            <a:spLocks xmlns:a="http://schemas.openxmlformats.org/drawingml/2006/main" noGrp="1"/>
-          </p:cNvSpPr>
-          <p:nvPr/>
-        </p:nvSpPr>
-        <p:spPr>
-          <a:xfrm xmlns:a="http://schemas.openxmlformats.org/drawingml/2006/main">
-            <a:off x="8286750" y="1771650"/>
-            <a:ext cx="3276600" cy="1104900"/>
+                <a:latin typeface="Arial"/>
+                <a:ea typeface="Arial"/>
+                <a:cs typeface="Arial"/>
+              </a:rPr>
+              <a:t>3</a:t>
+            </a:r>
+          </a:p>
+        </p:txBody>
+      </p:sp>
+      <p:sp>
+        <p:nvSpPr>
+          <p:cNvPr id="13" name="summary-14-heading-2">
+            <a:extLst xmlns:a="http://schemas.openxmlformats.org/drawingml/2006/main">
+              <a:ext uri="{FF2B5EF4-FFF2-40B4-BE49-F238E27FC236}">
+                <a16:creationId xmlns:a16="http://schemas.microsoft.com/office/drawing/2014/main" id="{6053353E-6210-442C-B6ED-BB42B49F915E}"/>
+              </a:ext>
+            </a:extLst>
+          </p:cNvPr>
+          <p:cNvSpPr>
+            <a:spLocks xmlns:a="http://schemas.openxmlformats.org/drawingml/2006/main" noGrp="1"/>
+          </p:cNvSpPr>
+          <p:nvPr/>
+        </p:nvSpPr>
+        <p:spPr>
+          <a:xfrm xmlns:a="http://schemas.openxmlformats.org/drawingml/2006/main">
+            <a:off x="6858000" y="1162050"/>
+            <a:ext cx="2152650" cy="590550"/>
           </a:xfrm>
           <a:prstGeom xmlns:a="http://schemas.openxmlformats.org/drawingml/2006/main" prst="roundRect">
             <a:avLst>
-              <a:gd name="adj" fmla="val 6897"/>
+              <a:gd name="adj" fmla="val 12903"/>
             </a:avLst>
           </a:prstGeom>
           <a:solidFill xmlns:a="http://schemas.openxmlformats.org/drawingml/2006/main">
-            <a:srgbClr val="E7F2ED"/>
+            <a:srgbClr val="F8E9EA"/>
+          </a:solidFill>
+          <a:ln xmlns:a="http://schemas.openxmlformats.org/drawingml/2006/main" w="0">
+            <a:noFill/>
+            <a:prstDash val="solid"/>
+          </a:ln>
+        </p:spPr>
+        <p:txBody>
+          <a:bodyPr xmlns:a="http://schemas.openxmlformats.org/drawingml/2006/main" lIns="76200" tIns="38100" rIns="76200" bIns="38100" anchor="ctr"/>
+          <a:lstStyle xmlns:a="http://schemas.openxmlformats.org/drawingml/2006/main"/>
+          <a:p xmlns:a="http://schemas.openxmlformats.org/drawingml/2006/main">
+            <a:pPr algn="ctr">
+              <a:lnSpc>
+                <a:spcPct val="112000"/>
+              </a:lnSpc>
+              <a:buNone/>
+              <a:defRPr sz="1725" b="1">
+                <a:solidFill>
+                  <a:srgbClr val="C8161E"/>
+                </a:solidFill>
+              </a:defRPr>
+            </a:pPr>
+            <a:r>
+              <a:rPr sz="1725" b="1">
+                <a:solidFill>
+                  <a:srgbClr val="C8161E"/>
+                </a:solidFill>
+                <a:latin typeface="Microsoft YaHei"/>
+                <a:ea typeface="Microsoft YaHei"/>
+                <a:cs typeface="Microsoft YaHei"/>
+              </a:rPr>
+              <a:t>AI 使用披露</a:t>
+            </a:r>
+          </a:p>
+        </p:txBody>
+      </p:sp>
+      <p:sp>
+        <p:nvSpPr>
+          <p:cNvPr id="14" name="summary-14-detail-2">
+            <a:extLst xmlns:a="http://schemas.openxmlformats.org/drawingml/2006/main">
+              <a:ext uri="{FF2B5EF4-FFF2-40B4-BE49-F238E27FC236}">
+                <a16:creationId xmlns:a16="http://schemas.microsoft.com/office/drawing/2014/main" id="{2277E07A-7F32-4681-889D-163F07DA26D4}"/>
+              </a:ext>
+            </a:extLst>
+          </p:cNvPr>
+          <p:cNvSpPr>
+            <a:spLocks xmlns:a="http://schemas.openxmlformats.org/drawingml/2006/main" noGrp="1"/>
+          </p:cNvSpPr>
+          <p:nvPr/>
+        </p:nvSpPr>
+        <p:spPr>
+          <a:xfrm xmlns:a="http://schemas.openxmlformats.org/drawingml/2006/main">
+            <a:off x="6286500" y="2095500"/>
+            <a:ext cx="2724150" cy="1676400"/>
+          </a:xfrm>
+          <a:prstGeom xmlns:a="http://schemas.openxmlformats.org/drawingml/2006/main" prst="roundRect">
+            <a:avLst>
+              <a:gd name="adj" fmla="val 4545"/>
+            </a:avLst>
+          </a:prstGeom>
+          <a:solidFill xmlns:a="http://schemas.openxmlformats.org/drawingml/2006/main">
+            <a:srgbClr val="FFFFFF"/>
           </a:solidFill>
           <a:ln xmlns:a="http://schemas.openxmlformats.org/drawingml/2006/main" w="9525">
             <a:solidFill>
@@ -11637,7 +11785,7 @@
           <a:p xmlns:a="http://schemas.openxmlformats.org/drawingml/2006/main">
             <a:pPr algn="ctr">
               <a:lnSpc>
-                <a:spcPct val="125000"/>
+                <a:spcPct val="116000"/>
               </a:lnSpc>
               <a:buNone/>
               <a:defRPr sz="1500" b="1">
@@ -11655,106 +11803,29 @@
                 <a:ea typeface="Microsoft YaHei"/>
                 <a:cs typeface="Microsoft YaHei"/>
               </a:rPr>
-              <a:t>补齐状态、展示与复盘</a:t>
-            </a:r>
-          </a:p>
-          <a:p xmlns:a="http://schemas.openxmlformats.org/drawingml/2006/main">
-            <a:pPr algn="ctr">
-              <a:lnSpc>
-                <a:spcPct val="125000"/>
-              </a:lnSpc>
-              <a:buNone/>
-              <a:defRPr sz="1500" b="1">
-                <a:solidFill>
-                  <a:srgbClr val="263746"/>
-                </a:solidFill>
-              </a:defRPr>
-            </a:pPr>
-            <a:r>
-              <a:rPr sz="1500" b="1">
-                <a:solidFill>
-                  <a:srgbClr val="263746"/>
-                </a:solidFill>
-                <a:latin typeface="Microsoft YaHei"/>
-                <a:ea typeface="Microsoft YaHei"/>
-                <a:cs typeface="Microsoft YaHei"/>
-              </a:rPr>
-              <a:t>合并提交论证门</a:t>
-            </a:r>
-          </a:p>
-        </p:txBody>
-      </p:sp>
-      <p:sp>
-        <p:nvSpPr>
-          <p:cNvPr id="14" name="exit-h">
-            <a:extLst xmlns:a="http://schemas.openxmlformats.org/drawingml/2006/main">
-              <a:ext uri="{FF2B5EF4-FFF2-40B4-BE49-F238E27FC236}">
-                <a16:creationId xmlns:a16="http://schemas.microsoft.com/office/drawing/2014/main" id="{4AFF952A-C9DD-4E9E-B949-6F424411B1C8}"/>
-              </a:ext>
-            </a:extLst>
-          </p:cNvPr>
-          <p:cNvSpPr>
-            <a:spLocks xmlns:a="http://schemas.openxmlformats.org/drawingml/2006/main" noGrp="1"/>
-          </p:cNvSpPr>
-          <p:nvPr/>
-        </p:nvSpPr>
-        <p:spPr>
-          <a:xfrm xmlns:a="http://schemas.openxmlformats.org/drawingml/2006/main">
-            <a:off x="933450" y="3295650"/>
-            <a:ext cx="10325100" cy="457200"/>
-          </a:xfrm>
-          <a:prstGeom xmlns:a="http://schemas.openxmlformats.org/drawingml/2006/main" prst="rect">
-            <a:avLst/>
-          </a:prstGeom>
-          <a:noFill xmlns:a="http://schemas.openxmlformats.org/drawingml/2006/main"/>
-          <a:ln xmlns:a="http://schemas.openxmlformats.org/drawingml/2006/main" w="0">
-            <a:noFill/>
-            <a:prstDash val="solid"/>
-          </a:ln>
-        </p:spPr>
-        <p:txBody>
-          <a:bodyPr xmlns:a="http://schemas.openxmlformats.org/drawingml/2006/main" lIns="76200" tIns="38100" rIns="76200" bIns="38100" anchor="ctr"/>
-          <a:lstStyle xmlns:a="http://schemas.openxmlformats.org/drawingml/2006/main"/>
-          <a:p xmlns:a="http://schemas.openxmlformats.org/drawingml/2006/main">
-            <a:pPr algn="ctr">
-              <a:defRPr sz="1725" b="1">
-                <a:solidFill>
-                  <a:srgbClr val="C8161E"/>
-                </a:solidFill>
-              </a:defRPr>
-            </a:pPr>
-            <a:r>
-              <a:rPr sz="1725" b="1">
-                <a:solidFill>
-                  <a:srgbClr val="C8161E"/>
-                </a:solidFill>
-                <a:latin typeface="Microsoft YaHei"/>
-                <a:ea typeface="Microsoft YaHei"/>
-                <a:cs typeface="Microsoft YaHei"/>
-              </a:rPr>
-              <a:t>退出卡｜留下可用于第 15 课调整的六个判断</a:t>
-            </a:r>
-          </a:p>
-        </p:txBody>
-      </p:sp>
-      <p:sp>
-        <p:nvSpPr>
-          <p:cNvPr id="15" name="e-0">
-            <a:extLst xmlns:a="http://schemas.openxmlformats.org/drawingml/2006/main">
-              <a:ext uri="{FF2B5EF4-FFF2-40B4-BE49-F238E27FC236}">
-                <a16:creationId xmlns:a16="http://schemas.microsoft.com/office/drawing/2014/main" id="{8B30E685-704A-43DC-9B5E-6040838663B3}"/>
-              </a:ext>
-            </a:extLst>
-          </p:cNvPr>
-          <p:cNvSpPr>
-            <a:spLocks xmlns:a="http://schemas.openxmlformats.org/drawingml/2006/main" noGrp="1"/>
-          </p:cNvSpPr>
-          <p:nvPr/>
-        </p:nvSpPr>
-        <p:spPr>
-          <a:xfrm xmlns:a="http://schemas.openxmlformats.org/drawingml/2006/main">
-            <a:off x="666750" y="3943350"/>
-            <a:ext cx="3524250" cy="476250"/>
+              <a:t>说明用途、Context、生成内容、人工核验与最终责任</a:t>
+            </a:r>
+          </a:p>
+        </p:txBody>
+      </p:sp>
+      <p:sp>
+        <p:nvSpPr>
+          <p:cNvPr id="15" name="summary-14-number-3">
+            <a:extLst xmlns:a="http://schemas.openxmlformats.org/drawingml/2006/main">
+              <a:ext uri="{FF2B5EF4-FFF2-40B4-BE49-F238E27FC236}">
+                <a16:creationId xmlns:a16="http://schemas.microsoft.com/office/drawing/2014/main" id="{36819BF2-F080-499A-AEFA-14AFFB495BEF}"/>
+              </a:ext>
+            </a:extLst>
+          </p:cNvPr>
+          <p:cNvSpPr>
+            <a:spLocks xmlns:a="http://schemas.openxmlformats.org/drawingml/2006/main" noGrp="1"/>
+          </p:cNvSpPr>
+          <p:nvPr/>
+        </p:nvSpPr>
+        <p:spPr>
+          <a:xfrm xmlns:a="http://schemas.openxmlformats.org/drawingml/2006/main">
+            <a:off x="9201150" y="1219200"/>
+            <a:ext cx="476250" cy="476250"/>
           </a:xfrm>
           <a:prstGeom xmlns:a="http://schemas.openxmlformats.org/drawingml/2006/main" prst="roundRect">
             <a:avLst>
@@ -11762,7 +11833,7 @@
             </a:avLst>
           </a:prstGeom>
           <a:solidFill xmlns:a="http://schemas.openxmlformats.org/drawingml/2006/main">
-            <a:srgbClr val="E8F0F6"/>
+            <a:srgbClr val="A86C12"/>
           </a:solidFill>
           <a:ln xmlns:a="http://schemas.openxmlformats.org/drawingml/2006/main" w="0">
             <a:noFill/>
@@ -11774,52 +11845,56 @@
           <a:lstStyle xmlns:a="http://schemas.openxmlformats.org/drawingml/2006/main"/>
           <a:p xmlns:a="http://schemas.openxmlformats.org/drawingml/2006/main">
             <a:pPr algn="ctr">
-              <a:defRPr sz="1350" b="1">
-                <a:solidFill>
-                  <a:srgbClr val="18354E"/>
-                </a:solidFill>
-              </a:defRPr>
-            </a:pPr>
-            <a:r>
-              <a:rPr sz="1350" b="1">
-                <a:solidFill>
-                  <a:srgbClr val="18354E"/>
-                </a:solidFill>
-                <a:latin typeface="Microsoft YaHei"/>
-                <a:ea typeface="Microsoft YaHei"/>
-                <a:cs typeface="Microsoft YaHei"/>
-              </a:rPr>
-              <a:t>最清楚的一点</a:t>
-            </a:r>
-          </a:p>
-        </p:txBody>
-      </p:sp>
-      <p:sp>
-        <p:nvSpPr>
-          <p:cNvPr id="16" name="e-1">
-            <a:extLst xmlns:a="http://schemas.openxmlformats.org/drawingml/2006/main">
-              <a:ext uri="{FF2B5EF4-FFF2-40B4-BE49-F238E27FC236}">
-                <a16:creationId xmlns:a16="http://schemas.microsoft.com/office/drawing/2014/main" id="{FFEA7080-7736-438E-A04A-E6A985802E4E}"/>
-              </a:ext>
-            </a:extLst>
-          </p:cNvPr>
-          <p:cNvSpPr>
-            <a:spLocks xmlns:a="http://schemas.openxmlformats.org/drawingml/2006/main" noGrp="1"/>
-          </p:cNvSpPr>
-          <p:nvPr/>
-        </p:nvSpPr>
-        <p:spPr>
-          <a:xfrm xmlns:a="http://schemas.openxmlformats.org/drawingml/2006/main">
-            <a:off x="4476750" y="3943350"/>
-            <a:ext cx="3524250" cy="476250"/>
+              <a:lnSpc>
+                <a:spcPct val="112000"/>
+              </a:lnSpc>
+              <a:buNone/>
+              <a:defRPr sz="1500" b="1">
+                <a:solidFill>
+                  <a:srgbClr val="FFFFFF"/>
+                </a:solidFill>
+              </a:defRPr>
+            </a:pPr>
+            <a:r>
+              <a:rPr sz="1500" b="1">
+                <a:solidFill>
+                  <a:srgbClr val="FFFFFF"/>
+                </a:solidFill>
+                <a:latin typeface="Arial"/>
+                <a:ea typeface="Arial"/>
+                <a:cs typeface="Arial"/>
+              </a:rPr>
+              <a:t>4</a:t>
+            </a:r>
+          </a:p>
+        </p:txBody>
+      </p:sp>
+      <p:sp>
+        <p:nvSpPr>
+          <p:cNvPr id="16" name="summary-14-heading-3">
+            <a:extLst xmlns:a="http://schemas.openxmlformats.org/drawingml/2006/main">
+              <a:ext uri="{FF2B5EF4-FFF2-40B4-BE49-F238E27FC236}">
+                <a16:creationId xmlns:a16="http://schemas.microsoft.com/office/drawing/2014/main" id="{B9583761-5CA2-416B-9AD0-0D77A73544E4}"/>
+              </a:ext>
+            </a:extLst>
+          </p:cNvPr>
+          <p:cNvSpPr>
+            <a:spLocks xmlns:a="http://schemas.openxmlformats.org/drawingml/2006/main" noGrp="1"/>
+          </p:cNvSpPr>
+          <p:nvPr/>
+        </p:nvSpPr>
+        <p:spPr>
+          <a:xfrm xmlns:a="http://schemas.openxmlformats.org/drawingml/2006/main">
+            <a:off x="9772650" y="1162050"/>
+            <a:ext cx="2152650" cy="590550"/>
           </a:xfrm>
           <a:prstGeom xmlns:a="http://schemas.openxmlformats.org/drawingml/2006/main" prst="roundRect">
             <a:avLst>
-              <a:gd name="adj" fmla="val 16000"/>
+              <a:gd name="adj" fmla="val 12903"/>
             </a:avLst>
           </a:prstGeom>
           <a:solidFill xmlns:a="http://schemas.openxmlformats.org/drawingml/2006/main">
-            <a:srgbClr val="E8F0F6"/>
+            <a:srgbClr val="FAF0DD"/>
           </a:solidFill>
           <a:ln xmlns:a="http://schemas.openxmlformats.org/drawingml/2006/main" w="0">
             <a:noFill/>
@@ -11831,48 +11906,115 @@
           <a:lstStyle xmlns:a="http://schemas.openxmlformats.org/drawingml/2006/main"/>
           <a:p xmlns:a="http://schemas.openxmlformats.org/drawingml/2006/main">
             <a:pPr algn="ctr">
-              <a:defRPr sz="1350" b="1">
-                <a:solidFill>
-                  <a:srgbClr val="18354E"/>
-                </a:solidFill>
-              </a:defRPr>
-            </a:pPr>
-            <a:r>
-              <a:rPr sz="1350" b="1">
-                <a:solidFill>
-                  <a:srgbClr val="18354E"/>
-                </a:solidFill>
-                <a:latin typeface="Microsoft YaHei"/>
-                <a:ea typeface="Microsoft YaHei"/>
-                <a:cs typeface="Microsoft YaHei"/>
-              </a:rPr>
-              <a:t>仍困惑的一点</a:t>
-            </a:r>
-          </a:p>
-        </p:txBody>
-      </p:sp>
-      <p:sp>
-        <p:nvSpPr>
-          <p:cNvPr id="17" name="e-2">
-            <a:extLst xmlns:a="http://schemas.openxmlformats.org/drawingml/2006/main">
-              <a:ext uri="{FF2B5EF4-FFF2-40B4-BE49-F238E27FC236}">
-                <a16:creationId xmlns:a16="http://schemas.microsoft.com/office/drawing/2014/main" id="{1C20C441-9F67-48B4-88BA-16E85BDF47B2}"/>
-              </a:ext>
-            </a:extLst>
-          </p:cNvPr>
-          <p:cNvSpPr>
-            <a:spLocks xmlns:a="http://schemas.openxmlformats.org/drawingml/2006/main" noGrp="1"/>
-          </p:cNvSpPr>
-          <p:nvPr/>
-        </p:nvSpPr>
-        <p:spPr>
-          <a:xfrm xmlns:a="http://schemas.openxmlformats.org/drawingml/2006/main">
-            <a:off x="8286750" y="3943350"/>
-            <a:ext cx="3524250" cy="476250"/>
+              <a:lnSpc>
+                <a:spcPct val="112000"/>
+              </a:lnSpc>
+              <a:buNone/>
+              <a:defRPr sz="1725" b="1">
+                <a:solidFill>
+                  <a:srgbClr val="A86C12"/>
+                </a:solidFill>
+              </a:defRPr>
+            </a:pPr>
+            <a:r>
+              <a:rPr sz="1725" b="1">
+                <a:solidFill>
+                  <a:srgbClr val="A86C12"/>
+                </a:solidFill>
+                <a:latin typeface="Microsoft YaHei"/>
+                <a:ea typeface="Microsoft YaHei"/>
+                <a:cs typeface="Microsoft YaHei"/>
+              </a:rPr>
+              <a:t>论证门预演</a:t>
+            </a:r>
+          </a:p>
+        </p:txBody>
+      </p:sp>
+      <p:sp>
+        <p:nvSpPr>
+          <p:cNvPr id="17" name="summary-14-detail-3">
+            <a:extLst xmlns:a="http://schemas.openxmlformats.org/drawingml/2006/main">
+              <a:ext uri="{FF2B5EF4-FFF2-40B4-BE49-F238E27FC236}">
+                <a16:creationId xmlns:a16="http://schemas.microsoft.com/office/drawing/2014/main" id="{7496AA20-1802-425F-8C89-0375588E80EF}"/>
+              </a:ext>
+            </a:extLst>
+          </p:cNvPr>
+          <p:cNvSpPr>
+            <a:spLocks xmlns:a="http://schemas.openxmlformats.org/drawingml/2006/main" noGrp="1"/>
+          </p:cNvSpPr>
+          <p:nvPr/>
+        </p:nvSpPr>
+        <p:spPr>
+          <a:xfrm xmlns:a="http://schemas.openxmlformats.org/drawingml/2006/main">
+            <a:off x="9201150" y="2095500"/>
+            <a:ext cx="2724150" cy="1676400"/>
           </a:xfrm>
           <a:prstGeom xmlns:a="http://schemas.openxmlformats.org/drawingml/2006/main" prst="roundRect">
             <a:avLst>
-              <a:gd name="adj" fmla="val 16000"/>
+              <a:gd name="adj" fmla="val 4545"/>
+            </a:avLst>
+          </a:prstGeom>
+          <a:solidFill xmlns:a="http://schemas.openxmlformats.org/drawingml/2006/main">
+            <a:srgbClr val="FFFFFF"/>
+          </a:solidFill>
+          <a:ln xmlns:a="http://schemas.openxmlformats.org/drawingml/2006/main" w="9525">
+            <a:solidFill>
+              <a:srgbClr val="D6DDE2"/>
+            </a:solidFill>
+            <a:prstDash val="solid"/>
+          </a:ln>
+        </p:spPr>
+        <p:txBody>
+          <a:bodyPr xmlns:a="http://schemas.openxmlformats.org/drawingml/2006/main" lIns="76200" tIns="38100" rIns="76200" bIns="38100" anchor="ctr"/>
+          <a:lstStyle xmlns:a="http://schemas.openxmlformats.org/drawingml/2006/main"/>
+          <a:p xmlns:a="http://schemas.openxmlformats.org/drawingml/2006/main">
+            <a:pPr algn="ctr">
+              <a:lnSpc>
+                <a:spcPct val="116000"/>
+              </a:lnSpc>
+              <a:buNone/>
+              <a:defRPr sz="1500" b="1">
+                <a:solidFill>
+                  <a:srgbClr val="263746"/>
+                </a:solidFill>
+              </a:defRPr>
+            </a:pPr>
+            <a:r>
+              <a:rPr sz="1500" b="1">
+                <a:solidFill>
+                  <a:srgbClr val="263746"/>
+                </a:solidFill>
+                <a:latin typeface="Microsoft YaHei"/>
+                <a:ea typeface="Microsoft YaHei"/>
+                <a:cs typeface="Microsoft YaHei"/>
+              </a:rPr>
+              <a:t>提前检查主张强度、失败披露、威胁有效性与材料完整性</a:t>
+            </a:r>
+          </a:p>
+        </p:txBody>
+      </p:sp>
+      <p:sp>
+        <p:nvSpPr>
+          <p:cNvPr id="18" name="summary-14-boundary">
+            <a:extLst xmlns:a="http://schemas.openxmlformats.org/drawingml/2006/main">
+              <a:ext uri="{FF2B5EF4-FFF2-40B4-BE49-F238E27FC236}">
+                <a16:creationId xmlns:a16="http://schemas.microsoft.com/office/drawing/2014/main" id="{49C003D7-D34D-4799-8678-517A6593593A}"/>
+              </a:ext>
+            </a:extLst>
+          </p:cNvPr>
+          <p:cNvSpPr>
+            <a:spLocks xmlns:a="http://schemas.openxmlformats.org/drawingml/2006/main" noGrp="1"/>
+          </p:cNvSpPr>
+          <p:nvPr/>
+        </p:nvSpPr>
+        <p:spPr>
+          <a:xfrm xmlns:a="http://schemas.openxmlformats.org/drawingml/2006/main">
+            <a:off x="1162050" y="4400550"/>
+            <a:ext cx="9867900" cy="876300"/>
+          </a:xfrm>
+          <a:prstGeom xmlns:a="http://schemas.openxmlformats.org/drawingml/2006/main" prst="roundRect">
+            <a:avLst>
+              <a:gd name="adj" fmla="val 8696"/>
             </a:avLst>
           </a:prstGeom>
           <a:solidFill xmlns:a="http://schemas.openxmlformats.org/drawingml/2006/main">
@@ -11888,14 +12030,18 @@
           <a:lstStyle xmlns:a="http://schemas.openxmlformats.org/drawingml/2006/main"/>
           <a:p xmlns:a="http://schemas.openxmlformats.org/drawingml/2006/main">
             <a:pPr algn="ctr">
-              <a:defRPr sz="1350" b="1">
+              <a:lnSpc>
+                <a:spcPct val="114000"/>
+              </a:lnSpc>
+              <a:buNone/>
+              <a:defRPr sz="1725" b="1">
                 <a:solidFill>
                   <a:srgbClr val="C8161E"/>
                 </a:solidFill>
               </a:defRPr>
             </a:pPr>
             <a:r>
-              <a:rPr sz="1350" b="1">
+              <a:rPr sz="1725" b="1">
                 <a:solidFill>
                   <a:srgbClr val="C8161E"/>
                 </a:solidFill>
@@ -11903,178 +12049,7 @@
                 <a:ea typeface="Microsoft YaHei"/>
                 <a:cs typeface="Microsoft YaHei"/>
               </a:rPr>
-              <a:t>追踪表三字段齐全？</a:t>
-            </a:r>
-          </a:p>
-        </p:txBody>
-      </p:sp>
-      <p:sp>
-        <p:nvSpPr>
-          <p:cNvPr id="18" name="e-3">
-            <a:extLst xmlns:a="http://schemas.openxmlformats.org/drawingml/2006/main">
-              <a:ext uri="{FF2B5EF4-FFF2-40B4-BE49-F238E27FC236}">
-                <a16:creationId xmlns:a16="http://schemas.microsoft.com/office/drawing/2014/main" id="{80058654-7119-43A0-B51A-1B1ABDC63944}"/>
-              </a:ext>
-            </a:extLst>
-          </p:cNvPr>
-          <p:cNvSpPr>
-            <a:spLocks xmlns:a="http://schemas.openxmlformats.org/drawingml/2006/main" noGrp="1"/>
-          </p:cNvSpPr>
-          <p:nvPr/>
-        </p:nvSpPr>
-        <p:spPr>
-          <a:xfrm xmlns:a="http://schemas.openxmlformats.org/drawingml/2006/main">
-            <a:off x="666750" y="4610100"/>
-            <a:ext cx="3524250" cy="476250"/>
-          </a:xfrm>
-          <a:prstGeom xmlns:a="http://schemas.openxmlformats.org/drawingml/2006/main" prst="roundRect">
-            <a:avLst>
-              <a:gd name="adj" fmla="val 16000"/>
-            </a:avLst>
-          </a:prstGeom>
-          <a:solidFill xmlns:a="http://schemas.openxmlformats.org/drawingml/2006/main">
-            <a:srgbClr val="F8E9EA"/>
-          </a:solidFill>
-          <a:ln xmlns:a="http://schemas.openxmlformats.org/drawingml/2006/main" w="0">
-            <a:noFill/>
-            <a:prstDash val="solid"/>
-          </a:ln>
-        </p:spPr>
-        <p:txBody>
-          <a:bodyPr xmlns:a="http://schemas.openxmlformats.org/drawingml/2006/main" lIns="76200" tIns="38100" rIns="76200" bIns="38100" anchor="ctr"/>
-          <a:lstStyle xmlns:a="http://schemas.openxmlformats.org/drawingml/2006/main"/>
-          <a:p xmlns:a="http://schemas.openxmlformats.org/drawingml/2006/main">
-            <a:pPr algn="ctr">
-              <a:defRPr sz="1350" b="1">
-                <a:solidFill>
-                  <a:srgbClr val="C8161E"/>
-                </a:solidFill>
-              </a:defRPr>
-            </a:pPr>
-            <a:r>
-              <a:rPr sz="1350" b="1">
-                <a:solidFill>
-                  <a:srgbClr val="C8161E"/>
-                </a:solidFill>
-                <a:latin typeface="Microsoft YaHei"/>
-                <a:ea typeface="Microsoft YaHei"/>
-                <a:cs typeface="Microsoft YaHei"/>
-              </a:rPr>
-              <a:t>负向结果已写回？</a:t>
-            </a:r>
-          </a:p>
-        </p:txBody>
-      </p:sp>
-      <p:sp>
-        <p:nvSpPr>
-          <p:cNvPr id="19" name="e-4">
-            <a:extLst xmlns:a="http://schemas.openxmlformats.org/drawingml/2006/main">
-              <a:ext uri="{FF2B5EF4-FFF2-40B4-BE49-F238E27FC236}">
-                <a16:creationId xmlns:a16="http://schemas.microsoft.com/office/drawing/2014/main" id="{97DAD56A-C3F3-47CA-9766-1954CBA66747}"/>
-              </a:ext>
-            </a:extLst>
-          </p:cNvPr>
-          <p:cNvSpPr>
-            <a:spLocks xmlns:a="http://schemas.openxmlformats.org/drawingml/2006/main" noGrp="1"/>
-          </p:cNvSpPr>
-          <p:nvPr/>
-        </p:nvSpPr>
-        <p:spPr>
-          <a:xfrm xmlns:a="http://schemas.openxmlformats.org/drawingml/2006/main">
-            <a:off x="4476750" y="4610100"/>
-            <a:ext cx="3524250" cy="476250"/>
-          </a:xfrm>
-          <a:prstGeom xmlns:a="http://schemas.openxmlformats.org/drawingml/2006/main" prst="roundRect">
-            <a:avLst>
-              <a:gd name="adj" fmla="val 16000"/>
-            </a:avLst>
-          </a:prstGeom>
-          <a:solidFill xmlns:a="http://schemas.openxmlformats.org/drawingml/2006/main">
-            <a:srgbClr val="F8E9EA"/>
-          </a:solidFill>
-          <a:ln xmlns:a="http://schemas.openxmlformats.org/drawingml/2006/main" w="0">
-            <a:noFill/>
-            <a:prstDash val="solid"/>
-          </a:ln>
-        </p:spPr>
-        <p:txBody>
-          <a:bodyPr xmlns:a="http://schemas.openxmlformats.org/drawingml/2006/main" lIns="76200" tIns="38100" rIns="76200" bIns="38100" anchor="ctr"/>
-          <a:lstStyle xmlns:a="http://schemas.openxmlformats.org/drawingml/2006/main"/>
-          <a:p xmlns:a="http://schemas.openxmlformats.org/drawingml/2006/main">
-            <a:pPr algn="ctr">
-              <a:defRPr sz="1350" b="1">
-                <a:solidFill>
-                  <a:srgbClr val="C8161E"/>
-                </a:solidFill>
-              </a:defRPr>
-            </a:pPr>
-            <a:r>
-              <a:rPr sz="1350" b="1">
-                <a:solidFill>
-                  <a:srgbClr val="C8161E"/>
-                </a:solidFill>
-                <a:latin typeface="Microsoft YaHei"/>
-                <a:ea typeface="Microsoft YaHei"/>
-                <a:cs typeface="Microsoft YaHei"/>
-              </a:rPr>
-              <a:t>披露失败字段具体？</a:t>
-            </a:r>
-          </a:p>
-        </p:txBody>
-      </p:sp>
-      <p:sp>
-        <p:nvSpPr>
-          <p:cNvPr id="20" name="e-5">
-            <a:extLst xmlns:a="http://schemas.openxmlformats.org/drawingml/2006/main">
-              <a:ext uri="{FF2B5EF4-FFF2-40B4-BE49-F238E27FC236}">
-                <a16:creationId xmlns:a16="http://schemas.microsoft.com/office/drawing/2014/main" id="{DBC646DE-BB98-43FB-9658-671FAE679166}"/>
-              </a:ext>
-            </a:extLst>
-          </p:cNvPr>
-          <p:cNvSpPr>
-            <a:spLocks xmlns:a="http://schemas.openxmlformats.org/drawingml/2006/main" noGrp="1"/>
-          </p:cNvSpPr>
-          <p:nvPr/>
-        </p:nvSpPr>
-        <p:spPr>
-          <a:xfrm xmlns:a="http://schemas.openxmlformats.org/drawingml/2006/main">
-            <a:off x="8286750" y="4610100"/>
-            <a:ext cx="3524250" cy="476250"/>
-          </a:xfrm>
-          <a:prstGeom xmlns:a="http://schemas.openxmlformats.org/drawingml/2006/main" prst="roundRect">
-            <a:avLst>
-              <a:gd name="adj" fmla="val 16000"/>
-            </a:avLst>
-          </a:prstGeom>
-          <a:solidFill xmlns:a="http://schemas.openxmlformats.org/drawingml/2006/main">
-            <a:srgbClr val="F8E9EA"/>
-          </a:solidFill>
-          <a:ln xmlns:a="http://schemas.openxmlformats.org/drawingml/2006/main" w="0">
-            <a:noFill/>
-            <a:prstDash val="solid"/>
-          </a:ln>
-        </p:spPr>
-        <p:txBody>
-          <a:bodyPr xmlns:a="http://schemas.openxmlformats.org/drawingml/2006/main" lIns="76200" tIns="38100" rIns="76200" bIns="38100" anchor="ctr"/>
-          <a:lstStyle xmlns:a="http://schemas.openxmlformats.org/drawingml/2006/main"/>
-          <a:p xmlns:a="http://schemas.openxmlformats.org/drawingml/2006/main">
-            <a:pPr algn="ctr">
-              <a:defRPr sz="1350" b="1">
-                <a:solidFill>
-                  <a:srgbClr val="C8161E"/>
-                </a:solidFill>
-              </a:defRPr>
-            </a:pPr>
-            <a:r>
-              <a:rPr sz="1350" b="1">
-                <a:solidFill>
-                  <a:srgbClr val="C8161E"/>
-                </a:solidFill>
-                <a:latin typeface="Microsoft YaHei"/>
-                <a:ea typeface="Microsoft YaHei"/>
-                <a:cs typeface="Microsoft YaHei"/>
-              </a:rPr>
-              <a:t>最可能不通过哪一项？</a:t>
+              <a:t>关键边界：论文式表达可以重组事实，但不能扩大证据支持范围，也不能把 AI 文本当作来源。</a:t>
             </a:r>
           </a:p>
         </p:txBody>
@@ -12139,7 +12114,7 @@
                 <a:ea typeface="Microsoft YaHei"/>
                 <a:cs typeface="Microsoft YaHei"/>
               </a:rPr>
-              <a:t>课后引导阅读</a:t>
+              <a:t>论证门预演与第 15 课预告</a:t>
             </a:r>
             <a:endParaRPr/>
           </a:p>
@@ -12175,6 +12150,993 @@
       </p:sp>
       <p:sp>
         <p:nvSpPr>
+          <p:cNvPr id="6" name="arr-0">
+            <a:extLst xmlns:a="http://schemas.openxmlformats.org/drawingml/2006/main">
+              <a:ext uri="{FF2B5EF4-FFF2-40B4-BE49-F238E27FC236}">
+                <a16:creationId xmlns:a16="http://schemas.microsoft.com/office/drawing/2014/main" id="{9D536436-3B39-4D32-8468-0B6E0AC98C58}"/>
+              </a:ext>
+            </a:extLst>
+          </p:cNvPr>
+          <p:cNvSpPr>
+            <a:spLocks xmlns:a="http://schemas.openxmlformats.org/drawingml/2006/main" noGrp="1"/>
+          </p:cNvSpPr>
+          <p:nvPr/>
+        </p:nvSpPr>
+        <p:spPr>
+          <a:xfrm xmlns:a="http://schemas.openxmlformats.org/drawingml/2006/main" rot="0">
+            <a:off x="3867150" y="2000250"/>
+            <a:ext cx="571500" cy="38100"/>
+          </a:xfrm>
+          <a:prstGeom xmlns:a="http://schemas.openxmlformats.org/drawingml/2006/main" prst="rect">
+            <a:avLst/>
+          </a:prstGeom>
+          <a:solidFill xmlns:a="http://schemas.openxmlformats.org/drawingml/2006/main">
+            <a:srgbClr val="D6DDE2"/>
+          </a:solidFill>
+          <a:ln xmlns:a="http://schemas.openxmlformats.org/drawingml/2006/main" w="0">
+            <a:noFill/>
+            <a:prstDash val="solid"/>
+          </a:ln>
+        </p:spPr>
+      </p:sp>
+      <p:sp>
+        <p:nvSpPr>
+          <p:cNvPr id="7" name="h-0">
+            <a:extLst xmlns:a="http://schemas.openxmlformats.org/drawingml/2006/main">
+              <a:ext uri="{FF2B5EF4-FFF2-40B4-BE49-F238E27FC236}">
+                <a16:creationId xmlns:a16="http://schemas.microsoft.com/office/drawing/2014/main" id="{141CB865-BFFC-4C89-BD32-DFC6A16F1B2A}"/>
+              </a:ext>
+            </a:extLst>
+          </p:cNvPr>
+          <p:cNvSpPr>
+            <a:spLocks xmlns:a="http://schemas.openxmlformats.org/drawingml/2006/main" noGrp="1"/>
+          </p:cNvSpPr>
+          <p:nvPr/>
+        </p:nvSpPr>
+        <p:spPr>
+          <a:xfrm xmlns:a="http://schemas.openxmlformats.org/drawingml/2006/main">
+            <a:off x="590550" y="1257300"/>
+            <a:ext cx="3276600" cy="514350"/>
+          </a:xfrm>
+          <a:prstGeom xmlns:a="http://schemas.openxmlformats.org/drawingml/2006/main" prst="rect">
+            <a:avLst/>
+          </a:prstGeom>
+          <a:solidFill xmlns:a="http://schemas.openxmlformats.org/drawingml/2006/main">
+            <a:srgbClr val="18354E"/>
+          </a:solidFill>
+          <a:ln xmlns:a="http://schemas.openxmlformats.org/drawingml/2006/main" w="0">
+            <a:noFill/>
+            <a:prstDash val="solid"/>
+          </a:ln>
+        </p:spPr>
+        <p:txBody>
+          <a:bodyPr xmlns:a="http://schemas.openxmlformats.org/drawingml/2006/main" lIns="76200" tIns="38100" rIns="76200" bIns="38100" anchor="ctr"/>
+          <a:lstStyle xmlns:a="http://schemas.openxmlformats.org/drawingml/2006/main"/>
+          <a:p xmlns:a="http://schemas.openxmlformats.org/drawingml/2006/main">
+            <a:pPr algn="ctr">
+              <a:buNone/>
+              <a:defRPr sz="1800" b="1">
+                <a:solidFill>
+                  <a:srgbClr val="FFFFFF"/>
+                </a:solidFill>
+              </a:defRPr>
+            </a:pPr>
+            <a:r>
+              <a:rPr sz="1800" b="1">
+                <a:solidFill>
+                  <a:srgbClr val="FFFFFF"/>
+                </a:solidFill>
+                <a:latin typeface="Microsoft YaHei"/>
+                <a:ea typeface="Microsoft YaHei"/>
+                <a:cs typeface="Microsoft YaHei"/>
+              </a:rPr>
+              <a:t>本课</a:t>
+            </a:r>
+          </a:p>
+        </p:txBody>
+      </p:sp>
+      <p:sp>
+        <p:nvSpPr>
+          <p:cNvPr id="8" name="d-0">
+            <a:extLst xmlns:a="http://schemas.openxmlformats.org/drawingml/2006/main">
+              <a:ext uri="{FF2B5EF4-FFF2-40B4-BE49-F238E27FC236}">
+                <a16:creationId xmlns:a16="http://schemas.microsoft.com/office/drawing/2014/main" id="{B42A075A-6992-4F97-A56B-1F6DE09CC1ED}"/>
+              </a:ext>
+            </a:extLst>
+          </p:cNvPr>
+          <p:cNvSpPr>
+            <a:spLocks xmlns:a="http://schemas.openxmlformats.org/drawingml/2006/main" noGrp="1"/>
+          </p:cNvSpPr>
+          <p:nvPr/>
+        </p:nvSpPr>
+        <p:spPr>
+          <a:xfrm xmlns:a="http://schemas.openxmlformats.org/drawingml/2006/main">
+            <a:off x="590550" y="1771650"/>
+            <a:ext cx="3276600" cy="1104900"/>
+          </a:xfrm>
+          <a:prstGeom xmlns:a="http://schemas.openxmlformats.org/drawingml/2006/main" prst="roundRect">
+            <a:avLst>
+              <a:gd name="adj" fmla="val 6897"/>
+            </a:avLst>
+          </a:prstGeom>
+          <a:solidFill xmlns:a="http://schemas.openxmlformats.org/drawingml/2006/main">
+            <a:srgbClr val="E8F0F6"/>
+          </a:solidFill>
+          <a:ln xmlns:a="http://schemas.openxmlformats.org/drawingml/2006/main" w="9525">
+            <a:solidFill>
+              <a:srgbClr val="D6DDE2"/>
+            </a:solidFill>
+            <a:prstDash val="solid"/>
+          </a:ln>
+        </p:spPr>
+        <p:txBody>
+          <a:bodyPr xmlns:a="http://schemas.openxmlformats.org/drawingml/2006/main" lIns="76200" tIns="38100" rIns="76200" bIns="38100" anchor="ctr"/>
+          <a:lstStyle xmlns:a="http://schemas.openxmlformats.org/drawingml/2006/main"/>
+          <a:p xmlns:a="http://schemas.openxmlformats.org/drawingml/2006/main">
+            <a:pPr algn="ctr">
+              <a:lnSpc>
+                <a:spcPct val="125000"/>
+              </a:lnSpc>
+              <a:buNone/>
+              <a:defRPr sz="1500" b="1">
+                <a:solidFill>
+                  <a:srgbClr val="263746"/>
+                </a:solidFill>
+              </a:defRPr>
+            </a:pPr>
+            <a:r>
+              <a:rPr sz="1500" b="1">
+                <a:solidFill>
+                  <a:srgbClr val="263746"/>
+                </a:solidFill>
+                <a:latin typeface="Microsoft YaHei"/>
+                <a:ea typeface="Microsoft YaHei"/>
+                <a:cs typeface="Microsoft YaHei"/>
+              </a:rPr>
+              <a:t>论文式短文初版</a:t>
+            </a:r>
+          </a:p>
+          <a:p xmlns:a="http://schemas.openxmlformats.org/drawingml/2006/main">
+            <a:pPr algn="ctr">
+              <a:lnSpc>
+                <a:spcPct val="125000"/>
+              </a:lnSpc>
+              <a:buNone/>
+              <a:defRPr sz="1500" b="1">
+                <a:solidFill>
+                  <a:srgbClr val="263746"/>
+                </a:solidFill>
+              </a:defRPr>
+            </a:pPr>
+            <a:r>
+              <a:rPr sz="1500" b="1">
+                <a:solidFill>
+                  <a:srgbClr val="263746"/>
+                </a:solidFill>
+                <a:latin typeface="Microsoft YaHei"/>
+                <a:ea typeface="Microsoft YaHei"/>
+                <a:cs typeface="Microsoft YaHei"/>
+              </a:rPr>
+              <a:t>+ 结论追踪表 + AI 披露</a:t>
+            </a:r>
+          </a:p>
+        </p:txBody>
+      </p:sp>
+      <p:sp>
+        <p:nvSpPr>
+          <p:cNvPr id="9" name="arr-1">
+            <a:extLst xmlns:a="http://schemas.openxmlformats.org/drawingml/2006/main">
+              <a:ext uri="{FF2B5EF4-FFF2-40B4-BE49-F238E27FC236}">
+                <a16:creationId xmlns:a16="http://schemas.microsoft.com/office/drawing/2014/main" id="{3FB4CA30-4AF7-4019-A5A5-8D72C0C348DB}"/>
+              </a:ext>
+            </a:extLst>
+          </p:cNvPr>
+          <p:cNvSpPr>
+            <a:spLocks xmlns:a="http://schemas.openxmlformats.org/drawingml/2006/main" noGrp="1"/>
+          </p:cNvSpPr>
+          <p:nvPr/>
+        </p:nvSpPr>
+        <p:spPr>
+          <a:xfrm xmlns:a="http://schemas.openxmlformats.org/drawingml/2006/main" rot="0">
+            <a:off x="7715250" y="2000250"/>
+            <a:ext cx="571500" cy="38100"/>
+          </a:xfrm>
+          <a:prstGeom xmlns:a="http://schemas.openxmlformats.org/drawingml/2006/main" prst="rect">
+            <a:avLst/>
+          </a:prstGeom>
+          <a:solidFill xmlns:a="http://schemas.openxmlformats.org/drawingml/2006/main">
+            <a:srgbClr val="D6DDE2"/>
+          </a:solidFill>
+          <a:ln xmlns:a="http://schemas.openxmlformats.org/drawingml/2006/main" w="0">
+            <a:noFill/>
+            <a:prstDash val="solid"/>
+          </a:ln>
+        </p:spPr>
+      </p:sp>
+      <p:sp>
+        <p:nvSpPr>
+          <p:cNvPr id="10" name="h-1">
+            <a:extLst xmlns:a="http://schemas.openxmlformats.org/drawingml/2006/main">
+              <a:ext uri="{FF2B5EF4-FFF2-40B4-BE49-F238E27FC236}">
+                <a16:creationId xmlns:a16="http://schemas.microsoft.com/office/drawing/2014/main" id="{9D964898-0ED9-4AB4-8BDF-09CBE8C6E4B8}"/>
+              </a:ext>
+            </a:extLst>
+          </p:cNvPr>
+          <p:cNvSpPr>
+            <a:spLocks xmlns:a="http://schemas.openxmlformats.org/drawingml/2006/main" noGrp="1"/>
+          </p:cNvSpPr>
+          <p:nvPr/>
+        </p:nvSpPr>
+        <p:spPr>
+          <a:xfrm xmlns:a="http://schemas.openxmlformats.org/drawingml/2006/main">
+            <a:off x="4438650" y="1257300"/>
+            <a:ext cx="3276600" cy="514350"/>
+          </a:xfrm>
+          <a:prstGeom xmlns:a="http://schemas.openxmlformats.org/drawingml/2006/main" prst="rect">
+            <a:avLst/>
+          </a:prstGeom>
+          <a:solidFill xmlns:a="http://schemas.openxmlformats.org/drawingml/2006/main">
+            <a:srgbClr val="A86C12"/>
+          </a:solidFill>
+          <a:ln xmlns:a="http://schemas.openxmlformats.org/drawingml/2006/main" w="0">
+            <a:noFill/>
+            <a:prstDash val="solid"/>
+          </a:ln>
+        </p:spPr>
+        <p:txBody>
+          <a:bodyPr xmlns:a="http://schemas.openxmlformats.org/drawingml/2006/main" lIns="76200" tIns="38100" rIns="76200" bIns="38100" anchor="ctr"/>
+          <a:lstStyle xmlns:a="http://schemas.openxmlformats.org/drawingml/2006/main"/>
+          <a:p xmlns:a="http://schemas.openxmlformats.org/drawingml/2006/main">
+            <a:pPr algn="ctr">
+              <a:buNone/>
+              <a:defRPr sz="1800" b="1">
+                <a:solidFill>
+                  <a:srgbClr val="FFFFFF"/>
+                </a:solidFill>
+              </a:defRPr>
+            </a:pPr>
+            <a:r>
+              <a:rPr sz="1800" b="1">
+                <a:solidFill>
+                  <a:srgbClr val="FFFFFF"/>
+                </a:solidFill>
+                <a:latin typeface="Microsoft YaHei"/>
+                <a:ea typeface="Microsoft YaHei"/>
+                <a:cs typeface="Microsoft YaHei"/>
+              </a:rPr>
+              <a:t>第 15 课</a:t>
+            </a:r>
+          </a:p>
+        </p:txBody>
+      </p:sp>
+      <p:sp>
+        <p:nvSpPr>
+          <p:cNvPr id="11" name="d-1">
+            <a:extLst xmlns:a="http://schemas.openxmlformats.org/drawingml/2006/main">
+              <a:ext uri="{FF2B5EF4-FFF2-40B4-BE49-F238E27FC236}">
+                <a16:creationId xmlns:a16="http://schemas.microsoft.com/office/drawing/2014/main" id="{67D55EF5-F8EC-4801-B32B-05413A3994AD}"/>
+              </a:ext>
+            </a:extLst>
+          </p:cNvPr>
+          <p:cNvSpPr>
+            <a:spLocks xmlns:a="http://schemas.openxmlformats.org/drawingml/2006/main" noGrp="1"/>
+          </p:cNvSpPr>
+          <p:nvPr/>
+        </p:nvSpPr>
+        <p:spPr>
+          <a:xfrm xmlns:a="http://schemas.openxmlformats.org/drawingml/2006/main">
+            <a:off x="4438650" y="1771650"/>
+            <a:ext cx="3276600" cy="1104900"/>
+          </a:xfrm>
+          <a:prstGeom xmlns:a="http://schemas.openxmlformats.org/drawingml/2006/main" prst="roundRect">
+            <a:avLst>
+              <a:gd name="adj" fmla="val 6897"/>
+            </a:avLst>
+          </a:prstGeom>
+          <a:solidFill xmlns:a="http://schemas.openxmlformats.org/drawingml/2006/main">
+            <a:srgbClr val="FAF0DD"/>
+          </a:solidFill>
+          <a:ln xmlns:a="http://schemas.openxmlformats.org/drawingml/2006/main" w="9525">
+            <a:solidFill>
+              <a:srgbClr val="D6DDE2"/>
+            </a:solidFill>
+            <a:prstDash val="solid"/>
+          </a:ln>
+        </p:spPr>
+        <p:txBody>
+          <a:bodyPr xmlns:a="http://schemas.openxmlformats.org/drawingml/2006/main" lIns="76200" tIns="38100" rIns="76200" bIns="38100" anchor="ctr"/>
+          <a:lstStyle xmlns:a="http://schemas.openxmlformats.org/drawingml/2006/main"/>
+          <a:p xmlns:a="http://schemas.openxmlformats.org/drawingml/2006/main">
+            <a:pPr algn="ctr">
+              <a:lnSpc>
+                <a:spcPct val="125000"/>
+              </a:lnSpc>
+              <a:buNone/>
+              <a:defRPr sz="1500" b="1">
+                <a:solidFill>
+                  <a:srgbClr val="263746"/>
+                </a:solidFill>
+              </a:defRPr>
+            </a:pPr>
+            <a:r>
+              <a:rPr sz="1500" b="1">
+                <a:solidFill>
+                  <a:srgbClr val="263746"/>
+                </a:solidFill>
+                <a:latin typeface="Microsoft YaHei"/>
+                <a:ea typeface="Microsoft YaHei"/>
+                <a:cs typeface="Microsoft YaHei"/>
+              </a:rPr>
+              <a:t>同行评审 + 论证门预检</a:t>
+            </a:r>
+          </a:p>
+          <a:p xmlns:a="http://schemas.openxmlformats.org/drawingml/2006/main">
+            <a:pPr algn="ctr">
+              <a:lnSpc>
+                <a:spcPct val="125000"/>
+              </a:lnSpc>
+              <a:buNone/>
+              <a:defRPr sz="1500" b="1">
+                <a:solidFill>
+                  <a:srgbClr val="263746"/>
+                </a:solidFill>
+              </a:defRPr>
+            </a:pPr>
+            <a:r>
+              <a:rPr sz="1500" b="1">
+                <a:solidFill>
+                  <a:srgbClr val="263746"/>
+                </a:solidFill>
+                <a:latin typeface="Microsoft YaHei"/>
+                <a:ea typeface="Microsoft YaHei"/>
+                <a:cs typeface="Microsoft YaHei"/>
+              </a:rPr>
+              <a:t>记录采纳/拒绝/理由</a:t>
+            </a:r>
+          </a:p>
+        </p:txBody>
+      </p:sp>
+      <p:sp>
+        <p:nvSpPr>
+          <p:cNvPr id="12" name="h-2">
+            <a:extLst xmlns:a="http://schemas.openxmlformats.org/drawingml/2006/main">
+              <a:ext uri="{FF2B5EF4-FFF2-40B4-BE49-F238E27FC236}">
+                <a16:creationId xmlns:a16="http://schemas.microsoft.com/office/drawing/2014/main" id="{84B8675B-B03D-423E-BD06-D083897638E4}"/>
+              </a:ext>
+            </a:extLst>
+          </p:cNvPr>
+          <p:cNvSpPr>
+            <a:spLocks xmlns:a="http://schemas.openxmlformats.org/drawingml/2006/main" noGrp="1"/>
+          </p:cNvSpPr>
+          <p:nvPr/>
+        </p:nvSpPr>
+        <p:spPr>
+          <a:xfrm xmlns:a="http://schemas.openxmlformats.org/drawingml/2006/main">
+            <a:off x="8286750" y="1257300"/>
+            <a:ext cx="3276600" cy="514350"/>
+          </a:xfrm>
+          <a:prstGeom xmlns:a="http://schemas.openxmlformats.org/drawingml/2006/main" prst="rect">
+            <a:avLst/>
+          </a:prstGeom>
+          <a:solidFill xmlns:a="http://schemas.openxmlformats.org/drawingml/2006/main">
+            <a:srgbClr val="28745A"/>
+          </a:solidFill>
+          <a:ln xmlns:a="http://schemas.openxmlformats.org/drawingml/2006/main" w="0">
+            <a:noFill/>
+            <a:prstDash val="solid"/>
+          </a:ln>
+        </p:spPr>
+        <p:txBody>
+          <a:bodyPr xmlns:a="http://schemas.openxmlformats.org/drawingml/2006/main" lIns="76200" tIns="38100" rIns="76200" bIns="38100" anchor="ctr"/>
+          <a:lstStyle xmlns:a="http://schemas.openxmlformats.org/drawingml/2006/main"/>
+          <a:p xmlns:a="http://schemas.openxmlformats.org/drawingml/2006/main">
+            <a:pPr algn="ctr">
+              <a:buNone/>
+              <a:defRPr sz="1800" b="1">
+                <a:solidFill>
+                  <a:srgbClr val="FFFFFF"/>
+                </a:solidFill>
+              </a:defRPr>
+            </a:pPr>
+            <a:r>
+              <a:rPr sz="1800" b="1">
+                <a:solidFill>
+                  <a:srgbClr val="FFFFFF"/>
+                </a:solidFill>
+                <a:latin typeface="Microsoft YaHei"/>
+                <a:ea typeface="Microsoft YaHei"/>
+                <a:cs typeface="Microsoft YaHei"/>
+              </a:rPr>
+              <a:t>第 16 课</a:t>
+            </a:r>
+          </a:p>
+        </p:txBody>
+      </p:sp>
+      <p:sp>
+        <p:nvSpPr>
+          <p:cNvPr id="13" name="d-2">
+            <a:extLst xmlns:a="http://schemas.openxmlformats.org/drawingml/2006/main">
+              <a:ext uri="{FF2B5EF4-FFF2-40B4-BE49-F238E27FC236}">
+                <a16:creationId xmlns:a16="http://schemas.microsoft.com/office/drawing/2014/main" id="{B3918B03-2A74-4DE9-A43B-EEFBA6E7E9E7}"/>
+              </a:ext>
+            </a:extLst>
+          </p:cNvPr>
+          <p:cNvSpPr>
+            <a:spLocks xmlns:a="http://schemas.openxmlformats.org/drawingml/2006/main" noGrp="1"/>
+          </p:cNvSpPr>
+          <p:nvPr/>
+        </p:nvSpPr>
+        <p:spPr>
+          <a:xfrm xmlns:a="http://schemas.openxmlformats.org/drawingml/2006/main">
+            <a:off x="8286750" y="1771650"/>
+            <a:ext cx="3276600" cy="1104900"/>
+          </a:xfrm>
+          <a:prstGeom xmlns:a="http://schemas.openxmlformats.org/drawingml/2006/main" prst="roundRect">
+            <a:avLst>
+              <a:gd name="adj" fmla="val 6897"/>
+            </a:avLst>
+          </a:prstGeom>
+          <a:solidFill xmlns:a="http://schemas.openxmlformats.org/drawingml/2006/main">
+            <a:srgbClr val="E7F2ED"/>
+          </a:solidFill>
+          <a:ln xmlns:a="http://schemas.openxmlformats.org/drawingml/2006/main" w="9525">
+            <a:solidFill>
+              <a:srgbClr val="D6DDE2"/>
+            </a:solidFill>
+            <a:prstDash val="solid"/>
+          </a:ln>
+        </p:spPr>
+        <p:txBody>
+          <a:bodyPr xmlns:a="http://schemas.openxmlformats.org/drawingml/2006/main" lIns="76200" tIns="38100" rIns="76200" bIns="38100" anchor="ctr"/>
+          <a:lstStyle xmlns:a="http://schemas.openxmlformats.org/drawingml/2006/main"/>
+          <a:p xmlns:a="http://schemas.openxmlformats.org/drawingml/2006/main">
+            <a:pPr algn="ctr">
+              <a:lnSpc>
+                <a:spcPct val="125000"/>
+              </a:lnSpc>
+              <a:buNone/>
+              <a:defRPr sz="1500" b="1">
+                <a:solidFill>
+                  <a:srgbClr val="263746"/>
+                </a:solidFill>
+              </a:defRPr>
+            </a:pPr>
+            <a:r>
+              <a:rPr sz="1500" b="1">
+                <a:solidFill>
+                  <a:srgbClr val="263746"/>
+                </a:solidFill>
+                <a:latin typeface="Microsoft YaHei"/>
+                <a:ea typeface="Microsoft YaHei"/>
+                <a:cs typeface="Microsoft YaHei"/>
+              </a:rPr>
+              <a:t>补齐状态、展示与复盘</a:t>
+            </a:r>
+          </a:p>
+          <a:p xmlns:a="http://schemas.openxmlformats.org/drawingml/2006/main">
+            <a:pPr algn="ctr">
+              <a:lnSpc>
+                <a:spcPct val="125000"/>
+              </a:lnSpc>
+              <a:buNone/>
+              <a:defRPr sz="1500" b="1">
+                <a:solidFill>
+                  <a:srgbClr val="263746"/>
+                </a:solidFill>
+              </a:defRPr>
+            </a:pPr>
+            <a:r>
+              <a:rPr sz="1500" b="1">
+                <a:solidFill>
+                  <a:srgbClr val="263746"/>
+                </a:solidFill>
+                <a:latin typeface="Microsoft YaHei"/>
+                <a:ea typeface="Microsoft YaHei"/>
+                <a:cs typeface="Microsoft YaHei"/>
+              </a:rPr>
+              <a:t>合并提交论证门</a:t>
+            </a:r>
+          </a:p>
+        </p:txBody>
+      </p:sp>
+      <p:sp>
+        <p:nvSpPr>
+          <p:cNvPr id="14" name="exit-h">
+            <a:extLst xmlns:a="http://schemas.openxmlformats.org/drawingml/2006/main">
+              <a:ext uri="{FF2B5EF4-FFF2-40B4-BE49-F238E27FC236}">
+                <a16:creationId xmlns:a16="http://schemas.microsoft.com/office/drawing/2014/main" id="{4AFF952A-C9DD-4E9E-B949-6F424411B1C8}"/>
+              </a:ext>
+            </a:extLst>
+          </p:cNvPr>
+          <p:cNvSpPr>
+            <a:spLocks xmlns:a="http://schemas.openxmlformats.org/drawingml/2006/main" noGrp="1"/>
+          </p:cNvSpPr>
+          <p:nvPr/>
+        </p:nvSpPr>
+        <p:spPr>
+          <a:xfrm xmlns:a="http://schemas.openxmlformats.org/drawingml/2006/main">
+            <a:off x="933450" y="3295650"/>
+            <a:ext cx="10325100" cy="457200"/>
+          </a:xfrm>
+          <a:prstGeom xmlns:a="http://schemas.openxmlformats.org/drawingml/2006/main" prst="rect">
+            <a:avLst/>
+          </a:prstGeom>
+          <a:noFill xmlns:a="http://schemas.openxmlformats.org/drawingml/2006/main"/>
+          <a:ln xmlns:a="http://schemas.openxmlformats.org/drawingml/2006/main" w="0">
+            <a:noFill/>
+            <a:prstDash val="solid"/>
+          </a:ln>
+        </p:spPr>
+        <p:txBody>
+          <a:bodyPr xmlns:a="http://schemas.openxmlformats.org/drawingml/2006/main" lIns="76200" tIns="38100" rIns="76200" bIns="38100" anchor="ctr"/>
+          <a:lstStyle xmlns:a="http://schemas.openxmlformats.org/drawingml/2006/main"/>
+          <a:p xmlns:a="http://schemas.openxmlformats.org/drawingml/2006/main">
+            <a:pPr algn="ctr">
+              <a:buNone/>
+              <a:defRPr sz="1725" b="1">
+                <a:solidFill>
+                  <a:srgbClr val="C8161E"/>
+                </a:solidFill>
+              </a:defRPr>
+            </a:pPr>
+            <a:r>
+              <a:rPr sz="1725" b="1">
+                <a:solidFill>
+                  <a:srgbClr val="C8161E"/>
+                </a:solidFill>
+                <a:latin typeface="Microsoft YaHei"/>
+                <a:ea typeface="Microsoft YaHei"/>
+                <a:cs typeface="Microsoft YaHei"/>
+              </a:rPr>
+              <a:t>退出卡｜留下可用于第 15 课调整的六个判断</a:t>
+            </a:r>
+          </a:p>
+        </p:txBody>
+      </p:sp>
+      <p:sp>
+        <p:nvSpPr>
+          <p:cNvPr id="15" name="e-0">
+            <a:extLst xmlns:a="http://schemas.openxmlformats.org/drawingml/2006/main">
+              <a:ext uri="{FF2B5EF4-FFF2-40B4-BE49-F238E27FC236}">
+                <a16:creationId xmlns:a16="http://schemas.microsoft.com/office/drawing/2014/main" id="{8B30E685-704A-43DC-9B5E-6040838663B3}"/>
+              </a:ext>
+            </a:extLst>
+          </p:cNvPr>
+          <p:cNvSpPr>
+            <a:spLocks xmlns:a="http://schemas.openxmlformats.org/drawingml/2006/main" noGrp="1"/>
+          </p:cNvSpPr>
+          <p:nvPr/>
+        </p:nvSpPr>
+        <p:spPr>
+          <a:xfrm xmlns:a="http://schemas.openxmlformats.org/drawingml/2006/main">
+            <a:off x="666750" y="3943350"/>
+            <a:ext cx="3524250" cy="476250"/>
+          </a:xfrm>
+          <a:prstGeom xmlns:a="http://schemas.openxmlformats.org/drawingml/2006/main" prst="roundRect">
+            <a:avLst>
+              <a:gd name="adj" fmla="val 16000"/>
+            </a:avLst>
+          </a:prstGeom>
+          <a:solidFill xmlns:a="http://schemas.openxmlformats.org/drawingml/2006/main">
+            <a:srgbClr val="E8F0F6"/>
+          </a:solidFill>
+          <a:ln xmlns:a="http://schemas.openxmlformats.org/drawingml/2006/main" w="0">
+            <a:noFill/>
+            <a:prstDash val="solid"/>
+          </a:ln>
+        </p:spPr>
+        <p:txBody>
+          <a:bodyPr xmlns:a="http://schemas.openxmlformats.org/drawingml/2006/main" lIns="76200" tIns="38100" rIns="76200" bIns="38100" anchor="ctr"/>
+          <a:lstStyle xmlns:a="http://schemas.openxmlformats.org/drawingml/2006/main"/>
+          <a:p xmlns:a="http://schemas.openxmlformats.org/drawingml/2006/main">
+            <a:pPr algn="ctr">
+              <a:buNone/>
+              <a:defRPr sz="1350" b="1">
+                <a:solidFill>
+                  <a:srgbClr val="18354E"/>
+                </a:solidFill>
+              </a:defRPr>
+            </a:pPr>
+            <a:r>
+              <a:rPr sz="1350" b="1">
+                <a:solidFill>
+                  <a:srgbClr val="18354E"/>
+                </a:solidFill>
+                <a:latin typeface="Microsoft YaHei"/>
+                <a:ea typeface="Microsoft YaHei"/>
+                <a:cs typeface="Microsoft YaHei"/>
+              </a:rPr>
+              <a:t>最清楚的一点</a:t>
+            </a:r>
+          </a:p>
+        </p:txBody>
+      </p:sp>
+      <p:sp>
+        <p:nvSpPr>
+          <p:cNvPr id="16" name="e-1">
+            <a:extLst xmlns:a="http://schemas.openxmlformats.org/drawingml/2006/main">
+              <a:ext uri="{FF2B5EF4-FFF2-40B4-BE49-F238E27FC236}">
+                <a16:creationId xmlns:a16="http://schemas.microsoft.com/office/drawing/2014/main" id="{FFEA7080-7736-438E-A04A-E6A985802E4E}"/>
+              </a:ext>
+            </a:extLst>
+          </p:cNvPr>
+          <p:cNvSpPr>
+            <a:spLocks xmlns:a="http://schemas.openxmlformats.org/drawingml/2006/main" noGrp="1"/>
+          </p:cNvSpPr>
+          <p:nvPr/>
+        </p:nvSpPr>
+        <p:spPr>
+          <a:xfrm xmlns:a="http://schemas.openxmlformats.org/drawingml/2006/main">
+            <a:off x="4476750" y="3943350"/>
+            <a:ext cx="3524250" cy="476250"/>
+          </a:xfrm>
+          <a:prstGeom xmlns:a="http://schemas.openxmlformats.org/drawingml/2006/main" prst="roundRect">
+            <a:avLst>
+              <a:gd name="adj" fmla="val 16000"/>
+            </a:avLst>
+          </a:prstGeom>
+          <a:solidFill xmlns:a="http://schemas.openxmlformats.org/drawingml/2006/main">
+            <a:srgbClr val="E8F0F6"/>
+          </a:solidFill>
+          <a:ln xmlns:a="http://schemas.openxmlformats.org/drawingml/2006/main" w="0">
+            <a:noFill/>
+            <a:prstDash val="solid"/>
+          </a:ln>
+        </p:spPr>
+        <p:txBody>
+          <a:bodyPr xmlns:a="http://schemas.openxmlformats.org/drawingml/2006/main" lIns="76200" tIns="38100" rIns="76200" bIns="38100" anchor="ctr"/>
+          <a:lstStyle xmlns:a="http://schemas.openxmlformats.org/drawingml/2006/main"/>
+          <a:p xmlns:a="http://schemas.openxmlformats.org/drawingml/2006/main">
+            <a:pPr algn="ctr">
+              <a:buNone/>
+              <a:defRPr sz="1350" b="1">
+                <a:solidFill>
+                  <a:srgbClr val="18354E"/>
+                </a:solidFill>
+              </a:defRPr>
+            </a:pPr>
+            <a:r>
+              <a:rPr sz="1350" b="1">
+                <a:solidFill>
+                  <a:srgbClr val="18354E"/>
+                </a:solidFill>
+                <a:latin typeface="Microsoft YaHei"/>
+                <a:ea typeface="Microsoft YaHei"/>
+                <a:cs typeface="Microsoft YaHei"/>
+              </a:rPr>
+              <a:t>仍困惑的一点</a:t>
+            </a:r>
+          </a:p>
+        </p:txBody>
+      </p:sp>
+      <p:sp>
+        <p:nvSpPr>
+          <p:cNvPr id="17" name="e-2">
+            <a:extLst xmlns:a="http://schemas.openxmlformats.org/drawingml/2006/main">
+              <a:ext uri="{FF2B5EF4-FFF2-40B4-BE49-F238E27FC236}">
+                <a16:creationId xmlns:a16="http://schemas.microsoft.com/office/drawing/2014/main" id="{1C20C441-9F67-48B4-88BA-16E85BDF47B2}"/>
+              </a:ext>
+            </a:extLst>
+          </p:cNvPr>
+          <p:cNvSpPr>
+            <a:spLocks xmlns:a="http://schemas.openxmlformats.org/drawingml/2006/main" noGrp="1"/>
+          </p:cNvSpPr>
+          <p:nvPr/>
+        </p:nvSpPr>
+        <p:spPr>
+          <a:xfrm xmlns:a="http://schemas.openxmlformats.org/drawingml/2006/main">
+            <a:off x="8286750" y="3943350"/>
+            <a:ext cx="3524250" cy="476250"/>
+          </a:xfrm>
+          <a:prstGeom xmlns:a="http://schemas.openxmlformats.org/drawingml/2006/main" prst="roundRect">
+            <a:avLst>
+              <a:gd name="adj" fmla="val 16000"/>
+            </a:avLst>
+          </a:prstGeom>
+          <a:solidFill xmlns:a="http://schemas.openxmlformats.org/drawingml/2006/main">
+            <a:srgbClr val="F8E9EA"/>
+          </a:solidFill>
+          <a:ln xmlns:a="http://schemas.openxmlformats.org/drawingml/2006/main" w="0">
+            <a:noFill/>
+            <a:prstDash val="solid"/>
+          </a:ln>
+        </p:spPr>
+        <p:txBody>
+          <a:bodyPr xmlns:a="http://schemas.openxmlformats.org/drawingml/2006/main" lIns="76200" tIns="38100" rIns="76200" bIns="38100" anchor="ctr"/>
+          <a:lstStyle xmlns:a="http://schemas.openxmlformats.org/drawingml/2006/main"/>
+          <a:p xmlns:a="http://schemas.openxmlformats.org/drawingml/2006/main">
+            <a:pPr algn="ctr">
+              <a:buNone/>
+              <a:defRPr sz="1350" b="1">
+                <a:solidFill>
+                  <a:srgbClr val="C8161E"/>
+                </a:solidFill>
+              </a:defRPr>
+            </a:pPr>
+            <a:r>
+              <a:rPr sz="1350" b="1">
+                <a:solidFill>
+                  <a:srgbClr val="C8161E"/>
+                </a:solidFill>
+                <a:latin typeface="Microsoft YaHei"/>
+                <a:ea typeface="Microsoft YaHei"/>
+                <a:cs typeface="Microsoft YaHei"/>
+              </a:rPr>
+              <a:t>追踪表三字段齐全？</a:t>
+            </a:r>
+          </a:p>
+        </p:txBody>
+      </p:sp>
+      <p:sp>
+        <p:nvSpPr>
+          <p:cNvPr id="18" name="e-3">
+            <a:extLst xmlns:a="http://schemas.openxmlformats.org/drawingml/2006/main">
+              <a:ext uri="{FF2B5EF4-FFF2-40B4-BE49-F238E27FC236}">
+                <a16:creationId xmlns:a16="http://schemas.microsoft.com/office/drawing/2014/main" id="{80058654-7119-43A0-B51A-1B1ABDC63944}"/>
+              </a:ext>
+            </a:extLst>
+          </p:cNvPr>
+          <p:cNvSpPr>
+            <a:spLocks xmlns:a="http://schemas.openxmlformats.org/drawingml/2006/main" noGrp="1"/>
+          </p:cNvSpPr>
+          <p:nvPr/>
+        </p:nvSpPr>
+        <p:spPr>
+          <a:xfrm xmlns:a="http://schemas.openxmlformats.org/drawingml/2006/main">
+            <a:off x="666750" y="4610100"/>
+            <a:ext cx="3524250" cy="476250"/>
+          </a:xfrm>
+          <a:prstGeom xmlns:a="http://schemas.openxmlformats.org/drawingml/2006/main" prst="roundRect">
+            <a:avLst>
+              <a:gd name="adj" fmla="val 16000"/>
+            </a:avLst>
+          </a:prstGeom>
+          <a:solidFill xmlns:a="http://schemas.openxmlformats.org/drawingml/2006/main">
+            <a:srgbClr val="F8E9EA"/>
+          </a:solidFill>
+          <a:ln xmlns:a="http://schemas.openxmlformats.org/drawingml/2006/main" w="0">
+            <a:noFill/>
+            <a:prstDash val="solid"/>
+          </a:ln>
+        </p:spPr>
+        <p:txBody>
+          <a:bodyPr xmlns:a="http://schemas.openxmlformats.org/drawingml/2006/main" lIns="76200" tIns="38100" rIns="76200" bIns="38100" anchor="ctr"/>
+          <a:lstStyle xmlns:a="http://schemas.openxmlformats.org/drawingml/2006/main"/>
+          <a:p xmlns:a="http://schemas.openxmlformats.org/drawingml/2006/main">
+            <a:pPr algn="ctr">
+              <a:buNone/>
+              <a:defRPr sz="1350" b="1">
+                <a:solidFill>
+                  <a:srgbClr val="C8161E"/>
+                </a:solidFill>
+              </a:defRPr>
+            </a:pPr>
+            <a:r>
+              <a:rPr sz="1350" b="1">
+                <a:solidFill>
+                  <a:srgbClr val="C8161E"/>
+                </a:solidFill>
+                <a:latin typeface="Microsoft YaHei"/>
+                <a:ea typeface="Microsoft YaHei"/>
+                <a:cs typeface="Microsoft YaHei"/>
+              </a:rPr>
+              <a:t>负向结果已写回？</a:t>
+            </a:r>
+          </a:p>
+        </p:txBody>
+      </p:sp>
+      <p:sp>
+        <p:nvSpPr>
+          <p:cNvPr id="19" name="e-4">
+            <a:extLst xmlns:a="http://schemas.openxmlformats.org/drawingml/2006/main">
+              <a:ext uri="{FF2B5EF4-FFF2-40B4-BE49-F238E27FC236}">
+                <a16:creationId xmlns:a16="http://schemas.microsoft.com/office/drawing/2014/main" id="{97DAD56A-C3F3-47CA-9766-1954CBA66747}"/>
+              </a:ext>
+            </a:extLst>
+          </p:cNvPr>
+          <p:cNvSpPr>
+            <a:spLocks xmlns:a="http://schemas.openxmlformats.org/drawingml/2006/main" noGrp="1"/>
+          </p:cNvSpPr>
+          <p:nvPr/>
+        </p:nvSpPr>
+        <p:spPr>
+          <a:xfrm xmlns:a="http://schemas.openxmlformats.org/drawingml/2006/main">
+            <a:off x="4476750" y="4610100"/>
+            <a:ext cx="3524250" cy="476250"/>
+          </a:xfrm>
+          <a:prstGeom xmlns:a="http://schemas.openxmlformats.org/drawingml/2006/main" prst="roundRect">
+            <a:avLst>
+              <a:gd name="adj" fmla="val 16000"/>
+            </a:avLst>
+          </a:prstGeom>
+          <a:solidFill xmlns:a="http://schemas.openxmlformats.org/drawingml/2006/main">
+            <a:srgbClr val="F8E9EA"/>
+          </a:solidFill>
+          <a:ln xmlns:a="http://schemas.openxmlformats.org/drawingml/2006/main" w="0">
+            <a:noFill/>
+            <a:prstDash val="solid"/>
+          </a:ln>
+        </p:spPr>
+        <p:txBody>
+          <a:bodyPr xmlns:a="http://schemas.openxmlformats.org/drawingml/2006/main" lIns="76200" tIns="38100" rIns="76200" bIns="38100" anchor="ctr"/>
+          <a:lstStyle xmlns:a="http://schemas.openxmlformats.org/drawingml/2006/main"/>
+          <a:p xmlns:a="http://schemas.openxmlformats.org/drawingml/2006/main">
+            <a:pPr algn="ctr">
+              <a:buNone/>
+              <a:defRPr sz="1350" b="1">
+                <a:solidFill>
+                  <a:srgbClr val="C8161E"/>
+                </a:solidFill>
+              </a:defRPr>
+            </a:pPr>
+            <a:r>
+              <a:rPr sz="1350" b="1">
+                <a:solidFill>
+                  <a:srgbClr val="C8161E"/>
+                </a:solidFill>
+                <a:latin typeface="Microsoft YaHei"/>
+                <a:ea typeface="Microsoft YaHei"/>
+                <a:cs typeface="Microsoft YaHei"/>
+              </a:rPr>
+              <a:t>披露失败字段具体？</a:t>
+            </a:r>
+          </a:p>
+        </p:txBody>
+      </p:sp>
+      <p:sp>
+        <p:nvSpPr>
+          <p:cNvPr id="20" name="e-5">
+            <a:extLst xmlns:a="http://schemas.openxmlformats.org/drawingml/2006/main">
+              <a:ext uri="{FF2B5EF4-FFF2-40B4-BE49-F238E27FC236}">
+                <a16:creationId xmlns:a16="http://schemas.microsoft.com/office/drawing/2014/main" id="{DBC646DE-BB98-43FB-9658-671FAE679166}"/>
+              </a:ext>
+            </a:extLst>
+          </p:cNvPr>
+          <p:cNvSpPr>
+            <a:spLocks xmlns:a="http://schemas.openxmlformats.org/drawingml/2006/main" noGrp="1"/>
+          </p:cNvSpPr>
+          <p:nvPr/>
+        </p:nvSpPr>
+        <p:spPr>
+          <a:xfrm xmlns:a="http://schemas.openxmlformats.org/drawingml/2006/main">
+            <a:off x="8286750" y="4610100"/>
+            <a:ext cx="3524250" cy="476250"/>
+          </a:xfrm>
+          <a:prstGeom xmlns:a="http://schemas.openxmlformats.org/drawingml/2006/main" prst="roundRect">
+            <a:avLst>
+              <a:gd name="adj" fmla="val 16000"/>
+            </a:avLst>
+          </a:prstGeom>
+          <a:solidFill xmlns:a="http://schemas.openxmlformats.org/drawingml/2006/main">
+            <a:srgbClr val="F8E9EA"/>
+          </a:solidFill>
+          <a:ln xmlns:a="http://schemas.openxmlformats.org/drawingml/2006/main" w="0">
+            <a:noFill/>
+            <a:prstDash val="solid"/>
+          </a:ln>
+        </p:spPr>
+        <p:txBody>
+          <a:bodyPr xmlns:a="http://schemas.openxmlformats.org/drawingml/2006/main" lIns="76200" tIns="38100" rIns="76200" bIns="38100" anchor="ctr"/>
+          <a:lstStyle xmlns:a="http://schemas.openxmlformats.org/drawingml/2006/main"/>
+          <a:p xmlns:a="http://schemas.openxmlformats.org/drawingml/2006/main">
+            <a:pPr algn="ctr">
+              <a:buNone/>
+              <a:defRPr sz="1350" b="1">
+                <a:solidFill>
+                  <a:srgbClr val="C8161E"/>
+                </a:solidFill>
+              </a:defRPr>
+            </a:pPr>
+            <a:r>
+              <a:rPr sz="1350" b="1">
+                <a:solidFill>
+                  <a:srgbClr val="C8161E"/>
+                </a:solidFill>
+                <a:latin typeface="Microsoft YaHei"/>
+                <a:ea typeface="Microsoft YaHei"/>
+                <a:cs typeface="Microsoft YaHei"/>
+              </a:rPr>
+              <a:t>最可能不通过哪一项？</a:t>
+            </a:r>
+          </a:p>
+        </p:txBody>
+      </p:sp>
+    </p:spTree>
+    <p:extLst>
+      <p:ext uri="{BB962C8B-B14F-4D97-AF65-F5344CB8AC3E}">
+        <p14:creationId xmlns:p14="http://schemas.microsoft.com/office/powerpoint/2010/main" val="1443728403"/>
+      </p:ext>
+    </p:extLst>
+  </p:cSld>
+</p:sld>
+</file>
+
+<file path=ppt/slides/slide18.xml><?xml version="1.0" encoding="utf-8"?>
+<p:sld xmlns:p="http://schemas.openxmlformats.org/presentationml/2006/main">
+  <p:cSld>
+    <p:spTree>
+      <p:nvGrpSpPr>
+        <p:cNvPr id="1" name=""/>
+        <p:cNvGrpSpPr/>
+        <p:nvPr/>
+      </p:nvGrpSpPr>
+      <p:grpSpPr>
+        <a:xfrm xmlns:a="http://schemas.openxmlformats.org/drawingml/2006/main"/>
+      </p:grpSpPr>
+      <p:sp>
+        <p:nvSpPr>
+          <p:cNvPr id="4" name="Text Placeholder 3">
+            <a:extLst xmlns:a="http://schemas.openxmlformats.org/drawingml/2006/main">
+              <a:ext uri="{FF2B5EF4-FFF2-40B4-BE49-F238E27FC236}">
+                <a16:creationId xmlns:a16="http://schemas.microsoft.com/office/drawing/2014/main" id="{4D941B40-7A0A-534E-3563-CA11753C8E3F}"/>
+              </a:ext>
+            </a:extLst>
+          </p:cNvPr>
+          <p:cNvSpPr>
+            <a:spLocks xmlns:a="http://schemas.openxmlformats.org/drawingml/2006/main" noGrp="1"/>
+          </p:cNvSpPr>
+          <p:nvPr>
+            <p:ph type="body" idx="14"/>
+          </p:nvPr>
+        </p:nvSpPr>
+        <p:spPr>
+          <a:xfrm xmlns:a="http://schemas.openxmlformats.org/drawingml/2006/main">
+            <a:off x="1028700" y="28575"/>
+            <a:ext cx="10668000" cy="628650"/>
+          </a:xfrm>
+        </p:spPr>
+        <p:txBody>
+          <a:bodyPr xmlns:a="http://schemas.openxmlformats.org/drawingml/2006/main" lIns="76200" tIns="0" rIns="76200" bIns="0" anchor="ctr"/>
+          <a:lstStyle xmlns:a="http://schemas.openxmlformats.org/drawingml/2006/main"/>
+          <a:p xmlns:a="http://schemas.openxmlformats.org/drawingml/2006/main">
+            <a:pPr algn="l">
+              <a:buNone/>
+            </a:pPr>
+            <a:r>
+              <a:rPr sz="2250" b="1">
+                <a:solidFill>
+                  <a:srgbClr val="FFFFFF"/>
+                </a:solidFill>
+                <a:latin typeface="Microsoft YaHei"/>
+                <a:ea typeface="Microsoft YaHei"/>
+                <a:cs typeface="Microsoft YaHei"/>
+              </a:rPr>
+              <a:t>课后引导阅读</a:t>
+            </a:r>
+            <a:endParaRPr/>
+          </a:p>
+        </p:txBody>
+      </p:sp>
+      <p:sp>
+        <p:nvSpPr>
+          <p:cNvPr id="5" name="Slide Number Placeholder 4">
+            <a:extLst xmlns:a="http://schemas.openxmlformats.org/drawingml/2006/main">
+              <a:ext uri="{FF2B5EF4-FFF2-40B4-BE49-F238E27FC236}">
+                <a16:creationId xmlns:a16="http://schemas.microsoft.com/office/drawing/2014/main" id="{EBA5909F-738E-F60C-BE8C-B3F1D94548E5}"/>
+              </a:ext>
+            </a:extLst>
+          </p:cNvPr>
+          <p:cNvSpPr>
+            <a:spLocks xmlns:a="http://schemas.openxmlformats.org/drawingml/2006/main" noGrp="1"/>
+          </p:cNvSpPr>
+          <p:nvPr>
+            <p:ph type="sldNum" idx="10"/>
+          </p:nvPr>
+        </p:nvSpPr>
+        <p:spPr/>
+        <p:txBody>
+          <a:bodyPr xmlns:a="http://schemas.openxmlformats.org/drawingml/2006/main"/>
+          <a:lstStyle xmlns:a="http://schemas.openxmlformats.org/drawingml/2006/main"/>
+          <a:p xmlns:a="http://schemas.openxmlformats.org/drawingml/2006/main">
+            <a:fld id="{B1C6C81E-38B9-7560-621D-5A151A79DF9B}" type="slidenum">
+              <a:t>18</a:t>
+            </a:fld>
+            <a:endParaRPr/>
+          </a:p>
+        </p:txBody>
+      </p:sp>
+      <p:sp>
+        <p:nvSpPr>
           <p:cNvPr id="6" name="tag-0">
             <a:extLst xmlns:a="http://schemas.openxmlformats.org/drawingml/2006/main">
               <a:ext uri="{FF2B5EF4-FFF2-40B4-BE49-F238E27FC236}">
@@ -12210,6 +13172,7 @@
           <a:lstStyle xmlns:a="http://schemas.openxmlformats.org/drawingml/2006/main"/>
           <a:p xmlns:a="http://schemas.openxmlformats.org/drawingml/2006/main">
             <a:pPr algn="ctr">
+              <a:buNone/>
               <a:defRPr sz="1350" b="1">
                 <a:solidFill>
                   <a:srgbClr val="FFFFFF"/>
@@ -12265,6 +13228,7 @@
           <a:lstStyle xmlns:a="http://schemas.openxmlformats.org/drawingml/2006/main"/>
           <a:p xmlns:a="http://schemas.openxmlformats.org/drawingml/2006/main">
             <a:pPr algn="l">
+              <a:buNone/>
               <a:defRPr sz="1575" b="1">
                 <a:solidFill>
                   <a:srgbClr val="C8161E"/>
@@ -12324,6 +13288,7 @@
           <a:lstStyle xmlns:a="http://schemas.openxmlformats.org/drawingml/2006/main"/>
           <a:p xmlns:a="http://schemas.openxmlformats.org/drawingml/2006/main">
             <a:pPr algn="l">
+              <a:buNone/>
               <a:defRPr sz="1425" b="1">
                 <a:solidFill>
                   <a:srgbClr val="263746"/>
@@ -12381,6 +13346,7 @@
           <a:lstStyle xmlns:a="http://schemas.openxmlformats.org/drawingml/2006/main"/>
           <a:p xmlns:a="http://schemas.openxmlformats.org/drawingml/2006/main">
             <a:pPr algn="ctr">
+              <a:buNone/>
               <a:defRPr sz="1350" b="1">
                 <a:solidFill>
                   <a:srgbClr val="FFFFFF"/>
@@ -12436,6 +13402,7 @@
           <a:lstStyle xmlns:a="http://schemas.openxmlformats.org/drawingml/2006/main"/>
           <a:p xmlns:a="http://schemas.openxmlformats.org/drawingml/2006/main">
             <a:pPr algn="l">
+              <a:buNone/>
               <a:defRPr sz="1575" b="1">
                 <a:solidFill>
                   <a:srgbClr val="18354E"/>
@@ -12495,6 +13462,7 @@
           <a:lstStyle xmlns:a="http://schemas.openxmlformats.org/drawingml/2006/main"/>
           <a:p xmlns:a="http://schemas.openxmlformats.org/drawingml/2006/main">
             <a:pPr algn="l">
+              <a:buNone/>
               <a:defRPr sz="1425" b="1">
                 <a:solidFill>
                   <a:srgbClr val="263746"/>
@@ -12552,6 +13520,7 @@
           <a:lstStyle xmlns:a="http://schemas.openxmlformats.org/drawingml/2006/main"/>
           <a:p xmlns:a="http://schemas.openxmlformats.org/drawingml/2006/main">
             <a:pPr algn="ctr">
+              <a:buNone/>
               <a:defRPr sz="1350" b="1">
                 <a:solidFill>
                   <a:srgbClr val="FFFFFF"/>
@@ -12607,6 +13576,7 @@
           <a:lstStyle xmlns:a="http://schemas.openxmlformats.org/drawingml/2006/main"/>
           <a:p xmlns:a="http://schemas.openxmlformats.org/drawingml/2006/main">
             <a:pPr algn="l">
+              <a:buNone/>
               <a:defRPr sz="1575" b="1">
                 <a:solidFill>
                   <a:srgbClr val="28745A"/>
@@ -12666,6 +13636,7 @@
           <a:lstStyle xmlns:a="http://schemas.openxmlformats.org/drawingml/2006/main"/>
           <a:p xmlns:a="http://schemas.openxmlformats.org/drawingml/2006/main">
             <a:pPr algn="l">
+              <a:buNone/>
               <a:defRPr sz="1425" b="1">
                 <a:solidFill>
                   <a:srgbClr val="263746"/>
@@ -12723,6 +13694,7 @@
           <a:lstStyle xmlns:a="http://schemas.openxmlformats.org/drawingml/2006/main"/>
           <a:p xmlns:a="http://schemas.openxmlformats.org/drawingml/2006/main">
             <a:pPr algn="ctr">
+              <a:buNone/>
               <a:defRPr sz="1725" b="1">
                 <a:solidFill>
                   <a:srgbClr val="FFFFFF"/>
@@ -12776,6 +13748,7 @@
           <a:lstStyle xmlns:a="http://schemas.openxmlformats.org/drawingml/2006/main"/>
           <a:p xmlns:a="http://schemas.openxmlformats.org/drawingml/2006/main">
             <a:pPr algn="ctr">
+              <a:buNone/>
               <a:defRPr sz="1575" b="1">
                 <a:solidFill>
                   <a:srgbClr val="C8161E"/>
@@ -12923,6 +13896,7 @@
           <a:lstStyle xmlns:a="http://schemas.openxmlformats.org/drawingml/2006/main"/>
           <a:p xmlns:a="http://schemas.openxmlformats.org/drawingml/2006/main">
             <a:pPr algn="ctr">
+              <a:buNone/>
               <a:defRPr sz="1875" b="1">
                 <a:solidFill>
                   <a:srgbClr val="28745A"/>
@@ -12980,6 +13954,7 @@
           <a:lstStyle xmlns:a="http://schemas.openxmlformats.org/drawingml/2006/main"/>
           <a:p xmlns:a="http://schemas.openxmlformats.org/drawingml/2006/main">
             <a:pPr algn="ctr">
+              <a:buNone/>
               <a:defRPr sz="1425" b="1">
                 <a:solidFill>
                   <a:srgbClr val="28745A"/>
@@ -13037,6 +14012,7 @@
           <a:lstStyle xmlns:a="http://schemas.openxmlformats.org/drawingml/2006/main"/>
           <a:p xmlns:a="http://schemas.openxmlformats.org/drawingml/2006/main">
             <a:pPr algn="ctr">
+              <a:buNone/>
               <a:defRPr sz="1425" b="1">
                 <a:solidFill>
                   <a:srgbClr val="28745A"/>
@@ -13094,6 +14070,7 @@
           <a:lstStyle xmlns:a="http://schemas.openxmlformats.org/drawingml/2006/main"/>
           <a:p xmlns:a="http://schemas.openxmlformats.org/drawingml/2006/main">
             <a:pPr algn="ctr">
+              <a:buNone/>
               <a:defRPr sz="1425" b="1">
                 <a:solidFill>
                   <a:srgbClr val="28745A"/>
@@ -13151,6 +14128,7 @@
           <a:lstStyle xmlns:a="http://schemas.openxmlformats.org/drawingml/2006/main"/>
           <a:p xmlns:a="http://schemas.openxmlformats.org/drawingml/2006/main">
             <a:pPr algn="ctr">
+              <a:buNone/>
               <a:defRPr sz="1425" b="1">
                 <a:solidFill>
                   <a:srgbClr val="28745A"/>
@@ -13204,6 +14182,7 @@
           <a:lstStyle xmlns:a="http://schemas.openxmlformats.org/drawingml/2006/main"/>
           <a:p xmlns:a="http://schemas.openxmlformats.org/drawingml/2006/main">
             <a:pPr algn="ctr">
+              <a:buNone/>
               <a:defRPr sz="3600" b="1">
                 <a:solidFill>
                   <a:srgbClr val="C8161E"/>
@@ -13257,6 +14236,7 @@
           <a:lstStyle xmlns:a="http://schemas.openxmlformats.org/drawingml/2006/main"/>
           <a:p xmlns:a="http://schemas.openxmlformats.org/drawingml/2006/main">
             <a:pPr algn="ctr">
+              <a:buNone/>
               <a:defRPr sz="1875" b="1">
                 <a:solidFill>
                   <a:srgbClr val="C8161E"/>
@@ -13314,6 +14294,7 @@
           <a:lstStyle xmlns:a="http://schemas.openxmlformats.org/drawingml/2006/main"/>
           <a:p xmlns:a="http://schemas.openxmlformats.org/drawingml/2006/main">
             <a:pPr algn="ctr">
+              <a:buNone/>
               <a:defRPr sz="1425" b="1">
                 <a:solidFill>
                   <a:srgbClr val="C8161E"/>
@@ -13371,6 +14352,7 @@
           <a:lstStyle xmlns:a="http://schemas.openxmlformats.org/drawingml/2006/main"/>
           <a:p xmlns:a="http://schemas.openxmlformats.org/drawingml/2006/main">
             <a:pPr algn="ctr">
+              <a:buNone/>
               <a:defRPr sz="1425" b="1">
                 <a:solidFill>
                   <a:srgbClr val="C8161E"/>
@@ -13428,6 +14410,7 @@
           <a:lstStyle xmlns:a="http://schemas.openxmlformats.org/drawingml/2006/main"/>
           <a:p xmlns:a="http://schemas.openxmlformats.org/drawingml/2006/main">
             <a:pPr algn="ctr">
+              <a:buNone/>
               <a:defRPr sz="1425" b="1">
                 <a:solidFill>
                   <a:srgbClr val="C8161E"/>
@@ -13485,6 +14468,7 @@
           <a:lstStyle xmlns:a="http://schemas.openxmlformats.org/drawingml/2006/main"/>
           <a:p xmlns:a="http://schemas.openxmlformats.org/drawingml/2006/main">
             <a:pPr algn="ctr">
+              <a:buNone/>
               <a:defRPr sz="1425" b="1">
                 <a:solidFill>
                   <a:srgbClr val="C8161E"/>
@@ -13542,6 +14526,7 @@
           <a:lstStyle xmlns:a="http://schemas.openxmlformats.org/drawingml/2006/main"/>
           <a:p xmlns:a="http://schemas.openxmlformats.org/drawingml/2006/main">
             <a:pPr algn="ctr">
+              <a:buNone/>
               <a:defRPr sz="1725" b="1">
                 <a:solidFill>
                   <a:srgbClr val="FFFFFF"/>
@@ -13724,6 +14709,7 @@
           <a:lstStyle xmlns:a="http://schemas.openxmlformats.org/drawingml/2006/main"/>
           <a:p xmlns:a="http://schemas.openxmlformats.org/drawingml/2006/main">
             <a:pPr algn="ctr">
+              <a:buNone/>
               <a:defRPr sz="1350" b="1">
                 <a:solidFill>
                   <a:srgbClr val="FFFFFF"/>
@@ -13779,6 +14765,7 @@
           <a:lstStyle xmlns:a="http://schemas.openxmlformats.org/drawingml/2006/main"/>
           <a:p xmlns:a="http://schemas.openxmlformats.org/drawingml/2006/main">
             <a:pPr algn="ctr">
+              <a:buNone/>
               <a:defRPr sz="1425" b="1">
                 <a:solidFill>
                   <a:srgbClr val="18354E"/>
@@ -13867,6 +14854,7 @@
           <a:lstStyle xmlns:a="http://schemas.openxmlformats.org/drawingml/2006/main"/>
           <a:p xmlns:a="http://schemas.openxmlformats.org/drawingml/2006/main">
             <a:pPr algn="ctr">
+              <a:buNone/>
               <a:defRPr sz="1350" b="1">
                 <a:solidFill>
                   <a:srgbClr val="FFFFFF"/>
@@ -13922,6 +14910,7 @@
           <a:lstStyle xmlns:a="http://schemas.openxmlformats.org/drawingml/2006/main"/>
           <a:p xmlns:a="http://schemas.openxmlformats.org/drawingml/2006/main">
             <a:pPr algn="ctr">
+              <a:buNone/>
               <a:defRPr sz="1425" b="1">
                 <a:solidFill>
                   <a:srgbClr val="18354E"/>
@@ -14010,6 +14999,7 @@
           <a:lstStyle xmlns:a="http://schemas.openxmlformats.org/drawingml/2006/main"/>
           <a:p xmlns:a="http://schemas.openxmlformats.org/drawingml/2006/main">
             <a:pPr algn="ctr">
+              <a:buNone/>
               <a:defRPr sz="1350" b="1">
                 <a:solidFill>
                   <a:srgbClr val="FFFFFF"/>
@@ -14065,6 +15055,7 @@
           <a:lstStyle xmlns:a="http://schemas.openxmlformats.org/drawingml/2006/main"/>
           <a:p xmlns:a="http://schemas.openxmlformats.org/drawingml/2006/main">
             <a:pPr algn="ctr">
+              <a:buNone/>
               <a:defRPr sz="1425" b="1">
                 <a:solidFill>
                   <a:srgbClr val="18354E"/>
@@ -14153,6 +15144,7 @@
           <a:lstStyle xmlns:a="http://schemas.openxmlformats.org/drawingml/2006/main"/>
           <a:p xmlns:a="http://schemas.openxmlformats.org/drawingml/2006/main">
             <a:pPr algn="ctr">
+              <a:buNone/>
               <a:defRPr sz="1350" b="1">
                 <a:solidFill>
                   <a:srgbClr val="FFFFFF"/>
@@ -14208,6 +15200,7 @@
           <a:lstStyle xmlns:a="http://schemas.openxmlformats.org/drawingml/2006/main"/>
           <a:p xmlns:a="http://schemas.openxmlformats.org/drawingml/2006/main">
             <a:pPr algn="ctr">
+              <a:buNone/>
               <a:defRPr sz="1425" b="1">
                 <a:solidFill>
                   <a:srgbClr val="C8161E"/>
@@ -14265,6 +15258,7 @@
           <a:lstStyle xmlns:a="http://schemas.openxmlformats.org/drawingml/2006/main"/>
           <a:p xmlns:a="http://schemas.openxmlformats.org/drawingml/2006/main">
             <a:pPr algn="ctr">
+              <a:buNone/>
               <a:defRPr sz="1350" b="1">
                 <a:solidFill>
                   <a:srgbClr val="FFFFFF"/>
@@ -14320,6 +15314,7 @@
           <a:lstStyle xmlns:a="http://schemas.openxmlformats.org/drawingml/2006/main"/>
           <a:p xmlns:a="http://schemas.openxmlformats.org/drawingml/2006/main">
             <a:pPr algn="ctr">
+              <a:buNone/>
               <a:defRPr sz="1425" b="1">
                 <a:solidFill>
                   <a:srgbClr val="18354E"/>
@@ -14373,6 +15368,7 @@
           <a:lstStyle xmlns:a="http://schemas.openxmlformats.org/drawingml/2006/main"/>
           <a:p xmlns:a="http://schemas.openxmlformats.org/drawingml/2006/main">
             <a:pPr algn="ctr">
+              <a:buNone/>
               <a:defRPr sz="1950" b="1">
                 <a:solidFill>
                   <a:srgbClr val="C8161E"/>
@@ -14428,6 +15424,7 @@
           <a:lstStyle xmlns:a="http://schemas.openxmlformats.org/drawingml/2006/main"/>
           <a:p xmlns:a="http://schemas.openxmlformats.org/drawingml/2006/main">
             <a:pPr algn="ctr">
+              <a:buNone/>
               <a:defRPr sz="1575" b="1">
                 <a:solidFill>
                   <a:srgbClr val="FFFFFF"/>
@@ -14483,6 +15480,7 @@
           <a:lstStyle xmlns:a="http://schemas.openxmlformats.org/drawingml/2006/main"/>
           <a:p xmlns:a="http://schemas.openxmlformats.org/drawingml/2006/main">
             <a:pPr algn="ctr">
+              <a:buNone/>
               <a:defRPr sz="1425" b="1">
                 <a:solidFill>
                   <a:srgbClr val="263746"/>
@@ -14538,6 +15536,7 @@
           <a:lstStyle xmlns:a="http://schemas.openxmlformats.org/drawingml/2006/main"/>
           <a:p xmlns:a="http://schemas.openxmlformats.org/drawingml/2006/main">
             <a:pPr algn="ctr">
+              <a:buNone/>
               <a:defRPr sz="1575" b="1">
                 <a:solidFill>
                   <a:srgbClr val="FFFFFF"/>
@@ -14593,6 +15592,7 @@
           <a:lstStyle xmlns:a="http://schemas.openxmlformats.org/drawingml/2006/main"/>
           <a:p xmlns:a="http://schemas.openxmlformats.org/drawingml/2006/main">
             <a:pPr algn="ctr">
+              <a:buNone/>
               <a:defRPr sz="1425" b="1">
                 <a:solidFill>
                   <a:srgbClr val="263746"/>
@@ -14648,6 +15648,7 @@
           <a:lstStyle xmlns:a="http://schemas.openxmlformats.org/drawingml/2006/main"/>
           <a:p xmlns:a="http://schemas.openxmlformats.org/drawingml/2006/main">
             <a:pPr algn="ctr">
+              <a:buNone/>
               <a:defRPr sz="1575" b="1">
                 <a:solidFill>
                   <a:srgbClr val="FFFFFF"/>
@@ -14703,6 +15704,7 @@
           <a:lstStyle xmlns:a="http://schemas.openxmlformats.org/drawingml/2006/main"/>
           <a:p xmlns:a="http://schemas.openxmlformats.org/drawingml/2006/main">
             <a:pPr algn="ctr">
+              <a:buNone/>
               <a:defRPr sz="1425" b="1">
                 <a:solidFill>
                   <a:srgbClr val="263746"/>
@@ -14758,6 +15760,7 @@
           <a:lstStyle xmlns:a="http://schemas.openxmlformats.org/drawingml/2006/main"/>
           <a:p xmlns:a="http://schemas.openxmlformats.org/drawingml/2006/main">
             <a:pPr algn="ctr">
+              <a:buNone/>
               <a:defRPr sz="1575" b="1">
                 <a:solidFill>
                   <a:srgbClr val="FFFFFF"/>
@@ -14813,6 +15816,7 @@
           <a:lstStyle xmlns:a="http://schemas.openxmlformats.org/drawingml/2006/main"/>
           <a:p xmlns:a="http://schemas.openxmlformats.org/drawingml/2006/main">
             <a:pPr algn="ctr">
+              <a:buNone/>
               <a:defRPr sz="1425" b="1">
                 <a:solidFill>
                   <a:srgbClr val="263746"/>
@@ -14866,6 +15870,7 @@
           <a:lstStyle xmlns:a="http://schemas.openxmlformats.org/drawingml/2006/main"/>
           <a:p xmlns:a="http://schemas.openxmlformats.org/drawingml/2006/main">
             <a:pPr algn="ctr">
+              <a:buNone/>
               <a:defRPr sz="1650" b="1">
                 <a:solidFill>
                   <a:srgbClr val="C8161E"/>
@@ -15017,6 +16022,7 @@
           <a:lstStyle xmlns:a="http://schemas.openxmlformats.org/drawingml/2006/main"/>
           <a:p xmlns:a="http://schemas.openxmlformats.org/drawingml/2006/main">
             <a:pPr algn="ctr">
+              <a:buNone/>
               <a:defRPr sz="1800" b="1">
                 <a:solidFill>
                   <a:srgbClr val="C8161E"/>
@@ -15105,6 +16111,7 @@
           <a:lstStyle xmlns:a="http://schemas.openxmlformats.org/drawingml/2006/main"/>
           <a:p xmlns:a="http://schemas.openxmlformats.org/drawingml/2006/main">
             <a:pPr algn="ctr">
+              <a:buNone/>
               <a:defRPr sz="1350" b="1">
                 <a:solidFill>
                   <a:srgbClr val="FFFFFF"/>
@@ -15160,6 +16167,7 @@
           <a:lstStyle xmlns:a="http://schemas.openxmlformats.org/drawingml/2006/main"/>
           <a:p xmlns:a="http://schemas.openxmlformats.org/drawingml/2006/main">
             <a:pPr algn="ctr">
+              <a:buNone/>
               <a:defRPr sz="1725" b="1">
                 <a:solidFill>
                   <a:srgbClr val="C8161E"/>
@@ -15311,6 +16319,7 @@
           <a:lstStyle xmlns:a="http://schemas.openxmlformats.org/drawingml/2006/main"/>
           <a:p xmlns:a="http://schemas.openxmlformats.org/drawingml/2006/main">
             <a:pPr algn="ctr">
+              <a:buNone/>
               <a:defRPr sz="1350" b="1">
                 <a:solidFill>
                   <a:srgbClr val="FFFFFF"/>
@@ -15366,6 +16375,7 @@
           <a:lstStyle xmlns:a="http://schemas.openxmlformats.org/drawingml/2006/main"/>
           <a:p xmlns:a="http://schemas.openxmlformats.org/drawingml/2006/main">
             <a:pPr algn="ctr">
+              <a:buNone/>
               <a:defRPr sz="1725" b="1">
                 <a:solidFill>
                   <a:srgbClr val="2F638A"/>
@@ -15541,6 +16551,7 @@
           <a:lstStyle xmlns:a="http://schemas.openxmlformats.org/drawingml/2006/main"/>
           <a:p xmlns:a="http://schemas.openxmlformats.org/drawingml/2006/main">
             <a:pPr algn="ctr">
+              <a:buNone/>
               <a:defRPr sz="1350" b="1">
                 <a:solidFill>
                   <a:srgbClr val="FFFFFF"/>
@@ -15596,6 +16607,7 @@
           <a:lstStyle xmlns:a="http://schemas.openxmlformats.org/drawingml/2006/main"/>
           <a:p xmlns:a="http://schemas.openxmlformats.org/drawingml/2006/main">
             <a:pPr algn="ctr">
+              <a:buNone/>
               <a:defRPr sz="1725" b="1">
                 <a:solidFill>
                   <a:srgbClr val="A86C12"/>
@@ -15740,6 +16752,7 @@
           <a:lstStyle xmlns:a="http://schemas.openxmlformats.org/drawingml/2006/main"/>
           <a:p xmlns:a="http://schemas.openxmlformats.org/drawingml/2006/main">
             <a:pPr algn="ctr">
+              <a:buNone/>
               <a:defRPr sz="1350" b="1">
                 <a:solidFill>
                   <a:srgbClr val="FFFFFF"/>
@@ -15795,6 +16808,7 @@
           <a:lstStyle xmlns:a="http://schemas.openxmlformats.org/drawingml/2006/main"/>
           <a:p xmlns:a="http://schemas.openxmlformats.org/drawingml/2006/main">
             <a:pPr algn="ctr">
+              <a:buNone/>
               <a:defRPr sz="1725" b="1">
                 <a:solidFill>
                   <a:srgbClr val="28745A"/>
@@ -15939,6 +16953,7 @@
           <a:lstStyle xmlns:a="http://schemas.openxmlformats.org/drawingml/2006/main"/>
           <a:p xmlns:a="http://schemas.openxmlformats.org/drawingml/2006/main">
             <a:pPr algn="ctr">
+              <a:buNone/>
               <a:defRPr sz="1950" b="1">
                 <a:solidFill>
                   <a:srgbClr val="FFFFFF"/>
@@ -15992,6 +17007,7 @@
           <a:lstStyle xmlns:a="http://schemas.openxmlformats.org/drawingml/2006/main"/>
           <a:p xmlns:a="http://schemas.openxmlformats.org/drawingml/2006/main">
             <a:pPr algn="ctr">
+              <a:buNone/>
               <a:defRPr sz="1350" b="0">
                 <a:solidFill>
                   <a:srgbClr val="667684"/>
@@ -16141,6 +17157,7 @@
           <a:lstStyle xmlns:a="http://schemas.openxmlformats.org/drawingml/2006/main"/>
           <a:p xmlns:a="http://schemas.openxmlformats.org/drawingml/2006/main">
             <a:pPr algn="ctr">
+              <a:buNone/>
               <a:defRPr sz="1350" b="1">
                 <a:solidFill>
                   <a:srgbClr val="FFFFFF"/>
@@ -16196,6 +17213,7 @@
           <a:lstStyle xmlns:a="http://schemas.openxmlformats.org/drawingml/2006/main"/>
           <a:p xmlns:a="http://schemas.openxmlformats.org/drawingml/2006/main">
             <a:pPr algn="ctr">
+              <a:buNone/>
               <a:defRPr sz="1350" b="1">
                 <a:solidFill>
                   <a:srgbClr val="FFFFFF"/>
@@ -16251,6 +17269,7 @@
           <a:lstStyle xmlns:a="http://schemas.openxmlformats.org/drawingml/2006/main"/>
           <a:p xmlns:a="http://schemas.openxmlformats.org/drawingml/2006/main">
             <a:pPr algn="ctr">
+              <a:buNone/>
               <a:defRPr sz="1350" b="1">
                 <a:solidFill>
                   <a:srgbClr val="FFFFFF"/>
@@ -17223,6 +18242,7 @@
           <a:lstStyle xmlns:a="http://schemas.openxmlformats.org/drawingml/2006/main"/>
           <a:p xmlns:a="http://schemas.openxmlformats.org/drawingml/2006/main">
             <a:pPr algn="ctr">
+              <a:buNone/>
               <a:defRPr sz="1725" b="1">
                 <a:solidFill>
                   <a:srgbClr val="C8161E"/>
@@ -17374,6 +18394,7 @@
           <a:lstStyle xmlns:a="http://schemas.openxmlformats.org/drawingml/2006/main"/>
           <a:p xmlns:a="http://schemas.openxmlformats.org/drawingml/2006/main">
             <a:pPr algn="ctr">
+              <a:buNone/>
               <a:defRPr sz="1875" b="1">
                 <a:solidFill>
                   <a:srgbClr val="18354E"/>
@@ -17429,6 +18450,7 @@
           <a:lstStyle xmlns:a="http://schemas.openxmlformats.org/drawingml/2006/main"/>
           <a:p xmlns:a="http://schemas.openxmlformats.org/drawingml/2006/main">
             <a:pPr algn="ctr">
+              <a:buNone/>
               <a:defRPr sz="1725" b="1">
                 <a:solidFill>
                   <a:srgbClr val="C8161E"/>
@@ -17571,6 +18593,7 @@
           <a:lstStyle xmlns:a="http://schemas.openxmlformats.org/drawingml/2006/main"/>
           <a:p xmlns:a="http://schemas.openxmlformats.org/drawingml/2006/main">
             <a:pPr algn="ctr">
+              <a:buNone/>
               <a:defRPr sz="1725" b="1">
                 <a:solidFill>
                   <a:srgbClr val="28745A"/>
@@ -17746,6 +18769,7 @@
           <a:lstStyle xmlns:a="http://schemas.openxmlformats.org/drawingml/2006/main"/>
           <a:p xmlns:a="http://schemas.openxmlformats.org/drawingml/2006/main">
             <a:pPr algn="ctr">
+              <a:buNone/>
               <a:defRPr sz="1425" b="1">
                 <a:solidFill>
                   <a:srgbClr val="FFFFFF"/>
@@ -17803,6 +18827,7 @@
           <a:lstStyle xmlns:a="http://schemas.openxmlformats.org/drawingml/2006/main"/>
           <a:p xmlns:a="http://schemas.openxmlformats.org/drawingml/2006/main">
             <a:pPr algn="ctr">
+              <a:buNone/>
               <a:defRPr sz="1425" b="1">
                 <a:solidFill>
                   <a:srgbClr val="FFFFFF"/>
@@ -17856,6 +18881,7 @@
           <a:lstStyle xmlns:a="http://schemas.openxmlformats.org/drawingml/2006/main"/>
           <a:p xmlns:a="http://schemas.openxmlformats.org/drawingml/2006/main">
             <a:pPr algn="ctr">
+              <a:buNone/>
               <a:defRPr sz="1650" b="1">
                 <a:solidFill>
                   <a:srgbClr val="C8161E"/>
@@ -18007,6 +19033,7 @@
           <a:lstStyle xmlns:a="http://schemas.openxmlformats.org/drawingml/2006/main"/>
           <a:p xmlns:a="http://schemas.openxmlformats.org/drawingml/2006/main">
             <a:pPr algn="ctr">
+              <a:buNone/>
               <a:defRPr sz="1800" b="1">
                 <a:solidFill>
                   <a:srgbClr val="C8161E"/>
@@ -18064,6 +19091,7 @@
           <a:lstStyle xmlns:a="http://schemas.openxmlformats.org/drawingml/2006/main"/>
           <a:p xmlns:a="http://schemas.openxmlformats.org/drawingml/2006/main">
             <a:pPr algn="ctr">
+              <a:buNone/>
               <a:defRPr sz="1500" b="1">
                 <a:solidFill>
                   <a:srgbClr val="FFFFFF"/>
@@ -18121,6 +19149,7 @@
           <a:lstStyle xmlns:a="http://schemas.openxmlformats.org/drawingml/2006/main"/>
           <a:p xmlns:a="http://schemas.openxmlformats.org/drawingml/2006/main">
             <a:pPr algn="ctr">
+              <a:buNone/>
               <a:defRPr sz="1425" b="1">
                 <a:solidFill>
                   <a:srgbClr val="2F638A"/>
@@ -18241,6 +19270,7 @@
           <a:lstStyle xmlns:a="http://schemas.openxmlformats.org/drawingml/2006/main"/>
           <a:p xmlns:a="http://schemas.openxmlformats.org/drawingml/2006/main">
             <a:pPr algn="ctr">
+              <a:buNone/>
               <a:defRPr sz="1500" b="1">
                 <a:solidFill>
                   <a:srgbClr val="FFFFFF"/>
@@ -18298,6 +19328,7 @@
           <a:lstStyle xmlns:a="http://schemas.openxmlformats.org/drawingml/2006/main"/>
           <a:p xmlns:a="http://schemas.openxmlformats.org/drawingml/2006/main">
             <a:pPr algn="ctr">
+              <a:buNone/>
               <a:defRPr sz="1425" b="1">
                 <a:solidFill>
                   <a:srgbClr val="C8161E"/>
@@ -18418,6 +19449,7 @@
           <a:lstStyle xmlns:a="http://schemas.openxmlformats.org/drawingml/2006/main"/>
           <a:p xmlns:a="http://schemas.openxmlformats.org/drawingml/2006/main">
             <a:pPr algn="ctr">
+              <a:buNone/>
               <a:defRPr sz="1500" b="1">
                 <a:solidFill>
                   <a:srgbClr val="FFFFFF"/>
@@ -18475,6 +19507,7 @@
           <a:lstStyle xmlns:a="http://schemas.openxmlformats.org/drawingml/2006/main"/>
           <a:p xmlns:a="http://schemas.openxmlformats.org/drawingml/2006/main">
             <a:pPr algn="ctr">
+              <a:buNone/>
               <a:defRPr sz="1425" b="1">
                 <a:solidFill>
                   <a:srgbClr val="A86C12"/>
@@ -18591,6 +19624,7 @@
           <a:lstStyle xmlns:a="http://schemas.openxmlformats.org/drawingml/2006/main"/>
           <a:p xmlns:a="http://schemas.openxmlformats.org/drawingml/2006/main">
             <a:pPr algn="ctr">
+              <a:buNone/>
               <a:defRPr sz="1800" b="1">
                 <a:solidFill>
                   <a:srgbClr val="C8161E"/>
@@ -18742,6 +19776,7 @@
           <a:lstStyle xmlns:a="http://schemas.openxmlformats.org/drawingml/2006/main"/>
           <a:p xmlns:a="http://schemas.openxmlformats.org/drawingml/2006/main">
             <a:pPr algn="ctr">
+              <a:buNone/>
               <a:defRPr sz="1800" b="1">
                 <a:solidFill>
                   <a:srgbClr val="C8161E"/>
@@ -18797,6 +19832,7 @@
           <a:lstStyle xmlns:a="http://schemas.openxmlformats.org/drawingml/2006/main"/>
           <a:p xmlns:a="http://schemas.openxmlformats.org/drawingml/2006/main">
             <a:pPr algn="ctr">
+              <a:buNone/>
               <a:defRPr sz="1350" b="1">
                 <a:solidFill>
                   <a:srgbClr val="FFFFFF"/>
@@ -18852,6 +19888,7 @@
           <a:lstStyle xmlns:a="http://schemas.openxmlformats.org/drawingml/2006/main"/>
           <a:p xmlns:a="http://schemas.openxmlformats.org/drawingml/2006/main">
             <a:pPr algn="ctr">
+              <a:buNone/>
               <a:defRPr sz="1350" b="1">
                 <a:solidFill>
                   <a:srgbClr val="FFFFFF"/>
@@ -18907,6 +19944,7 @@
           <a:lstStyle xmlns:a="http://schemas.openxmlformats.org/drawingml/2006/main"/>
           <a:p xmlns:a="http://schemas.openxmlformats.org/drawingml/2006/main">
             <a:pPr algn="ctr">
+              <a:buNone/>
               <a:defRPr sz="1350" b="1">
                 <a:solidFill>
                   <a:srgbClr val="FFFFFF"/>
@@ -18962,6 +20000,7 @@
           <a:lstStyle xmlns:a="http://schemas.openxmlformats.org/drawingml/2006/main"/>
           <a:p xmlns:a="http://schemas.openxmlformats.org/drawingml/2006/main">
             <a:pPr algn="ctr">
+              <a:buNone/>
               <a:defRPr sz="1350" b="1">
                 <a:solidFill>
                   <a:srgbClr val="FFFFFF"/>
@@ -19017,6 +20056,7 @@
           <a:lstStyle xmlns:a="http://schemas.openxmlformats.org/drawingml/2006/main"/>
           <a:p xmlns:a="http://schemas.openxmlformats.org/drawingml/2006/main">
             <a:pPr algn="ctr">
+              <a:buNone/>
               <a:defRPr sz="1350" b="1">
                 <a:solidFill>
                   <a:srgbClr val="FFFFFF"/>
@@ -19072,6 +20112,7 @@
           <a:lstStyle xmlns:a="http://schemas.openxmlformats.org/drawingml/2006/main"/>
           <a:p xmlns:a="http://schemas.openxmlformats.org/drawingml/2006/main">
             <a:pPr algn="ctr">
+              <a:buNone/>
               <a:defRPr sz="1350" b="1">
                 <a:solidFill>
                   <a:srgbClr val="FFFFFF"/>
@@ -20227,6 +21268,7 @@
           <a:lstStyle xmlns:a="http://schemas.openxmlformats.org/drawingml/2006/main"/>
           <a:p xmlns:a="http://schemas.openxmlformats.org/drawingml/2006/main">
             <a:pPr algn="ctr">
+              <a:buNone/>
               <a:defRPr sz="1650" b="1">
                 <a:solidFill>
                   <a:srgbClr val="FFFFFF"/>
@@ -20378,6 +21420,7 @@
           <a:lstStyle xmlns:a="http://schemas.openxmlformats.org/drawingml/2006/main"/>
           <a:p xmlns:a="http://schemas.openxmlformats.org/drawingml/2006/main">
             <a:pPr algn="ctr">
+              <a:buNone/>
               <a:defRPr sz="1800" b="1">
                 <a:solidFill>
                   <a:srgbClr val="C8161E"/>
@@ -20435,6 +21478,7 @@
           <a:lstStyle xmlns:a="http://schemas.openxmlformats.org/drawingml/2006/main"/>
           <a:p xmlns:a="http://schemas.openxmlformats.org/drawingml/2006/main">
             <a:pPr algn="ctr">
+              <a:buNone/>
               <a:defRPr sz="1500" b="1">
                 <a:solidFill>
                   <a:srgbClr val="FFFFFF"/>
@@ -20492,6 +21536,7 @@
           <a:lstStyle xmlns:a="http://schemas.openxmlformats.org/drawingml/2006/main"/>
           <a:p xmlns:a="http://schemas.openxmlformats.org/drawingml/2006/main">
             <a:pPr algn="ctr">
+              <a:buNone/>
               <a:defRPr sz="1350" b="1">
                 <a:solidFill>
                   <a:srgbClr val="FFFFFF"/>
@@ -20547,6 +21592,7 @@
           <a:lstStyle xmlns:a="http://schemas.openxmlformats.org/drawingml/2006/main"/>
           <a:p xmlns:a="http://schemas.openxmlformats.org/drawingml/2006/main">
             <a:pPr algn="ctr">
+              <a:buNone/>
               <a:defRPr sz="1575" b="1">
                 <a:solidFill>
                   <a:srgbClr val="C8161E"/>
@@ -20606,6 +21652,7 @@
           <a:lstStyle xmlns:a="http://schemas.openxmlformats.org/drawingml/2006/main"/>
           <a:p xmlns:a="http://schemas.openxmlformats.org/drawingml/2006/main">
             <a:pPr algn="l">
+              <a:buNone/>
               <a:defRPr sz="1500" b="1">
                 <a:solidFill>
                   <a:srgbClr val="263746"/>
@@ -20663,6 +21710,7 @@
           <a:lstStyle xmlns:a="http://schemas.openxmlformats.org/drawingml/2006/main"/>
           <a:p xmlns:a="http://schemas.openxmlformats.org/drawingml/2006/main">
             <a:pPr algn="ctr">
+              <a:buNone/>
               <a:defRPr sz="1350" b="1">
                 <a:solidFill>
                   <a:srgbClr val="FFFFFF"/>
@@ -20718,6 +21766,7 @@
           <a:lstStyle xmlns:a="http://schemas.openxmlformats.org/drawingml/2006/main"/>
           <a:p xmlns:a="http://schemas.openxmlformats.org/drawingml/2006/main">
             <a:pPr algn="ctr">
+              <a:buNone/>
               <a:defRPr sz="1575" b="1">
                 <a:solidFill>
                   <a:srgbClr val="C8161E"/>
@@ -20777,6 +21826,7 @@
           <a:lstStyle xmlns:a="http://schemas.openxmlformats.org/drawingml/2006/main"/>
           <a:p xmlns:a="http://schemas.openxmlformats.org/drawingml/2006/main">
             <a:pPr algn="l">
+              <a:buNone/>
               <a:defRPr sz="1500" b="1">
                 <a:solidFill>
                   <a:srgbClr val="263746"/>
@@ -20834,6 +21884,7 @@
           <a:lstStyle xmlns:a="http://schemas.openxmlformats.org/drawingml/2006/main"/>
           <a:p xmlns:a="http://schemas.openxmlformats.org/drawingml/2006/main">
             <a:pPr algn="ctr">
+              <a:buNone/>
               <a:defRPr sz="1350" b="1">
                 <a:solidFill>
                   <a:srgbClr val="FFFFFF"/>
@@ -20889,6 +21940,7 @@
           <a:lstStyle xmlns:a="http://schemas.openxmlformats.org/drawingml/2006/main"/>
           <a:p xmlns:a="http://schemas.openxmlformats.org/drawingml/2006/main">
             <a:pPr algn="ctr">
+              <a:buNone/>
               <a:defRPr sz="1575" b="1">
                 <a:solidFill>
                   <a:srgbClr val="C8161E"/>
@@ -20948,6 +22000,7 @@
           <a:lstStyle xmlns:a="http://schemas.openxmlformats.org/drawingml/2006/main"/>
           <a:p xmlns:a="http://schemas.openxmlformats.org/drawingml/2006/main">
             <a:pPr algn="l">
+              <a:buNone/>
               <a:defRPr sz="1500" b="1">
                 <a:solidFill>
                   <a:srgbClr val="263746"/>
@@ -21005,6 +22058,7 @@
           <a:lstStyle xmlns:a="http://schemas.openxmlformats.org/drawingml/2006/main"/>
           <a:p xmlns:a="http://schemas.openxmlformats.org/drawingml/2006/main">
             <a:pPr algn="ctr">
+              <a:buNone/>
               <a:defRPr sz="1350" b="1">
                 <a:solidFill>
                   <a:srgbClr val="FFFFFF"/>
@@ -21060,6 +22114,7 @@
           <a:lstStyle xmlns:a="http://schemas.openxmlformats.org/drawingml/2006/main"/>
           <a:p xmlns:a="http://schemas.openxmlformats.org/drawingml/2006/main">
             <a:pPr algn="ctr">
+              <a:buNone/>
               <a:defRPr sz="1575" b="1">
                 <a:solidFill>
                   <a:srgbClr val="C8161E"/>
@@ -21119,6 +22174,7 @@
           <a:lstStyle xmlns:a="http://schemas.openxmlformats.org/drawingml/2006/main"/>
           <a:p xmlns:a="http://schemas.openxmlformats.org/drawingml/2006/main">
             <a:pPr algn="l">
+              <a:buNone/>
               <a:defRPr sz="1500" b="1">
                 <a:solidFill>
                   <a:srgbClr val="263746"/>
@@ -21174,6 +22230,7 @@
           <a:lstStyle xmlns:a="http://schemas.openxmlformats.org/drawingml/2006/main"/>
           <a:p xmlns:a="http://schemas.openxmlformats.org/drawingml/2006/main">
             <a:pPr algn="ctr">
+              <a:buNone/>
               <a:defRPr sz="1800" b="1">
                 <a:solidFill>
                   <a:srgbClr val="FFFFFF"/>
@@ -21343,6 +22400,7 @@
           <a:lstStyle xmlns:a="http://schemas.openxmlformats.org/drawingml/2006/main"/>
           <a:p xmlns:a="http://schemas.openxmlformats.org/drawingml/2006/main">
             <a:pPr algn="ctr">
+              <a:buNone/>
               <a:defRPr sz="1575" b="1">
                 <a:solidFill>
                   <a:srgbClr val="C8161E"/>
@@ -21400,6 +22458,7 @@
           <a:lstStyle xmlns:a="http://schemas.openxmlformats.org/drawingml/2006/main"/>
           <a:p xmlns:a="http://schemas.openxmlformats.org/drawingml/2006/main">
             <a:pPr algn="ctr">
+              <a:buNone/>
               <a:defRPr sz="1800" b="1">
                 <a:solidFill>
                   <a:srgbClr val="C8161E"/>
